--- a/concepts/diagrams/InteractionOfModules.pptx
+++ b/concepts/diagrams/InteractionOfModules.pptx
@@ -5,12 +5,14 @@
     <p:sldMasterId id="2147483696" r:id="rId1"/>
   </p:sldMasterIdLst>
   <p:sldIdLst>
-    <p:sldId id="280" r:id="rId2"/>
-    <p:sldId id="287" r:id="rId3"/>
-    <p:sldId id="286" r:id="rId4"/>
-    <p:sldId id="282" r:id="rId5"/>
-    <p:sldId id="285" r:id="rId6"/>
-    <p:sldId id="288" r:id="rId7"/>
+    <p:sldId id="289" r:id="rId2"/>
+    <p:sldId id="258" r:id="rId3"/>
+    <p:sldId id="280" r:id="rId4"/>
+    <p:sldId id="287" r:id="rId5"/>
+    <p:sldId id="286" r:id="rId6"/>
+    <p:sldId id="282" r:id="rId7"/>
+    <p:sldId id="285" r:id="rId8"/>
+    <p:sldId id="288" r:id="rId9"/>
   </p:sldIdLst>
   <p:sldSz cx="21599525" cy="12599988"/>
   <p:notesSz cx="6858000" cy="9144000"/>
@@ -248,7 +250,7 @@
           <a:p>
             <a:fld id="{9A2764DB-E7DF-4EA7-A1AF-05A77C280FCA}" type="datetimeFigureOut">
               <a:rPr lang="de-DE" smtClean="0"/>
-              <a:t>14.03.2025</a:t>
+              <a:t>26.03.2025</a:t>
             </a:fld>
             <a:endParaRPr lang="de-DE"/>
           </a:p>
@@ -418,7 +420,7 @@
           <a:p>
             <a:fld id="{9A2764DB-E7DF-4EA7-A1AF-05A77C280FCA}" type="datetimeFigureOut">
               <a:rPr lang="de-DE" smtClean="0"/>
-              <a:t>14.03.2025</a:t>
+              <a:t>26.03.2025</a:t>
             </a:fld>
             <a:endParaRPr lang="de-DE"/>
           </a:p>
@@ -598,7 +600,7 @@
           <a:p>
             <a:fld id="{9A2764DB-E7DF-4EA7-A1AF-05A77C280FCA}" type="datetimeFigureOut">
               <a:rPr lang="de-DE" smtClean="0"/>
-              <a:t>14.03.2025</a:t>
+              <a:t>26.03.2025</a:t>
             </a:fld>
             <a:endParaRPr lang="de-DE"/>
           </a:p>
@@ -768,7 +770,7 @@
           <a:p>
             <a:fld id="{9A2764DB-E7DF-4EA7-A1AF-05A77C280FCA}" type="datetimeFigureOut">
               <a:rPr lang="de-DE" smtClean="0"/>
-              <a:t>14.03.2025</a:t>
+              <a:t>26.03.2025</a:t>
             </a:fld>
             <a:endParaRPr lang="de-DE"/>
           </a:p>
@@ -1014,7 +1016,7 @@
           <a:p>
             <a:fld id="{9A2764DB-E7DF-4EA7-A1AF-05A77C280FCA}" type="datetimeFigureOut">
               <a:rPr lang="de-DE" smtClean="0"/>
-              <a:t>14.03.2025</a:t>
+              <a:t>26.03.2025</a:t>
             </a:fld>
             <a:endParaRPr lang="de-DE"/>
           </a:p>
@@ -1246,7 +1248,7 @@
           <a:p>
             <a:fld id="{9A2764DB-E7DF-4EA7-A1AF-05A77C280FCA}" type="datetimeFigureOut">
               <a:rPr lang="de-DE" smtClean="0"/>
-              <a:t>14.03.2025</a:t>
+              <a:t>26.03.2025</a:t>
             </a:fld>
             <a:endParaRPr lang="de-DE"/>
           </a:p>
@@ -1613,7 +1615,7 @@
           <a:p>
             <a:fld id="{9A2764DB-E7DF-4EA7-A1AF-05A77C280FCA}" type="datetimeFigureOut">
               <a:rPr lang="de-DE" smtClean="0"/>
-              <a:t>14.03.2025</a:t>
+              <a:t>26.03.2025</a:t>
             </a:fld>
             <a:endParaRPr lang="de-DE"/>
           </a:p>
@@ -1731,7 +1733,7 @@
           <a:p>
             <a:fld id="{9A2764DB-E7DF-4EA7-A1AF-05A77C280FCA}" type="datetimeFigureOut">
               <a:rPr lang="de-DE" smtClean="0"/>
-              <a:t>14.03.2025</a:t>
+              <a:t>26.03.2025</a:t>
             </a:fld>
             <a:endParaRPr lang="de-DE"/>
           </a:p>
@@ -1826,7 +1828,7 @@
           <a:p>
             <a:fld id="{9A2764DB-E7DF-4EA7-A1AF-05A77C280FCA}" type="datetimeFigureOut">
               <a:rPr lang="de-DE" smtClean="0"/>
-              <a:t>14.03.2025</a:t>
+              <a:t>26.03.2025</a:t>
             </a:fld>
             <a:endParaRPr lang="de-DE"/>
           </a:p>
@@ -2103,7 +2105,7 @@
           <a:p>
             <a:fld id="{9A2764DB-E7DF-4EA7-A1AF-05A77C280FCA}" type="datetimeFigureOut">
               <a:rPr lang="de-DE" smtClean="0"/>
-              <a:t>14.03.2025</a:t>
+              <a:t>26.03.2025</a:t>
             </a:fld>
             <a:endParaRPr lang="de-DE"/>
           </a:p>
@@ -2360,7 +2362,7 @@
           <a:p>
             <a:fld id="{9A2764DB-E7DF-4EA7-A1AF-05A77C280FCA}" type="datetimeFigureOut">
               <a:rPr lang="de-DE" smtClean="0"/>
-              <a:t>14.03.2025</a:t>
+              <a:t>26.03.2025</a:t>
             </a:fld>
             <a:endParaRPr lang="de-DE"/>
           </a:p>
@@ -2573,7 +2575,7 @@
           <a:p>
             <a:fld id="{9A2764DB-E7DF-4EA7-A1AF-05A77C280FCA}" type="datetimeFigureOut">
               <a:rPr lang="de-DE" smtClean="0"/>
-              <a:t>14.03.2025</a:t>
+              <a:t>26.03.2025</a:t>
             </a:fld>
             <a:endParaRPr lang="de-DE"/>
           </a:p>
@@ -2962,6 +2964,3785 @@
 </file>
 
 <file path=ppt/slides/slide1.xml><?xml version="1.0" encoding="utf-8"?>
+<p:sld xmlns:a="http://schemas.openxmlformats.org/drawingml/2006/main" xmlns:r="http://schemas.openxmlformats.org/officeDocument/2006/relationships" xmlns:p="http://schemas.openxmlformats.org/presentationml/2006/main">
+  <p:cSld>
+    <p:spTree>
+      <p:nvGrpSpPr>
+        <p:cNvPr id="1" name=""/>
+        <p:cNvGrpSpPr/>
+        <p:nvPr/>
+      </p:nvGrpSpPr>
+      <p:grpSpPr>
+        <a:xfrm>
+          <a:off x="0" y="0"/>
+          <a:ext cx="0" cy="0"/>
+          <a:chOff x="0" y="0"/>
+          <a:chExt cx="0" cy="0"/>
+        </a:xfrm>
+      </p:grpSpPr>
+      <p:sp>
+        <p:nvSpPr>
+          <p:cNvPr id="4" name="Ellipse 3">
+            <a:extLst>
+              <a:ext uri="{FF2B5EF4-FFF2-40B4-BE49-F238E27FC236}">
+                <a16:creationId xmlns:a16="http://schemas.microsoft.com/office/drawing/2014/main" id="{5218ADE7-149F-AEAA-E16C-ECC717D52C18}"/>
+              </a:ext>
+            </a:extLst>
+          </p:cNvPr>
+          <p:cNvSpPr>
+            <a:spLocks noChangeAspect="1"/>
+          </p:cNvSpPr>
+          <p:nvPr/>
+        </p:nvSpPr>
+        <p:spPr>
+          <a:xfrm>
+            <a:off x="1402916" y="1149658"/>
+            <a:ext cx="3006246" cy="3006246"/>
+          </a:xfrm>
+          <a:prstGeom prst="ellipse">
+            <a:avLst/>
+          </a:prstGeom>
+          <a:solidFill>
+            <a:schemeClr val="bg1">
+              <a:lumMod val="95000"/>
+            </a:schemeClr>
+          </a:solidFill>
+          <a:ln/>
+        </p:spPr>
+        <p:style>
+          <a:lnRef idx="2">
+            <a:schemeClr val="accent5"/>
+          </a:lnRef>
+          <a:fillRef idx="1">
+            <a:schemeClr val="lt1"/>
+          </a:fillRef>
+          <a:effectRef idx="0">
+            <a:schemeClr val="accent5"/>
+          </a:effectRef>
+          <a:fontRef idx="minor">
+            <a:schemeClr val="dk1"/>
+          </a:fontRef>
+        </p:style>
+        <p:txBody>
+          <a:bodyPr rtlCol="0" anchor="t"/>
+          <a:lstStyle/>
+          <a:p>
+            <a:r>
+              <a:rPr lang="de-DE" sz="2400">
+                <a:solidFill>
+                  <a:schemeClr val="tx1"/>
+                </a:solidFill>
+              </a:rPr>
+              <a:t>MO</a:t>
+            </a:r>
+          </a:p>
+          <a:p>
+            <a:pPr algn="ctr"/>
+            <a:endParaRPr lang="de-DE" sz="2400">
+              <a:solidFill>
+                <a:schemeClr val="tx1"/>
+              </a:solidFill>
+            </a:endParaRPr>
+          </a:p>
+        </p:txBody>
+      </p:sp>
+      <p:sp>
+        <p:nvSpPr>
+          <p:cNvPr id="3" name="Ellipse 2">
+            <a:extLst>
+              <a:ext uri="{FF2B5EF4-FFF2-40B4-BE49-F238E27FC236}">
+                <a16:creationId xmlns:a16="http://schemas.microsoft.com/office/drawing/2014/main" id="{675DA3A0-6949-EFCF-D48A-61E182577535}"/>
+              </a:ext>
+            </a:extLst>
+          </p:cNvPr>
+          <p:cNvSpPr>
+            <a:spLocks noChangeAspect="1"/>
+          </p:cNvSpPr>
+          <p:nvPr/>
+        </p:nvSpPr>
+        <p:spPr>
+          <a:xfrm>
+            <a:off x="2360885" y="2187419"/>
+            <a:ext cx="1800000" cy="1800000"/>
+          </a:xfrm>
+          <a:prstGeom prst="ellipse">
+            <a:avLst/>
+          </a:prstGeom>
+          <a:solidFill>
+            <a:schemeClr val="bg1">
+              <a:lumMod val="85000"/>
+            </a:schemeClr>
+          </a:solidFill>
+          <a:ln/>
+        </p:spPr>
+        <p:style>
+          <a:lnRef idx="2">
+            <a:schemeClr val="accent4"/>
+          </a:lnRef>
+          <a:fillRef idx="1">
+            <a:schemeClr val="lt1"/>
+          </a:fillRef>
+          <a:effectRef idx="0">
+            <a:schemeClr val="accent4"/>
+          </a:effectRef>
+          <a:fontRef idx="minor">
+            <a:schemeClr val="dk1"/>
+          </a:fontRef>
+        </p:style>
+        <p:txBody>
+          <a:bodyPr rtlCol="0" anchor="t"/>
+          <a:lstStyle/>
+          <a:p>
+            <a:r>
+              <a:rPr lang="de-DE" sz="2400">
+                <a:solidFill>
+                  <a:schemeClr val="tx1"/>
+                </a:solidFill>
+              </a:rPr>
+              <a:t>NIM</a:t>
+            </a:r>
+          </a:p>
+          <a:p>
+            <a:pPr algn="ctr"/>
+            <a:endParaRPr lang="de-DE" sz="2400">
+              <a:solidFill>
+                <a:schemeClr val="tx1"/>
+              </a:solidFill>
+            </a:endParaRPr>
+          </a:p>
+        </p:txBody>
+      </p:sp>
+      <p:sp>
+        <p:nvSpPr>
+          <p:cNvPr id="2" name="Ellipse 1">
+            <a:extLst>
+              <a:ext uri="{FF2B5EF4-FFF2-40B4-BE49-F238E27FC236}">
+                <a16:creationId xmlns:a16="http://schemas.microsoft.com/office/drawing/2014/main" id="{F80BB42F-C061-5BD7-590A-36D407385D41}"/>
+              </a:ext>
+            </a:extLst>
+          </p:cNvPr>
+          <p:cNvSpPr/>
+          <p:nvPr/>
+        </p:nvSpPr>
+        <p:spPr>
+          <a:xfrm>
+            <a:off x="3152787" y="3087419"/>
+            <a:ext cx="720000" cy="720000"/>
+          </a:xfrm>
+          <a:prstGeom prst="ellipse">
+            <a:avLst/>
+          </a:prstGeom>
+          <a:ln/>
+        </p:spPr>
+        <p:style>
+          <a:lnRef idx="2">
+            <a:schemeClr val="accent6"/>
+          </a:lnRef>
+          <a:fillRef idx="1">
+            <a:schemeClr val="lt1"/>
+          </a:fillRef>
+          <a:effectRef idx="0">
+            <a:schemeClr val="accent6"/>
+          </a:effectRef>
+          <a:fontRef idx="minor">
+            <a:schemeClr val="dk1"/>
+          </a:fontRef>
+        </p:style>
+        <p:txBody>
+          <a:bodyPr lIns="0" tIns="0" rIns="0" bIns="0" rtlCol="0" anchor="ctr"/>
+          <a:lstStyle/>
+          <a:p>
+            <a:pPr algn="ctr"/>
+            <a:r>
+              <a:rPr lang="de-DE" sz="2000">
+                <a:solidFill>
+                  <a:schemeClr val="tx1"/>
+                </a:solidFill>
+              </a:rPr>
+              <a:t>MIM</a:t>
+            </a:r>
+          </a:p>
+        </p:txBody>
+      </p:sp>
+      <p:cxnSp>
+        <p:nvCxnSpPr>
+          <p:cNvPr id="6" name="Gerader Verbinder 5">
+            <a:extLst>
+              <a:ext uri="{FF2B5EF4-FFF2-40B4-BE49-F238E27FC236}">
+                <a16:creationId xmlns:a16="http://schemas.microsoft.com/office/drawing/2014/main" id="{14E7114E-39A2-E921-2ED6-4699B05E2E15}"/>
+              </a:ext>
+            </a:extLst>
+          </p:cNvPr>
+          <p:cNvCxnSpPr/>
+          <p:nvPr/>
+        </p:nvCxnSpPr>
+        <p:spPr>
+          <a:xfrm>
+            <a:off x="4521896" y="730036"/>
+            <a:ext cx="0" cy="3845490"/>
+          </a:xfrm>
+          <a:prstGeom prst="line">
+            <a:avLst/>
+          </a:prstGeom>
+        </p:spPr>
+        <p:style>
+          <a:lnRef idx="2">
+            <a:schemeClr val="accent1"/>
+          </a:lnRef>
+          <a:fillRef idx="0">
+            <a:schemeClr val="accent1"/>
+          </a:fillRef>
+          <a:effectRef idx="1">
+            <a:schemeClr val="accent1"/>
+          </a:effectRef>
+          <a:fontRef idx="minor">
+            <a:schemeClr val="tx1"/>
+          </a:fontRef>
+        </p:style>
+      </p:cxnSp>
+      <p:cxnSp>
+        <p:nvCxnSpPr>
+          <p:cNvPr id="7" name="Gerader Verbinder 6">
+            <a:extLst>
+              <a:ext uri="{FF2B5EF4-FFF2-40B4-BE49-F238E27FC236}">
+                <a16:creationId xmlns:a16="http://schemas.microsoft.com/office/drawing/2014/main" id="{86844F7E-DBA0-E020-52CD-43026421C539}"/>
+              </a:ext>
+            </a:extLst>
+          </p:cNvPr>
+          <p:cNvCxnSpPr>
+            <a:cxnSpLocks/>
+          </p:cNvCxnSpPr>
+          <p:nvPr/>
+        </p:nvCxnSpPr>
+        <p:spPr>
+          <a:xfrm rot="16200000">
+            <a:off x="2906039" y="2359914"/>
+            <a:ext cx="0" cy="3845490"/>
+          </a:xfrm>
+          <a:prstGeom prst="line">
+            <a:avLst/>
+          </a:prstGeom>
+        </p:spPr>
+        <p:style>
+          <a:lnRef idx="2">
+            <a:schemeClr val="accent1"/>
+          </a:lnRef>
+          <a:fillRef idx="0">
+            <a:schemeClr val="accent1"/>
+          </a:fillRef>
+          <a:effectRef idx="1">
+            <a:schemeClr val="accent1"/>
+          </a:effectRef>
+          <a:fontRef idx="minor">
+            <a:schemeClr val="tx1"/>
+          </a:fontRef>
+        </p:style>
+      </p:cxnSp>
+      <p:sp>
+        <p:nvSpPr>
+          <p:cNvPr id="8" name="Ellipse 7">
+            <a:extLst>
+              <a:ext uri="{FF2B5EF4-FFF2-40B4-BE49-F238E27FC236}">
+                <a16:creationId xmlns:a16="http://schemas.microsoft.com/office/drawing/2014/main" id="{4E2F49D3-045E-490E-E5E5-D56137E4398B}"/>
+              </a:ext>
+            </a:extLst>
+          </p:cNvPr>
+          <p:cNvSpPr>
+            <a:spLocks noChangeAspect="1"/>
+          </p:cNvSpPr>
+          <p:nvPr/>
+        </p:nvSpPr>
+        <p:spPr>
+          <a:xfrm>
+            <a:off x="5749447" y="1149658"/>
+            <a:ext cx="3006246" cy="3006246"/>
+          </a:xfrm>
+          <a:prstGeom prst="ellipse">
+            <a:avLst/>
+          </a:prstGeom>
+          <a:solidFill>
+            <a:schemeClr val="bg1">
+              <a:lumMod val="95000"/>
+            </a:schemeClr>
+          </a:solidFill>
+          <a:ln/>
+        </p:spPr>
+        <p:style>
+          <a:lnRef idx="2">
+            <a:schemeClr val="accent5"/>
+          </a:lnRef>
+          <a:fillRef idx="1">
+            <a:schemeClr val="lt1"/>
+          </a:fillRef>
+          <a:effectRef idx="0">
+            <a:schemeClr val="accent5"/>
+          </a:effectRef>
+          <a:fontRef idx="minor">
+            <a:schemeClr val="dk1"/>
+          </a:fontRef>
+        </p:style>
+        <p:txBody>
+          <a:bodyPr rtlCol="0" anchor="t"/>
+          <a:lstStyle/>
+          <a:p>
+            <a:r>
+              <a:rPr lang="de-DE" sz="2400">
+                <a:solidFill>
+                  <a:schemeClr val="tx1"/>
+                </a:solidFill>
+              </a:rPr>
+              <a:t>RCM</a:t>
+            </a:r>
+          </a:p>
+          <a:p>
+            <a:pPr algn="ctr"/>
+            <a:endParaRPr lang="de-DE" sz="2400">
+              <a:solidFill>
+                <a:schemeClr val="tx1"/>
+              </a:solidFill>
+            </a:endParaRPr>
+          </a:p>
+        </p:txBody>
+      </p:sp>
+      <p:sp>
+        <p:nvSpPr>
+          <p:cNvPr id="9" name="Ellipse 8">
+            <a:extLst>
+              <a:ext uri="{FF2B5EF4-FFF2-40B4-BE49-F238E27FC236}">
+                <a16:creationId xmlns:a16="http://schemas.microsoft.com/office/drawing/2014/main" id="{86F3769D-F5C1-C78A-E482-6458F11DA1C9}"/>
+              </a:ext>
+            </a:extLst>
+          </p:cNvPr>
+          <p:cNvSpPr>
+            <a:spLocks noChangeAspect="1"/>
+          </p:cNvSpPr>
+          <p:nvPr/>
+        </p:nvSpPr>
+        <p:spPr>
+          <a:xfrm>
+            <a:off x="6707416" y="2187419"/>
+            <a:ext cx="1800000" cy="1800000"/>
+          </a:xfrm>
+          <a:prstGeom prst="ellipse">
+            <a:avLst/>
+          </a:prstGeom>
+          <a:solidFill>
+            <a:schemeClr val="bg1">
+              <a:lumMod val="85000"/>
+            </a:schemeClr>
+          </a:solidFill>
+          <a:ln/>
+        </p:spPr>
+        <p:style>
+          <a:lnRef idx="2">
+            <a:schemeClr val="accent4"/>
+          </a:lnRef>
+          <a:fillRef idx="1">
+            <a:schemeClr val="lt1"/>
+          </a:fillRef>
+          <a:effectRef idx="0">
+            <a:schemeClr val="accent4"/>
+          </a:effectRef>
+          <a:fontRef idx="minor">
+            <a:schemeClr val="dk1"/>
+          </a:fontRef>
+        </p:style>
+        <p:txBody>
+          <a:bodyPr rtlCol="0" anchor="t"/>
+          <a:lstStyle/>
+          <a:p>
+            <a:r>
+              <a:rPr lang="de-DE" sz="2400">
+                <a:solidFill>
+                  <a:schemeClr val="tx1"/>
+                </a:solidFill>
+              </a:rPr>
+              <a:t>NCM</a:t>
+            </a:r>
+          </a:p>
+          <a:p>
+            <a:pPr algn="ctr"/>
+            <a:endParaRPr lang="de-DE" sz="2400">
+              <a:solidFill>
+                <a:schemeClr val="tx1"/>
+              </a:solidFill>
+            </a:endParaRPr>
+          </a:p>
+        </p:txBody>
+      </p:sp>
+      <p:sp>
+        <p:nvSpPr>
+          <p:cNvPr id="10" name="Ellipse 9">
+            <a:extLst>
+              <a:ext uri="{FF2B5EF4-FFF2-40B4-BE49-F238E27FC236}">
+                <a16:creationId xmlns:a16="http://schemas.microsoft.com/office/drawing/2014/main" id="{AB0B8231-E9DB-17CF-1BDF-87E132EFC754}"/>
+              </a:ext>
+            </a:extLst>
+          </p:cNvPr>
+          <p:cNvSpPr/>
+          <p:nvPr/>
+        </p:nvSpPr>
+        <p:spPr>
+          <a:xfrm>
+            <a:off x="7499318" y="3087419"/>
+            <a:ext cx="720000" cy="720000"/>
+          </a:xfrm>
+          <a:prstGeom prst="ellipse">
+            <a:avLst/>
+          </a:prstGeom>
+          <a:ln/>
+        </p:spPr>
+        <p:style>
+          <a:lnRef idx="2">
+            <a:schemeClr val="accent6"/>
+          </a:lnRef>
+          <a:fillRef idx="1">
+            <a:schemeClr val="lt1"/>
+          </a:fillRef>
+          <a:effectRef idx="0">
+            <a:schemeClr val="accent6"/>
+          </a:effectRef>
+          <a:fontRef idx="minor">
+            <a:schemeClr val="dk1"/>
+          </a:fontRef>
+        </p:style>
+        <p:txBody>
+          <a:bodyPr lIns="0" tIns="0" rIns="0" bIns="0" rtlCol="0" anchor="ctr"/>
+          <a:lstStyle/>
+          <a:p>
+            <a:pPr algn="ctr"/>
+            <a:r>
+              <a:rPr lang="de-DE">
+                <a:solidFill>
+                  <a:schemeClr val="tx1"/>
+                </a:solidFill>
+              </a:rPr>
+              <a:t>SCM</a:t>
+            </a:r>
+          </a:p>
+        </p:txBody>
+      </p:sp>
+      <p:cxnSp>
+        <p:nvCxnSpPr>
+          <p:cNvPr id="11" name="Gerader Verbinder 10">
+            <a:extLst>
+              <a:ext uri="{FF2B5EF4-FFF2-40B4-BE49-F238E27FC236}">
+                <a16:creationId xmlns:a16="http://schemas.microsoft.com/office/drawing/2014/main" id="{515FA688-FD44-D74E-A0FA-5B656F25129F}"/>
+              </a:ext>
+            </a:extLst>
+          </p:cNvPr>
+          <p:cNvCxnSpPr/>
+          <p:nvPr/>
+        </p:nvCxnSpPr>
+        <p:spPr>
+          <a:xfrm>
+            <a:off x="8868427" y="730036"/>
+            <a:ext cx="0" cy="3845490"/>
+          </a:xfrm>
+          <a:prstGeom prst="line">
+            <a:avLst/>
+          </a:prstGeom>
+        </p:spPr>
+        <p:style>
+          <a:lnRef idx="2">
+            <a:schemeClr val="accent1"/>
+          </a:lnRef>
+          <a:fillRef idx="0">
+            <a:schemeClr val="accent1"/>
+          </a:fillRef>
+          <a:effectRef idx="1">
+            <a:schemeClr val="accent1"/>
+          </a:effectRef>
+          <a:fontRef idx="minor">
+            <a:schemeClr val="tx1"/>
+          </a:fontRef>
+        </p:style>
+      </p:cxnSp>
+      <p:cxnSp>
+        <p:nvCxnSpPr>
+          <p:cNvPr id="12" name="Gerader Verbinder 11">
+            <a:extLst>
+              <a:ext uri="{FF2B5EF4-FFF2-40B4-BE49-F238E27FC236}">
+                <a16:creationId xmlns:a16="http://schemas.microsoft.com/office/drawing/2014/main" id="{44F73EA6-CABB-B847-4C30-11316CACFA5A}"/>
+              </a:ext>
+            </a:extLst>
+          </p:cNvPr>
+          <p:cNvCxnSpPr>
+            <a:cxnSpLocks/>
+          </p:cNvCxnSpPr>
+          <p:nvPr/>
+        </p:nvCxnSpPr>
+        <p:spPr>
+          <a:xfrm rot="16200000">
+            <a:off x="7252570" y="2359914"/>
+            <a:ext cx="0" cy="3845490"/>
+          </a:xfrm>
+          <a:prstGeom prst="line">
+            <a:avLst/>
+          </a:prstGeom>
+        </p:spPr>
+        <p:style>
+          <a:lnRef idx="2">
+            <a:schemeClr val="accent1"/>
+          </a:lnRef>
+          <a:fillRef idx="0">
+            <a:schemeClr val="accent1"/>
+          </a:fillRef>
+          <a:effectRef idx="1">
+            <a:schemeClr val="accent1"/>
+          </a:effectRef>
+          <a:fontRef idx="minor">
+            <a:schemeClr val="tx1"/>
+          </a:fontRef>
+        </p:style>
+      </p:cxnSp>
+    </p:spTree>
+    <p:extLst>
+      <p:ext uri="{BB962C8B-B14F-4D97-AF65-F5344CB8AC3E}">
+        <p14:creationId xmlns:p14="http://schemas.microsoft.com/office/powerpoint/2010/main" val="2534781098"/>
+      </p:ext>
+    </p:extLst>
+  </p:cSld>
+  <p:clrMapOvr>
+    <a:masterClrMapping/>
+  </p:clrMapOvr>
+</p:sld>
+</file>
+
+<file path=ppt/slides/slide2.xml><?xml version="1.0" encoding="utf-8"?>
+<p:sld xmlns:a="http://schemas.openxmlformats.org/drawingml/2006/main" xmlns:r="http://schemas.openxmlformats.org/officeDocument/2006/relationships" xmlns:p="http://schemas.openxmlformats.org/presentationml/2006/main">
+  <p:cSld>
+    <p:spTree>
+      <p:nvGrpSpPr>
+        <p:cNvPr id="1" name=""/>
+        <p:cNvGrpSpPr/>
+        <p:nvPr/>
+      </p:nvGrpSpPr>
+      <p:grpSpPr>
+        <a:xfrm>
+          <a:off x="0" y="0"/>
+          <a:ext cx="0" cy="0"/>
+          <a:chOff x="0" y="0"/>
+          <a:chExt cx="0" cy="0"/>
+        </a:xfrm>
+      </p:grpSpPr>
+      <p:sp>
+        <p:nvSpPr>
+          <p:cNvPr id="25" name="Rechteck 24">
+            <a:extLst>
+              <a:ext uri="{FF2B5EF4-FFF2-40B4-BE49-F238E27FC236}">
+                <a16:creationId xmlns:a16="http://schemas.microsoft.com/office/drawing/2014/main" id="{94075D25-CDA8-F234-39C9-86E1C2A49D1B}"/>
+              </a:ext>
+            </a:extLst>
+          </p:cNvPr>
+          <p:cNvSpPr/>
+          <p:nvPr/>
+        </p:nvSpPr>
+        <p:spPr>
+          <a:xfrm>
+            <a:off x="5410061" y="4649079"/>
+            <a:ext cx="1676301" cy="1005781"/>
+          </a:xfrm>
+          <a:prstGeom prst="rect">
+            <a:avLst/>
+          </a:prstGeom>
+          <a:solidFill>
+            <a:schemeClr val="accent1">
+              <a:alpha val="28000"/>
+            </a:schemeClr>
+          </a:solidFill>
+        </p:spPr>
+        <p:style>
+          <a:lnRef idx="2">
+            <a:schemeClr val="accent1">
+              <a:shade val="15000"/>
+            </a:schemeClr>
+          </a:lnRef>
+          <a:fillRef idx="1">
+            <a:schemeClr val="accent1"/>
+          </a:fillRef>
+          <a:effectRef idx="0">
+            <a:schemeClr val="accent1"/>
+          </a:effectRef>
+          <a:fontRef idx="minor">
+            <a:schemeClr val="lt1"/>
+          </a:fontRef>
+        </p:style>
+        <p:txBody>
+          <a:bodyPr rtlCol="0" anchor="ctr"/>
+          <a:lstStyle/>
+          <a:p>
+            <a:pPr algn="ctr"/>
+            <a:r>
+              <a:rPr lang="de-DE" sz="2160">
+                <a:solidFill>
+                  <a:schemeClr val="tx1">
+                    <a:lumMod val="75000"/>
+                    <a:lumOff val="25000"/>
+                  </a:schemeClr>
+                </a:solidFill>
+              </a:rPr>
+              <a:t>mediatorVM</a:t>
+            </a:r>
+          </a:p>
+          <a:p>
+            <a:r>
+              <a:rPr lang="de-DE" sz="1320">
+                <a:solidFill>
+                  <a:schemeClr val="tx1">
+                    <a:lumMod val="75000"/>
+                    <a:lumOff val="25000"/>
+                  </a:schemeClr>
+                </a:solidFill>
+              </a:rPr>
+              <a:t>mediatorProcess</a:t>
+            </a:r>
+          </a:p>
+        </p:txBody>
+      </p:sp>
+      <p:sp>
+        <p:nvSpPr>
+          <p:cNvPr id="4" name="Rechteck 3">
+            <a:extLst>
+              <a:ext uri="{FF2B5EF4-FFF2-40B4-BE49-F238E27FC236}">
+                <a16:creationId xmlns:a16="http://schemas.microsoft.com/office/drawing/2014/main" id="{57C349C4-9D91-1431-A139-33AEE673A522}"/>
+              </a:ext>
+            </a:extLst>
+          </p:cNvPr>
+          <p:cNvSpPr/>
+          <p:nvPr/>
+        </p:nvSpPr>
+        <p:spPr>
+          <a:xfrm>
+            <a:off x="1519007" y="4649080"/>
+            <a:ext cx="1676301" cy="1005781"/>
+          </a:xfrm>
+          <a:prstGeom prst="rect">
+            <a:avLst/>
+          </a:prstGeom>
+          <a:solidFill>
+            <a:schemeClr val="accent1">
+              <a:alpha val="28000"/>
+            </a:schemeClr>
+          </a:solidFill>
+        </p:spPr>
+        <p:style>
+          <a:lnRef idx="2">
+            <a:schemeClr val="accent1">
+              <a:shade val="15000"/>
+            </a:schemeClr>
+          </a:lnRef>
+          <a:fillRef idx="1">
+            <a:schemeClr val="accent1"/>
+          </a:fillRef>
+          <a:effectRef idx="0">
+            <a:schemeClr val="accent1"/>
+          </a:effectRef>
+          <a:fontRef idx="minor">
+            <a:schemeClr val="lt1"/>
+          </a:fontRef>
+        </p:style>
+        <p:txBody>
+          <a:bodyPr rtlCol="0" anchor="ctr"/>
+          <a:lstStyle/>
+          <a:p>
+            <a:pPr algn="ctr"/>
+            <a:r>
+              <a:rPr lang="de-DE" sz="2160">
+                <a:solidFill>
+                  <a:schemeClr val="tx1">
+                    <a:lumMod val="75000"/>
+                    <a:lumOff val="25000"/>
+                  </a:schemeClr>
+                </a:solidFill>
+              </a:rPr>
+              <a:t>mediatorVM</a:t>
+            </a:r>
+          </a:p>
+          <a:p>
+            <a:r>
+              <a:rPr lang="de-DE" sz="1320">
+                <a:solidFill>
+                  <a:schemeClr val="tx1">
+                    <a:lumMod val="75000"/>
+                    <a:lumOff val="25000"/>
+                  </a:schemeClr>
+                </a:solidFill>
+              </a:rPr>
+              <a:t>mediatorProcess</a:t>
+            </a:r>
+          </a:p>
+        </p:txBody>
+      </p:sp>
+      <p:sp>
+        <p:nvSpPr>
+          <p:cNvPr id="5" name="Ellipse 4">
+            <a:extLst>
+              <a:ext uri="{FF2B5EF4-FFF2-40B4-BE49-F238E27FC236}">
+                <a16:creationId xmlns:a16="http://schemas.microsoft.com/office/drawing/2014/main" id="{7F6D26E3-0A36-6BB9-CF33-F53D492067FF}"/>
+              </a:ext>
+            </a:extLst>
+          </p:cNvPr>
+          <p:cNvSpPr/>
+          <p:nvPr/>
+        </p:nvSpPr>
+        <p:spPr>
+          <a:xfrm>
+            <a:off x="2937276" y="5332303"/>
+            <a:ext cx="284464" cy="264144"/>
+          </a:xfrm>
+          <a:prstGeom prst="ellipse">
+            <a:avLst/>
+          </a:prstGeom>
+          <a:solidFill>
+            <a:schemeClr val="accent1">
+              <a:alpha val="28000"/>
+            </a:schemeClr>
+          </a:solidFill>
+        </p:spPr>
+        <p:style>
+          <a:lnRef idx="2">
+            <a:schemeClr val="accent2">
+              <a:shade val="15000"/>
+            </a:schemeClr>
+          </a:lnRef>
+          <a:fillRef idx="1">
+            <a:schemeClr val="accent2"/>
+          </a:fillRef>
+          <a:effectRef idx="0">
+            <a:schemeClr val="accent2"/>
+          </a:effectRef>
+          <a:fontRef idx="minor">
+            <a:schemeClr val="lt1"/>
+          </a:fontRef>
+        </p:style>
+        <p:txBody>
+          <a:bodyPr rtlCol="0" anchor="ctr"/>
+          <a:lstStyle/>
+          <a:p>
+            <a:pPr algn="ctr"/>
+            <a:endParaRPr lang="de-DE" sz="2160">
+              <a:solidFill>
+                <a:schemeClr val="tx1">
+                  <a:lumMod val="75000"/>
+                  <a:lumOff val="25000"/>
+                </a:schemeClr>
+              </a:solidFill>
+            </a:endParaRPr>
+          </a:p>
+        </p:txBody>
+      </p:sp>
+      <p:sp>
+        <p:nvSpPr>
+          <p:cNvPr id="6" name="Rechteck 5">
+            <a:extLst>
+              <a:ext uri="{FF2B5EF4-FFF2-40B4-BE49-F238E27FC236}">
+                <a16:creationId xmlns:a16="http://schemas.microsoft.com/office/drawing/2014/main" id="{B93278D7-67C4-F0B3-F6BF-FFCCB4978F19}"/>
+              </a:ext>
+            </a:extLst>
+          </p:cNvPr>
+          <p:cNvSpPr/>
+          <p:nvPr/>
+        </p:nvSpPr>
+        <p:spPr>
+          <a:xfrm>
+            <a:off x="1519007" y="3158186"/>
+            <a:ext cx="1676301" cy="1005781"/>
+          </a:xfrm>
+          <a:prstGeom prst="rect">
+            <a:avLst/>
+          </a:prstGeom>
+          <a:solidFill>
+            <a:schemeClr val="accent1">
+              <a:alpha val="28000"/>
+            </a:schemeClr>
+          </a:solidFill>
+        </p:spPr>
+        <p:style>
+          <a:lnRef idx="2">
+            <a:schemeClr val="accent1">
+              <a:shade val="15000"/>
+            </a:schemeClr>
+          </a:lnRef>
+          <a:fillRef idx="1">
+            <a:schemeClr val="accent1"/>
+          </a:fillRef>
+          <a:effectRef idx="0">
+            <a:schemeClr val="accent1"/>
+          </a:effectRef>
+          <a:fontRef idx="minor">
+            <a:schemeClr val="lt1"/>
+          </a:fontRef>
+        </p:style>
+        <p:txBody>
+          <a:bodyPr rtlCol="0" anchor="ctr"/>
+          <a:lstStyle/>
+          <a:p>
+            <a:pPr algn="ctr"/>
+            <a:r>
+              <a:rPr lang="de-DE" sz="2160">
+                <a:solidFill>
+                  <a:schemeClr val="tx1">
+                    <a:lumMod val="75000"/>
+                    <a:lumOff val="25000"/>
+                  </a:schemeClr>
+                </a:solidFill>
+              </a:rPr>
+              <a:t>Controller</a:t>
+            </a:r>
+          </a:p>
+          <a:p>
+            <a:pPr algn="ctr"/>
+            <a:endParaRPr lang="de-DE" sz="2160">
+              <a:solidFill>
+                <a:schemeClr val="tx1">
+                  <a:lumMod val="75000"/>
+                  <a:lumOff val="25000"/>
+                </a:schemeClr>
+              </a:solidFill>
+            </a:endParaRPr>
+          </a:p>
+          <a:p>
+            <a:r>
+              <a:rPr lang="de-DE" sz="1260">
+                <a:solidFill>
+                  <a:schemeClr val="tx1">
+                    <a:lumMod val="75000"/>
+                    <a:lumOff val="25000"/>
+                  </a:schemeClr>
+                </a:solidFill>
+              </a:rPr>
+              <a:t>mountPoint</a:t>
+            </a:r>
+          </a:p>
+        </p:txBody>
+      </p:sp>
+      <p:sp>
+        <p:nvSpPr>
+          <p:cNvPr id="7" name="Ellipse 6">
+            <a:extLst>
+              <a:ext uri="{FF2B5EF4-FFF2-40B4-BE49-F238E27FC236}">
+                <a16:creationId xmlns:a16="http://schemas.microsoft.com/office/drawing/2014/main" id="{2B2D5C2F-E116-89BE-29E4-4B519C2CF449}"/>
+              </a:ext>
+            </a:extLst>
+          </p:cNvPr>
+          <p:cNvSpPr/>
+          <p:nvPr/>
+        </p:nvSpPr>
+        <p:spPr>
+          <a:xfrm>
+            <a:off x="2839730" y="3790611"/>
+            <a:ext cx="284464" cy="264144"/>
+          </a:xfrm>
+          <a:prstGeom prst="ellipse">
+            <a:avLst/>
+          </a:prstGeom>
+          <a:solidFill>
+            <a:schemeClr val="accent1">
+              <a:alpha val="28000"/>
+            </a:schemeClr>
+          </a:solidFill>
+        </p:spPr>
+        <p:style>
+          <a:lnRef idx="2">
+            <a:schemeClr val="accent2">
+              <a:shade val="15000"/>
+            </a:schemeClr>
+          </a:lnRef>
+          <a:fillRef idx="1">
+            <a:schemeClr val="accent2"/>
+          </a:fillRef>
+          <a:effectRef idx="0">
+            <a:schemeClr val="accent2"/>
+          </a:effectRef>
+          <a:fontRef idx="minor">
+            <a:schemeClr val="lt1"/>
+          </a:fontRef>
+        </p:style>
+        <p:txBody>
+          <a:bodyPr rtlCol="0" anchor="ctr"/>
+          <a:lstStyle/>
+          <a:p>
+            <a:pPr algn="ctr"/>
+            <a:endParaRPr lang="de-DE" sz="2160">
+              <a:solidFill>
+                <a:schemeClr val="tx1">
+                  <a:lumMod val="75000"/>
+                  <a:lumOff val="25000"/>
+                </a:schemeClr>
+              </a:solidFill>
+            </a:endParaRPr>
+          </a:p>
+        </p:txBody>
+      </p:sp>
+      <p:sp>
+        <p:nvSpPr>
+          <p:cNvPr id="8" name="Zylinder 7">
+            <a:extLst>
+              <a:ext uri="{FF2B5EF4-FFF2-40B4-BE49-F238E27FC236}">
+                <a16:creationId xmlns:a16="http://schemas.microsoft.com/office/drawing/2014/main" id="{D161311A-2E17-E871-FE81-80AA99818B20}"/>
+              </a:ext>
+            </a:extLst>
+          </p:cNvPr>
+          <p:cNvSpPr/>
+          <p:nvPr/>
+        </p:nvSpPr>
+        <p:spPr>
+          <a:xfrm>
+            <a:off x="1610441" y="6294907"/>
+            <a:ext cx="1493432" cy="497810"/>
+          </a:xfrm>
+          <a:prstGeom prst="can">
+            <a:avLst/>
+          </a:prstGeom>
+          <a:solidFill>
+            <a:schemeClr val="accent1">
+              <a:alpha val="28000"/>
+            </a:schemeClr>
+          </a:solidFill>
+        </p:spPr>
+        <p:style>
+          <a:lnRef idx="2">
+            <a:schemeClr val="accent1">
+              <a:shade val="15000"/>
+            </a:schemeClr>
+          </a:lnRef>
+          <a:fillRef idx="1">
+            <a:schemeClr val="accent1"/>
+          </a:fillRef>
+          <a:effectRef idx="0">
+            <a:schemeClr val="accent1"/>
+          </a:effectRef>
+          <a:fontRef idx="minor">
+            <a:schemeClr val="lt1"/>
+          </a:fontRef>
+        </p:style>
+        <p:txBody>
+          <a:bodyPr rtlCol="0" anchor="ctr"/>
+          <a:lstStyle/>
+          <a:p>
+            <a:pPr algn="ctr"/>
+            <a:r>
+              <a:rPr lang="de-DE" sz="2160">
+                <a:solidFill>
+                  <a:schemeClr val="tx1">
+                    <a:lumMod val="75000"/>
+                    <a:lumOff val="25000"/>
+                  </a:schemeClr>
+                </a:solidFill>
+              </a:rPr>
+              <a:t>Device</a:t>
+            </a:r>
+          </a:p>
+        </p:txBody>
+      </p:sp>
+      <p:cxnSp>
+        <p:nvCxnSpPr>
+          <p:cNvPr id="10" name="Gerade Verbindung mit Pfeil 9">
+            <a:extLst>
+              <a:ext uri="{FF2B5EF4-FFF2-40B4-BE49-F238E27FC236}">
+                <a16:creationId xmlns:a16="http://schemas.microsoft.com/office/drawing/2014/main" id="{CAE96537-E936-312C-60B5-FE43AD1A2FC6}"/>
+              </a:ext>
+            </a:extLst>
+          </p:cNvPr>
+          <p:cNvCxnSpPr>
+            <a:stCxn id="7" idx="4"/>
+            <a:endCxn id="5" idx="0"/>
+          </p:cNvCxnSpPr>
+          <p:nvPr/>
+        </p:nvCxnSpPr>
+        <p:spPr>
+          <a:xfrm>
+            <a:off x="2981962" y="4054753"/>
+            <a:ext cx="97546" cy="1277548"/>
+          </a:xfrm>
+          <a:prstGeom prst="straightConnector1">
+            <a:avLst/>
+          </a:prstGeom>
+          <a:ln>
+            <a:tailEnd type="none"/>
+          </a:ln>
+        </p:spPr>
+        <p:style>
+          <a:lnRef idx="2">
+            <a:schemeClr val="accent2"/>
+          </a:lnRef>
+          <a:fillRef idx="0">
+            <a:schemeClr val="accent2"/>
+          </a:fillRef>
+          <a:effectRef idx="1">
+            <a:schemeClr val="accent2"/>
+          </a:effectRef>
+          <a:fontRef idx="minor">
+            <a:schemeClr val="tx1"/>
+          </a:fontRef>
+        </p:style>
+      </p:cxnSp>
+      <p:cxnSp>
+        <p:nvCxnSpPr>
+          <p:cNvPr id="11" name="Gerade Verbindung mit Pfeil 10">
+            <a:extLst>
+              <a:ext uri="{FF2B5EF4-FFF2-40B4-BE49-F238E27FC236}">
+                <a16:creationId xmlns:a16="http://schemas.microsoft.com/office/drawing/2014/main" id="{F1800BDA-43AD-0104-65C4-D6CFC3B1562D}"/>
+              </a:ext>
+            </a:extLst>
+          </p:cNvPr>
+          <p:cNvCxnSpPr>
+            <a:cxnSpLocks/>
+            <a:endCxn id="8" idx="1"/>
+          </p:cNvCxnSpPr>
+          <p:nvPr/>
+        </p:nvCxnSpPr>
+        <p:spPr>
+          <a:xfrm flipH="1">
+            <a:off x="2357157" y="5602203"/>
+            <a:ext cx="761787" cy="692704"/>
+          </a:xfrm>
+          <a:prstGeom prst="straightConnector1">
+            <a:avLst/>
+          </a:prstGeom>
+          <a:ln>
+            <a:tailEnd type="none"/>
+          </a:ln>
+        </p:spPr>
+        <p:style>
+          <a:lnRef idx="2">
+            <a:schemeClr val="accent2"/>
+          </a:lnRef>
+          <a:fillRef idx="0">
+            <a:schemeClr val="accent2"/>
+          </a:fillRef>
+          <a:effectRef idx="1">
+            <a:schemeClr val="accent2"/>
+          </a:effectRef>
+          <a:fontRef idx="minor">
+            <a:schemeClr val="tx1"/>
+          </a:fontRef>
+        </p:style>
+      </p:cxnSp>
+      <p:sp>
+        <p:nvSpPr>
+          <p:cNvPr id="16" name="Rechteck 15">
+            <a:extLst>
+              <a:ext uri="{FF2B5EF4-FFF2-40B4-BE49-F238E27FC236}">
+                <a16:creationId xmlns:a16="http://schemas.microsoft.com/office/drawing/2014/main" id="{3A05DC17-DAE3-78F9-5748-64AE45B31731}"/>
+              </a:ext>
+            </a:extLst>
+          </p:cNvPr>
+          <p:cNvSpPr/>
+          <p:nvPr/>
+        </p:nvSpPr>
+        <p:spPr>
+          <a:xfrm>
+            <a:off x="3434057" y="4649080"/>
+            <a:ext cx="1676301" cy="1005781"/>
+          </a:xfrm>
+          <a:prstGeom prst="rect">
+            <a:avLst/>
+          </a:prstGeom>
+          <a:solidFill>
+            <a:schemeClr val="accent1">
+              <a:alpha val="28000"/>
+            </a:schemeClr>
+          </a:solidFill>
+        </p:spPr>
+        <p:style>
+          <a:lnRef idx="2">
+            <a:schemeClr val="accent1">
+              <a:shade val="15000"/>
+            </a:schemeClr>
+          </a:lnRef>
+          <a:fillRef idx="1">
+            <a:schemeClr val="accent1"/>
+          </a:fillRef>
+          <a:effectRef idx="0">
+            <a:schemeClr val="accent1"/>
+          </a:effectRef>
+          <a:fontRef idx="minor">
+            <a:schemeClr val="lt1"/>
+          </a:fontRef>
+        </p:style>
+        <p:txBody>
+          <a:bodyPr rtlCol="0" anchor="ctr"/>
+          <a:lstStyle/>
+          <a:p>
+            <a:pPr algn="ctr"/>
+            <a:r>
+              <a:rPr lang="de-DE" sz="2160">
+                <a:solidFill>
+                  <a:schemeClr val="tx1">
+                    <a:lumMod val="75000"/>
+                    <a:lumOff val="25000"/>
+                  </a:schemeClr>
+                </a:solidFill>
+              </a:rPr>
+              <a:t>mediatorVM</a:t>
+            </a:r>
+          </a:p>
+          <a:p>
+            <a:r>
+              <a:rPr lang="de-DE" sz="1320">
+                <a:solidFill>
+                  <a:schemeClr val="tx1">
+                    <a:lumMod val="75000"/>
+                    <a:lumOff val="25000"/>
+                  </a:schemeClr>
+                </a:solidFill>
+              </a:rPr>
+              <a:t>mediatorProcess</a:t>
+            </a:r>
+          </a:p>
+        </p:txBody>
+      </p:sp>
+      <p:sp>
+        <p:nvSpPr>
+          <p:cNvPr id="17" name="Ellipse 16">
+            <a:extLst>
+              <a:ext uri="{FF2B5EF4-FFF2-40B4-BE49-F238E27FC236}">
+                <a16:creationId xmlns:a16="http://schemas.microsoft.com/office/drawing/2014/main" id="{4EF28868-5936-866F-7C3F-0E410A50F686}"/>
+              </a:ext>
+            </a:extLst>
+          </p:cNvPr>
+          <p:cNvSpPr/>
+          <p:nvPr/>
+        </p:nvSpPr>
+        <p:spPr>
+          <a:xfrm>
+            <a:off x="4864442" y="5291125"/>
+            <a:ext cx="284464" cy="264144"/>
+          </a:xfrm>
+          <a:prstGeom prst="ellipse">
+            <a:avLst/>
+          </a:prstGeom>
+          <a:solidFill>
+            <a:schemeClr val="accent1">
+              <a:alpha val="28000"/>
+            </a:schemeClr>
+          </a:solidFill>
+        </p:spPr>
+        <p:style>
+          <a:lnRef idx="2">
+            <a:schemeClr val="accent2">
+              <a:shade val="15000"/>
+            </a:schemeClr>
+          </a:lnRef>
+          <a:fillRef idx="1">
+            <a:schemeClr val="accent2"/>
+          </a:fillRef>
+          <a:effectRef idx="0">
+            <a:schemeClr val="accent2"/>
+          </a:effectRef>
+          <a:fontRef idx="minor">
+            <a:schemeClr val="lt1"/>
+          </a:fontRef>
+        </p:style>
+        <p:txBody>
+          <a:bodyPr rtlCol="0" anchor="ctr"/>
+          <a:lstStyle/>
+          <a:p>
+            <a:pPr algn="ctr"/>
+            <a:endParaRPr lang="de-DE" sz="2160">
+              <a:solidFill>
+                <a:schemeClr val="tx1">
+                  <a:lumMod val="75000"/>
+                  <a:lumOff val="25000"/>
+                </a:schemeClr>
+              </a:solidFill>
+            </a:endParaRPr>
+          </a:p>
+        </p:txBody>
+      </p:sp>
+      <p:sp>
+        <p:nvSpPr>
+          <p:cNvPr id="18" name="Rechteck 17">
+            <a:extLst>
+              <a:ext uri="{FF2B5EF4-FFF2-40B4-BE49-F238E27FC236}">
+                <a16:creationId xmlns:a16="http://schemas.microsoft.com/office/drawing/2014/main" id="{E224F990-E855-9514-65F0-543CB1D3B36A}"/>
+              </a:ext>
+            </a:extLst>
+          </p:cNvPr>
+          <p:cNvSpPr/>
+          <p:nvPr/>
+        </p:nvSpPr>
+        <p:spPr>
+          <a:xfrm>
+            <a:off x="3434057" y="3158186"/>
+            <a:ext cx="1676301" cy="1005781"/>
+          </a:xfrm>
+          <a:prstGeom prst="rect">
+            <a:avLst/>
+          </a:prstGeom>
+          <a:solidFill>
+            <a:schemeClr val="accent1">
+              <a:alpha val="28000"/>
+            </a:schemeClr>
+          </a:solidFill>
+        </p:spPr>
+        <p:style>
+          <a:lnRef idx="2">
+            <a:schemeClr val="accent1">
+              <a:shade val="15000"/>
+            </a:schemeClr>
+          </a:lnRef>
+          <a:fillRef idx="1">
+            <a:schemeClr val="accent1"/>
+          </a:fillRef>
+          <a:effectRef idx="0">
+            <a:schemeClr val="accent1"/>
+          </a:effectRef>
+          <a:fontRef idx="minor">
+            <a:schemeClr val="lt1"/>
+          </a:fontRef>
+        </p:style>
+        <p:txBody>
+          <a:bodyPr rtlCol="0" anchor="ctr"/>
+          <a:lstStyle/>
+          <a:p>
+            <a:pPr algn="ctr"/>
+            <a:r>
+              <a:rPr lang="de-DE" sz="2160">
+                <a:solidFill>
+                  <a:schemeClr val="tx1">
+                    <a:lumMod val="75000"/>
+                    <a:lumOff val="25000"/>
+                  </a:schemeClr>
+                </a:solidFill>
+              </a:rPr>
+              <a:t>Controller</a:t>
+            </a:r>
+          </a:p>
+          <a:p>
+            <a:pPr algn="ctr"/>
+            <a:endParaRPr lang="de-DE" sz="2160">
+              <a:solidFill>
+                <a:schemeClr val="tx1">
+                  <a:lumMod val="75000"/>
+                  <a:lumOff val="25000"/>
+                </a:schemeClr>
+              </a:solidFill>
+            </a:endParaRPr>
+          </a:p>
+          <a:p>
+            <a:r>
+              <a:rPr lang="de-DE" sz="1260">
+                <a:solidFill>
+                  <a:schemeClr val="tx1">
+                    <a:lumMod val="75000"/>
+                    <a:lumOff val="25000"/>
+                  </a:schemeClr>
+                </a:solidFill>
+              </a:rPr>
+              <a:t>mountPoint</a:t>
+            </a:r>
+          </a:p>
+        </p:txBody>
+      </p:sp>
+      <p:sp>
+        <p:nvSpPr>
+          <p:cNvPr id="19" name="Ellipse 18">
+            <a:extLst>
+              <a:ext uri="{FF2B5EF4-FFF2-40B4-BE49-F238E27FC236}">
+                <a16:creationId xmlns:a16="http://schemas.microsoft.com/office/drawing/2014/main" id="{352F294C-EC06-861E-F435-8E1EEF0B5924}"/>
+              </a:ext>
+            </a:extLst>
+          </p:cNvPr>
+          <p:cNvSpPr/>
+          <p:nvPr/>
+        </p:nvSpPr>
+        <p:spPr>
+          <a:xfrm>
+            <a:off x="4775100" y="3859482"/>
+            <a:ext cx="284464" cy="264144"/>
+          </a:xfrm>
+          <a:prstGeom prst="ellipse">
+            <a:avLst/>
+          </a:prstGeom>
+          <a:solidFill>
+            <a:schemeClr val="accent1">
+              <a:alpha val="28000"/>
+            </a:schemeClr>
+          </a:solidFill>
+        </p:spPr>
+        <p:style>
+          <a:lnRef idx="2">
+            <a:schemeClr val="accent2">
+              <a:shade val="15000"/>
+            </a:schemeClr>
+          </a:lnRef>
+          <a:fillRef idx="1">
+            <a:schemeClr val="accent2"/>
+          </a:fillRef>
+          <a:effectRef idx="0">
+            <a:schemeClr val="accent2"/>
+          </a:effectRef>
+          <a:fontRef idx="minor">
+            <a:schemeClr val="lt1"/>
+          </a:fontRef>
+        </p:style>
+        <p:txBody>
+          <a:bodyPr rtlCol="0" anchor="ctr"/>
+          <a:lstStyle/>
+          <a:p>
+            <a:pPr algn="ctr"/>
+            <a:endParaRPr lang="de-DE" sz="2160">
+              <a:solidFill>
+                <a:schemeClr val="tx1">
+                  <a:lumMod val="75000"/>
+                  <a:lumOff val="25000"/>
+                </a:schemeClr>
+              </a:solidFill>
+            </a:endParaRPr>
+          </a:p>
+        </p:txBody>
+      </p:sp>
+      <p:sp>
+        <p:nvSpPr>
+          <p:cNvPr id="20" name="Zylinder 19">
+            <a:extLst>
+              <a:ext uri="{FF2B5EF4-FFF2-40B4-BE49-F238E27FC236}">
+                <a16:creationId xmlns:a16="http://schemas.microsoft.com/office/drawing/2014/main" id="{19AA76ED-7D66-4FA0-0A22-04EE5B4EB5E7}"/>
+              </a:ext>
+            </a:extLst>
+          </p:cNvPr>
+          <p:cNvSpPr/>
+          <p:nvPr/>
+        </p:nvSpPr>
+        <p:spPr>
+          <a:xfrm>
+            <a:off x="4075126" y="6340623"/>
+            <a:ext cx="1493432" cy="497810"/>
+          </a:xfrm>
+          <a:prstGeom prst="can">
+            <a:avLst/>
+          </a:prstGeom>
+          <a:solidFill>
+            <a:schemeClr val="accent1">
+              <a:alpha val="28000"/>
+            </a:schemeClr>
+          </a:solidFill>
+        </p:spPr>
+        <p:style>
+          <a:lnRef idx="2">
+            <a:schemeClr val="accent1">
+              <a:shade val="15000"/>
+            </a:schemeClr>
+          </a:lnRef>
+          <a:fillRef idx="1">
+            <a:schemeClr val="accent1"/>
+          </a:fillRef>
+          <a:effectRef idx="0">
+            <a:schemeClr val="accent1"/>
+          </a:effectRef>
+          <a:fontRef idx="minor">
+            <a:schemeClr val="lt1"/>
+          </a:fontRef>
+        </p:style>
+        <p:txBody>
+          <a:bodyPr rtlCol="0" anchor="ctr"/>
+          <a:lstStyle/>
+          <a:p>
+            <a:pPr algn="ctr"/>
+            <a:r>
+              <a:rPr lang="de-DE" sz="2160">
+                <a:solidFill>
+                  <a:schemeClr val="tx1">
+                    <a:lumMod val="75000"/>
+                    <a:lumOff val="25000"/>
+                  </a:schemeClr>
+                </a:solidFill>
+              </a:rPr>
+              <a:t>Device</a:t>
+            </a:r>
+          </a:p>
+        </p:txBody>
+      </p:sp>
+      <p:cxnSp>
+        <p:nvCxnSpPr>
+          <p:cNvPr id="21" name="Gerade Verbindung mit Pfeil 20">
+            <a:extLst>
+              <a:ext uri="{FF2B5EF4-FFF2-40B4-BE49-F238E27FC236}">
+                <a16:creationId xmlns:a16="http://schemas.microsoft.com/office/drawing/2014/main" id="{E28C82D3-6157-62FF-5BC4-2C8D8C11AD9F}"/>
+              </a:ext>
+            </a:extLst>
+          </p:cNvPr>
+          <p:cNvCxnSpPr>
+            <a:cxnSpLocks/>
+            <a:stCxn id="19" idx="4"/>
+            <a:endCxn id="17" idx="0"/>
+          </p:cNvCxnSpPr>
+          <p:nvPr/>
+        </p:nvCxnSpPr>
+        <p:spPr>
+          <a:xfrm>
+            <a:off x="4917332" y="4123626"/>
+            <a:ext cx="89342" cy="1167499"/>
+          </a:xfrm>
+          <a:prstGeom prst="straightConnector1">
+            <a:avLst/>
+          </a:prstGeom>
+          <a:ln>
+            <a:tailEnd type="none"/>
+          </a:ln>
+        </p:spPr>
+        <p:style>
+          <a:lnRef idx="2">
+            <a:schemeClr val="accent2"/>
+          </a:lnRef>
+          <a:fillRef idx="0">
+            <a:schemeClr val="accent2"/>
+          </a:fillRef>
+          <a:effectRef idx="1">
+            <a:schemeClr val="accent2"/>
+          </a:effectRef>
+          <a:fontRef idx="minor">
+            <a:schemeClr val="tx1"/>
+          </a:fontRef>
+        </p:style>
+      </p:cxnSp>
+      <p:cxnSp>
+        <p:nvCxnSpPr>
+          <p:cNvPr id="22" name="Gerade Verbindung mit Pfeil 21">
+            <a:extLst>
+              <a:ext uri="{FF2B5EF4-FFF2-40B4-BE49-F238E27FC236}">
+                <a16:creationId xmlns:a16="http://schemas.microsoft.com/office/drawing/2014/main" id="{B5706053-3CA9-33BC-F1AF-03A1A31229D2}"/>
+              </a:ext>
+            </a:extLst>
+          </p:cNvPr>
+          <p:cNvCxnSpPr>
+            <a:cxnSpLocks/>
+            <a:stCxn id="17" idx="4"/>
+            <a:endCxn id="20" idx="1"/>
+          </p:cNvCxnSpPr>
+          <p:nvPr/>
+        </p:nvCxnSpPr>
+        <p:spPr>
+          <a:xfrm flipH="1">
+            <a:off x="4821842" y="5555267"/>
+            <a:ext cx="184830" cy="785356"/>
+          </a:xfrm>
+          <a:prstGeom prst="straightConnector1">
+            <a:avLst/>
+          </a:prstGeom>
+          <a:ln>
+            <a:tailEnd type="none"/>
+          </a:ln>
+        </p:spPr>
+        <p:style>
+          <a:lnRef idx="2">
+            <a:schemeClr val="accent2"/>
+          </a:lnRef>
+          <a:fillRef idx="0">
+            <a:schemeClr val="accent2"/>
+          </a:fillRef>
+          <a:effectRef idx="1">
+            <a:schemeClr val="accent2"/>
+          </a:effectRef>
+          <a:fontRef idx="minor">
+            <a:schemeClr val="tx1"/>
+          </a:fontRef>
+        </p:style>
+      </p:cxnSp>
+      <p:sp>
+        <p:nvSpPr>
+          <p:cNvPr id="26" name="Ellipse 25">
+            <a:extLst>
+              <a:ext uri="{FF2B5EF4-FFF2-40B4-BE49-F238E27FC236}">
+                <a16:creationId xmlns:a16="http://schemas.microsoft.com/office/drawing/2014/main" id="{B87B4BB5-AC70-B25B-DDF9-EF790103BC1F}"/>
+              </a:ext>
+            </a:extLst>
+          </p:cNvPr>
+          <p:cNvSpPr/>
+          <p:nvPr/>
+        </p:nvSpPr>
+        <p:spPr>
+          <a:xfrm>
+            <a:off x="6816660" y="5291125"/>
+            <a:ext cx="284464" cy="264144"/>
+          </a:xfrm>
+          <a:prstGeom prst="ellipse">
+            <a:avLst/>
+          </a:prstGeom>
+          <a:solidFill>
+            <a:schemeClr val="accent1">
+              <a:alpha val="28000"/>
+            </a:schemeClr>
+          </a:solidFill>
+        </p:spPr>
+        <p:style>
+          <a:lnRef idx="2">
+            <a:schemeClr val="accent2">
+              <a:shade val="15000"/>
+            </a:schemeClr>
+          </a:lnRef>
+          <a:fillRef idx="1">
+            <a:schemeClr val="accent2"/>
+          </a:fillRef>
+          <a:effectRef idx="0">
+            <a:schemeClr val="accent2"/>
+          </a:effectRef>
+          <a:fontRef idx="minor">
+            <a:schemeClr val="lt1"/>
+          </a:fontRef>
+        </p:style>
+        <p:txBody>
+          <a:bodyPr rtlCol="0" anchor="ctr"/>
+          <a:lstStyle/>
+          <a:p>
+            <a:pPr algn="ctr"/>
+            <a:endParaRPr lang="de-DE" sz="2160">
+              <a:solidFill>
+                <a:schemeClr val="tx1">
+                  <a:lumMod val="75000"/>
+                  <a:lumOff val="25000"/>
+                </a:schemeClr>
+              </a:solidFill>
+            </a:endParaRPr>
+          </a:p>
+        </p:txBody>
+      </p:sp>
+      <p:cxnSp>
+        <p:nvCxnSpPr>
+          <p:cNvPr id="27" name="Gerade Verbindung mit Pfeil 26">
+            <a:extLst>
+              <a:ext uri="{FF2B5EF4-FFF2-40B4-BE49-F238E27FC236}">
+                <a16:creationId xmlns:a16="http://schemas.microsoft.com/office/drawing/2014/main" id="{2042BB0D-49EF-61D5-8DCF-4632CF1E0EC2}"/>
+              </a:ext>
+            </a:extLst>
+          </p:cNvPr>
+          <p:cNvCxnSpPr>
+            <a:cxnSpLocks/>
+            <a:stCxn id="26" idx="4"/>
+            <a:endCxn id="20" idx="1"/>
+          </p:cNvCxnSpPr>
+          <p:nvPr/>
+        </p:nvCxnSpPr>
+        <p:spPr>
+          <a:xfrm flipH="1">
+            <a:off x="4821842" y="5555269"/>
+            <a:ext cx="2137050" cy="785354"/>
+          </a:xfrm>
+          <a:prstGeom prst="straightConnector1">
+            <a:avLst/>
+          </a:prstGeom>
+          <a:ln>
+            <a:tailEnd type="none"/>
+          </a:ln>
+        </p:spPr>
+        <p:style>
+          <a:lnRef idx="2">
+            <a:schemeClr val="accent2"/>
+          </a:lnRef>
+          <a:fillRef idx="0">
+            <a:schemeClr val="accent2"/>
+          </a:fillRef>
+          <a:effectRef idx="1">
+            <a:schemeClr val="accent2"/>
+          </a:effectRef>
+          <a:fontRef idx="minor">
+            <a:schemeClr val="tx1"/>
+          </a:fontRef>
+        </p:style>
+      </p:cxnSp>
+      <p:sp>
+        <p:nvSpPr>
+          <p:cNvPr id="38" name="Rechteck 37">
+            <a:extLst>
+              <a:ext uri="{FF2B5EF4-FFF2-40B4-BE49-F238E27FC236}">
+                <a16:creationId xmlns:a16="http://schemas.microsoft.com/office/drawing/2014/main" id="{E93C0B71-E0BF-D97B-B0EE-B313C364AC2E}"/>
+              </a:ext>
+            </a:extLst>
+          </p:cNvPr>
+          <p:cNvSpPr/>
+          <p:nvPr/>
+        </p:nvSpPr>
+        <p:spPr>
+          <a:xfrm>
+            <a:off x="7330192" y="4649080"/>
+            <a:ext cx="1676301" cy="1005781"/>
+          </a:xfrm>
+          <a:prstGeom prst="rect">
+            <a:avLst/>
+          </a:prstGeom>
+          <a:solidFill>
+            <a:schemeClr val="accent1">
+              <a:alpha val="28000"/>
+            </a:schemeClr>
+          </a:solidFill>
+        </p:spPr>
+        <p:style>
+          <a:lnRef idx="2">
+            <a:schemeClr val="accent1">
+              <a:shade val="15000"/>
+            </a:schemeClr>
+          </a:lnRef>
+          <a:fillRef idx="1">
+            <a:schemeClr val="accent1"/>
+          </a:fillRef>
+          <a:effectRef idx="0">
+            <a:schemeClr val="accent1"/>
+          </a:effectRef>
+          <a:fontRef idx="minor">
+            <a:schemeClr val="lt1"/>
+          </a:fontRef>
+        </p:style>
+        <p:txBody>
+          <a:bodyPr rtlCol="0" anchor="ctr"/>
+          <a:lstStyle/>
+          <a:p>
+            <a:pPr algn="ctr"/>
+            <a:r>
+              <a:rPr lang="de-DE" sz="2160">
+                <a:solidFill>
+                  <a:schemeClr val="tx1">
+                    <a:lumMod val="75000"/>
+                    <a:lumOff val="25000"/>
+                  </a:schemeClr>
+                </a:solidFill>
+              </a:rPr>
+              <a:t>mediatorVM</a:t>
+            </a:r>
+          </a:p>
+          <a:p>
+            <a:r>
+              <a:rPr lang="de-DE" sz="1320">
+                <a:solidFill>
+                  <a:schemeClr val="tx1">
+                    <a:lumMod val="75000"/>
+                    <a:lumOff val="25000"/>
+                  </a:schemeClr>
+                </a:solidFill>
+              </a:rPr>
+              <a:t>mediatorProcess</a:t>
+            </a:r>
+          </a:p>
+        </p:txBody>
+      </p:sp>
+      <p:sp>
+        <p:nvSpPr>
+          <p:cNvPr id="39" name="Ellipse 38">
+            <a:extLst>
+              <a:ext uri="{FF2B5EF4-FFF2-40B4-BE49-F238E27FC236}">
+                <a16:creationId xmlns:a16="http://schemas.microsoft.com/office/drawing/2014/main" id="{A18DF9C9-1030-8F4C-1A21-64AC0FFBDCD5}"/>
+              </a:ext>
+            </a:extLst>
+          </p:cNvPr>
+          <p:cNvSpPr/>
+          <p:nvPr/>
+        </p:nvSpPr>
+        <p:spPr>
+          <a:xfrm>
+            <a:off x="8724057" y="5252375"/>
+            <a:ext cx="284464" cy="264144"/>
+          </a:xfrm>
+          <a:prstGeom prst="ellipse">
+            <a:avLst/>
+          </a:prstGeom>
+          <a:solidFill>
+            <a:schemeClr val="accent1">
+              <a:alpha val="28000"/>
+            </a:schemeClr>
+          </a:solidFill>
+        </p:spPr>
+        <p:style>
+          <a:lnRef idx="2">
+            <a:schemeClr val="accent2">
+              <a:shade val="15000"/>
+            </a:schemeClr>
+          </a:lnRef>
+          <a:fillRef idx="1">
+            <a:schemeClr val="accent2"/>
+          </a:fillRef>
+          <a:effectRef idx="0">
+            <a:schemeClr val="accent2"/>
+          </a:effectRef>
+          <a:fontRef idx="minor">
+            <a:schemeClr val="lt1"/>
+          </a:fontRef>
+        </p:style>
+        <p:txBody>
+          <a:bodyPr rtlCol="0" anchor="ctr"/>
+          <a:lstStyle/>
+          <a:p>
+            <a:pPr algn="ctr"/>
+            <a:endParaRPr lang="de-DE" sz="2160">
+              <a:solidFill>
+                <a:schemeClr val="tx1">
+                  <a:lumMod val="75000"/>
+                  <a:lumOff val="25000"/>
+                </a:schemeClr>
+              </a:solidFill>
+            </a:endParaRPr>
+          </a:p>
+        </p:txBody>
+      </p:sp>
+      <p:sp>
+        <p:nvSpPr>
+          <p:cNvPr id="40" name="Rechteck 39">
+            <a:extLst>
+              <a:ext uri="{FF2B5EF4-FFF2-40B4-BE49-F238E27FC236}">
+                <a16:creationId xmlns:a16="http://schemas.microsoft.com/office/drawing/2014/main" id="{AEE19B6F-403D-1598-718B-9BBA177643B9}"/>
+              </a:ext>
+            </a:extLst>
+          </p:cNvPr>
+          <p:cNvSpPr/>
+          <p:nvPr/>
+        </p:nvSpPr>
+        <p:spPr>
+          <a:xfrm>
+            <a:off x="7330192" y="3158186"/>
+            <a:ext cx="1676301" cy="1005781"/>
+          </a:xfrm>
+          <a:prstGeom prst="rect">
+            <a:avLst/>
+          </a:prstGeom>
+          <a:solidFill>
+            <a:schemeClr val="accent1">
+              <a:alpha val="28000"/>
+            </a:schemeClr>
+          </a:solidFill>
+        </p:spPr>
+        <p:style>
+          <a:lnRef idx="2">
+            <a:schemeClr val="accent1">
+              <a:shade val="15000"/>
+            </a:schemeClr>
+          </a:lnRef>
+          <a:fillRef idx="1">
+            <a:schemeClr val="accent1"/>
+          </a:fillRef>
+          <a:effectRef idx="0">
+            <a:schemeClr val="accent1"/>
+          </a:effectRef>
+          <a:fontRef idx="minor">
+            <a:schemeClr val="lt1"/>
+          </a:fontRef>
+        </p:style>
+        <p:txBody>
+          <a:bodyPr rtlCol="0" anchor="ctr"/>
+          <a:lstStyle/>
+          <a:p>
+            <a:pPr algn="ctr"/>
+            <a:r>
+              <a:rPr lang="de-DE" sz="2160">
+                <a:solidFill>
+                  <a:schemeClr val="tx1">
+                    <a:lumMod val="75000"/>
+                    <a:lumOff val="25000"/>
+                  </a:schemeClr>
+                </a:solidFill>
+              </a:rPr>
+              <a:t>Controller</a:t>
+            </a:r>
+          </a:p>
+          <a:p>
+            <a:pPr algn="ctr"/>
+            <a:endParaRPr lang="de-DE" sz="2160">
+              <a:solidFill>
+                <a:schemeClr val="tx1">
+                  <a:lumMod val="75000"/>
+                  <a:lumOff val="25000"/>
+                </a:schemeClr>
+              </a:solidFill>
+            </a:endParaRPr>
+          </a:p>
+          <a:p>
+            <a:r>
+              <a:rPr lang="de-DE" sz="1260">
+                <a:solidFill>
+                  <a:schemeClr val="tx1">
+                    <a:lumMod val="75000"/>
+                    <a:lumOff val="25000"/>
+                  </a:schemeClr>
+                </a:solidFill>
+              </a:rPr>
+              <a:t>mountPoint</a:t>
+            </a:r>
+          </a:p>
+        </p:txBody>
+      </p:sp>
+      <p:sp>
+        <p:nvSpPr>
+          <p:cNvPr id="41" name="Ellipse 40">
+            <a:extLst>
+              <a:ext uri="{FF2B5EF4-FFF2-40B4-BE49-F238E27FC236}">
+                <a16:creationId xmlns:a16="http://schemas.microsoft.com/office/drawing/2014/main" id="{E7C64477-9CE2-C926-A0C1-67AB78210D07}"/>
+              </a:ext>
+            </a:extLst>
+          </p:cNvPr>
+          <p:cNvSpPr/>
+          <p:nvPr/>
+        </p:nvSpPr>
+        <p:spPr>
+          <a:xfrm>
+            <a:off x="8671434" y="3879087"/>
+            <a:ext cx="284464" cy="264144"/>
+          </a:xfrm>
+          <a:prstGeom prst="ellipse">
+            <a:avLst/>
+          </a:prstGeom>
+          <a:solidFill>
+            <a:schemeClr val="accent1">
+              <a:alpha val="28000"/>
+            </a:schemeClr>
+          </a:solidFill>
+        </p:spPr>
+        <p:style>
+          <a:lnRef idx="2">
+            <a:schemeClr val="accent2">
+              <a:shade val="15000"/>
+            </a:schemeClr>
+          </a:lnRef>
+          <a:fillRef idx="1">
+            <a:schemeClr val="accent2"/>
+          </a:fillRef>
+          <a:effectRef idx="0">
+            <a:schemeClr val="accent2"/>
+          </a:effectRef>
+          <a:fontRef idx="minor">
+            <a:schemeClr val="lt1"/>
+          </a:fontRef>
+        </p:style>
+        <p:txBody>
+          <a:bodyPr rtlCol="0" anchor="ctr"/>
+          <a:lstStyle/>
+          <a:p>
+            <a:pPr algn="ctr"/>
+            <a:endParaRPr lang="de-DE" sz="2160">
+              <a:solidFill>
+                <a:schemeClr val="tx1">
+                  <a:lumMod val="75000"/>
+                  <a:lumOff val="25000"/>
+                </a:schemeClr>
+              </a:solidFill>
+            </a:endParaRPr>
+          </a:p>
+        </p:txBody>
+      </p:sp>
+      <p:sp>
+        <p:nvSpPr>
+          <p:cNvPr id="42" name="Zylinder 41">
+            <a:extLst>
+              <a:ext uri="{FF2B5EF4-FFF2-40B4-BE49-F238E27FC236}">
+                <a16:creationId xmlns:a16="http://schemas.microsoft.com/office/drawing/2014/main" id="{7CFD1A68-A4B8-1784-05D5-10C1CB2E49DD}"/>
+              </a:ext>
+            </a:extLst>
+          </p:cNvPr>
+          <p:cNvSpPr/>
+          <p:nvPr/>
+        </p:nvSpPr>
+        <p:spPr>
+          <a:xfrm>
+            <a:off x="8038363" y="6371100"/>
+            <a:ext cx="1493432" cy="497810"/>
+          </a:xfrm>
+          <a:prstGeom prst="can">
+            <a:avLst/>
+          </a:prstGeom>
+          <a:solidFill>
+            <a:schemeClr val="accent1">
+              <a:alpha val="28000"/>
+            </a:schemeClr>
+          </a:solidFill>
+        </p:spPr>
+        <p:style>
+          <a:lnRef idx="2">
+            <a:schemeClr val="accent1">
+              <a:shade val="15000"/>
+            </a:schemeClr>
+          </a:lnRef>
+          <a:fillRef idx="1">
+            <a:schemeClr val="accent1"/>
+          </a:fillRef>
+          <a:effectRef idx="0">
+            <a:schemeClr val="accent1"/>
+          </a:effectRef>
+          <a:fontRef idx="minor">
+            <a:schemeClr val="lt1"/>
+          </a:fontRef>
+        </p:style>
+        <p:txBody>
+          <a:bodyPr rtlCol="0" anchor="ctr"/>
+          <a:lstStyle/>
+          <a:p>
+            <a:pPr algn="ctr"/>
+            <a:r>
+              <a:rPr lang="de-DE" sz="2160">
+                <a:solidFill>
+                  <a:schemeClr val="tx1">
+                    <a:lumMod val="75000"/>
+                    <a:lumOff val="25000"/>
+                  </a:schemeClr>
+                </a:solidFill>
+              </a:rPr>
+              <a:t>Device</a:t>
+            </a:r>
+          </a:p>
+        </p:txBody>
+      </p:sp>
+      <p:cxnSp>
+        <p:nvCxnSpPr>
+          <p:cNvPr id="44" name="Gerade Verbindung mit Pfeil 43">
+            <a:extLst>
+              <a:ext uri="{FF2B5EF4-FFF2-40B4-BE49-F238E27FC236}">
+                <a16:creationId xmlns:a16="http://schemas.microsoft.com/office/drawing/2014/main" id="{413A8BC9-CE02-780A-C1DA-91D909D2FA52}"/>
+              </a:ext>
+            </a:extLst>
+          </p:cNvPr>
+          <p:cNvCxnSpPr>
+            <a:cxnSpLocks/>
+            <a:stCxn id="39" idx="4"/>
+            <a:endCxn id="42" idx="1"/>
+          </p:cNvCxnSpPr>
+          <p:nvPr/>
+        </p:nvCxnSpPr>
+        <p:spPr>
+          <a:xfrm flipH="1">
+            <a:off x="8785078" y="5516517"/>
+            <a:ext cx="81209" cy="854583"/>
+          </a:xfrm>
+          <a:prstGeom prst="straightConnector1">
+            <a:avLst/>
+          </a:prstGeom>
+          <a:ln>
+            <a:tailEnd type="none"/>
+          </a:ln>
+        </p:spPr>
+        <p:style>
+          <a:lnRef idx="2">
+            <a:schemeClr val="accent2"/>
+          </a:lnRef>
+          <a:fillRef idx="0">
+            <a:schemeClr val="accent2"/>
+          </a:fillRef>
+          <a:effectRef idx="1">
+            <a:schemeClr val="accent2"/>
+          </a:effectRef>
+          <a:fontRef idx="minor">
+            <a:schemeClr val="tx1"/>
+          </a:fontRef>
+        </p:style>
+      </p:cxnSp>
+      <p:sp>
+        <p:nvSpPr>
+          <p:cNvPr id="45" name="Rechteck 44">
+            <a:extLst>
+              <a:ext uri="{FF2B5EF4-FFF2-40B4-BE49-F238E27FC236}">
+                <a16:creationId xmlns:a16="http://schemas.microsoft.com/office/drawing/2014/main" id="{DC9D3973-C0FB-B4D9-78CA-126B6555F912}"/>
+              </a:ext>
+            </a:extLst>
+          </p:cNvPr>
+          <p:cNvSpPr/>
+          <p:nvPr/>
+        </p:nvSpPr>
+        <p:spPr>
+          <a:xfrm>
+            <a:off x="9306196" y="4649079"/>
+            <a:ext cx="1676301" cy="1005781"/>
+          </a:xfrm>
+          <a:prstGeom prst="rect">
+            <a:avLst/>
+          </a:prstGeom>
+          <a:solidFill>
+            <a:schemeClr val="accent1">
+              <a:alpha val="28000"/>
+            </a:schemeClr>
+          </a:solidFill>
+        </p:spPr>
+        <p:style>
+          <a:lnRef idx="2">
+            <a:schemeClr val="accent1">
+              <a:shade val="15000"/>
+            </a:schemeClr>
+          </a:lnRef>
+          <a:fillRef idx="1">
+            <a:schemeClr val="accent1"/>
+          </a:fillRef>
+          <a:effectRef idx="0">
+            <a:schemeClr val="accent1"/>
+          </a:effectRef>
+          <a:fontRef idx="minor">
+            <a:schemeClr val="lt1"/>
+          </a:fontRef>
+        </p:style>
+        <p:txBody>
+          <a:bodyPr rtlCol="0" anchor="ctr"/>
+          <a:lstStyle/>
+          <a:p>
+            <a:pPr algn="ctr"/>
+            <a:r>
+              <a:rPr lang="de-DE" sz="2160">
+                <a:solidFill>
+                  <a:schemeClr val="tx1">
+                    <a:lumMod val="75000"/>
+                    <a:lumOff val="25000"/>
+                  </a:schemeClr>
+                </a:solidFill>
+              </a:rPr>
+              <a:t>mediatorVM</a:t>
+            </a:r>
+          </a:p>
+          <a:p>
+            <a:r>
+              <a:rPr lang="de-DE" sz="1320">
+                <a:solidFill>
+                  <a:schemeClr val="tx1">
+                    <a:lumMod val="75000"/>
+                    <a:lumOff val="25000"/>
+                  </a:schemeClr>
+                </a:solidFill>
+              </a:rPr>
+              <a:t>mediatorProcess</a:t>
+            </a:r>
+          </a:p>
+        </p:txBody>
+      </p:sp>
+      <p:sp>
+        <p:nvSpPr>
+          <p:cNvPr id="46" name="Ellipse 45">
+            <a:extLst>
+              <a:ext uri="{FF2B5EF4-FFF2-40B4-BE49-F238E27FC236}">
+                <a16:creationId xmlns:a16="http://schemas.microsoft.com/office/drawing/2014/main" id="{46DFFB4E-977E-9DC9-A3B7-B6EC25621D5A}"/>
+              </a:ext>
+            </a:extLst>
+          </p:cNvPr>
+          <p:cNvSpPr/>
+          <p:nvPr/>
+        </p:nvSpPr>
+        <p:spPr>
+          <a:xfrm>
+            <a:off x="10718890" y="5390718"/>
+            <a:ext cx="284464" cy="264144"/>
+          </a:xfrm>
+          <a:prstGeom prst="ellipse">
+            <a:avLst/>
+          </a:prstGeom>
+          <a:solidFill>
+            <a:schemeClr val="accent1">
+              <a:alpha val="28000"/>
+            </a:schemeClr>
+          </a:solidFill>
+        </p:spPr>
+        <p:style>
+          <a:lnRef idx="2">
+            <a:schemeClr val="accent2">
+              <a:shade val="15000"/>
+            </a:schemeClr>
+          </a:lnRef>
+          <a:fillRef idx="1">
+            <a:schemeClr val="accent2"/>
+          </a:fillRef>
+          <a:effectRef idx="0">
+            <a:schemeClr val="accent2"/>
+          </a:effectRef>
+          <a:fontRef idx="minor">
+            <a:schemeClr val="lt1"/>
+          </a:fontRef>
+        </p:style>
+        <p:txBody>
+          <a:bodyPr rtlCol="0" anchor="ctr"/>
+          <a:lstStyle/>
+          <a:p>
+            <a:pPr algn="ctr"/>
+            <a:endParaRPr lang="de-DE" sz="2160">
+              <a:solidFill>
+                <a:schemeClr val="tx1">
+                  <a:lumMod val="75000"/>
+                  <a:lumOff val="25000"/>
+                </a:schemeClr>
+              </a:solidFill>
+            </a:endParaRPr>
+          </a:p>
+        </p:txBody>
+      </p:sp>
+      <p:cxnSp>
+        <p:nvCxnSpPr>
+          <p:cNvPr id="47" name="Gerade Verbindung mit Pfeil 46">
+            <a:extLst>
+              <a:ext uri="{FF2B5EF4-FFF2-40B4-BE49-F238E27FC236}">
+                <a16:creationId xmlns:a16="http://schemas.microsoft.com/office/drawing/2014/main" id="{F062F8D0-B3DD-E184-09B4-16CC109D8EB0}"/>
+              </a:ext>
+            </a:extLst>
+          </p:cNvPr>
+          <p:cNvCxnSpPr>
+            <a:cxnSpLocks/>
+            <a:stCxn id="46" idx="2"/>
+            <a:endCxn id="42" idx="1"/>
+          </p:cNvCxnSpPr>
+          <p:nvPr/>
+        </p:nvCxnSpPr>
+        <p:spPr>
+          <a:xfrm flipH="1">
+            <a:off x="8785079" y="5522790"/>
+            <a:ext cx="1933811" cy="848310"/>
+          </a:xfrm>
+          <a:prstGeom prst="straightConnector1">
+            <a:avLst/>
+          </a:prstGeom>
+          <a:ln>
+            <a:tailEnd type="none"/>
+          </a:ln>
+        </p:spPr>
+        <p:style>
+          <a:lnRef idx="2">
+            <a:schemeClr val="accent2"/>
+          </a:lnRef>
+          <a:fillRef idx="0">
+            <a:schemeClr val="accent2"/>
+          </a:fillRef>
+          <a:effectRef idx="1">
+            <a:schemeClr val="accent2"/>
+          </a:effectRef>
+          <a:fontRef idx="minor">
+            <a:schemeClr val="tx1"/>
+          </a:fontRef>
+        </p:style>
+      </p:cxnSp>
+      <p:cxnSp>
+        <p:nvCxnSpPr>
+          <p:cNvPr id="43" name="Gerade Verbindung mit Pfeil 42">
+            <a:extLst>
+              <a:ext uri="{FF2B5EF4-FFF2-40B4-BE49-F238E27FC236}">
+                <a16:creationId xmlns:a16="http://schemas.microsoft.com/office/drawing/2014/main" id="{3F506CE4-9050-3E1A-7709-FA037DC2D9BA}"/>
+              </a:ext>
+            </a:extLst>
+          </p:cNvPr>
+          <p:cNvCxnSpPr>
+            <a:cxnSpLocks/>
+            <a:stCxn id="41" idx="4"/>
+          </p:cNvCxnSpPr>
+          <p:nvPr/>
+        </p:nvCxnSpPr>
+        <p:spPr>
+          <a:xfrm>
+            <a:off x="8813666" y="4143231"/>
+            <a:ext cx="1055917" cy="1147894"/>
+          </a:xfrm>
+          <a:prstGeom prst="straightConnector1">
+            <a:avLst/>
+          </a:prstGeom>
+          <a:ln>
+            <a:tailEnd type="none"/>
+          </a:ln>
+        </p:spPr>
+        <p:style>
+          <a:lnRef idx="2">
+            <a:schemeClr val="accent2"/>
+          </a:lnRef>
+          <a:fillRef idx="0">
+            <a:schemeClr val="accent2"/>
+          </a:fillRef>
+          <a:effectRef idx="1">
+            <a:schemeClr val="accent2"/>
+          </a:effectRef>
+          <a:fontRef idx="minor">
+            <a:schemeClr val="tx1"/>
+          </a:fontRef>
+        </p:style>
+      </p:cxnSp>
+      <p:cxnSp>
+        <p:nvCxnSpPr>
+          <p:cNvPr id="73" name="Gerader Verbinder 72">
+            <a:extLst>
+              <a:ext uri="{FF2B5EF4-FFF2-40B4-BE49-F238E27FC236}">
+                <a16:creationId xmlns:a16="http://schemas.microsoft.com/office/drawing/2014/main" id="{18189E7C-C9B6-7EC8-C814-44E1E84D7C4E}"/>
+              </a:ext>
+            </a:extLst>
+          </p:cNvPr>
+          <p:cNvCxnSpPr/>
+          <p:nvPr/>
+        </p:nvCxnSpPr>
+        <p:spPr>
+          <a:xfrm>
+            <a:off x="3322301" y="2397504"/>
+            <a:ext cx="0" cy="4898105"/>
+          </a:xfrm>
+          <a:prstGeom prst="line">
+            <a:avLst/>
+          </a:prstGeom>
+          <a:ln>
+            <a:solidFill>
+              <a:schemeClr val="bg1">
+                <a:lumMod val="65000"/>
+              </a:schemeClr>
+            </a:solidFill>
+          </a:ln>
+        </p:spPr>
+        <p:style>
+          <a:lnRef idx="2">
+            <a:schemeClr val="accent1"/>
+          </a:lnRef>
+          <a:fillRef idx="0">
+            <a:schemeClr val="accent1"/>
+          </a:fillRef>
+          <a:effectRef idx="1">
+            <a:schemeClr val="accent1"/>
+          </a:effectRef>
+          <a:fontRef idx="minor">
+            <a:schemeClr val="tx1"/>
+          </a:fontRef>
+        </p:style>
+      </p:cxnSp>
+      <p:cxnSp>
+        <p:nvCxnSpPr>
+          <p:cNvPr id="74" name="Gerader Verbinder 73">
+            <a:extLst>
+              <a:ext uri="{FF2B5EF4-FFF2-40B4-BE49-F238E27FC236}">
+                <a16:creationId xmlns:a16="http://schemas.microsoft.com/office/drawing/2014/main" id="{76985AFB-6F05-C92E-F1A7-C2E049F6C3D0}"/>
+              </a:ext>
+            </a:extLst>
+          </p:cNvPr>
+          <p:cNvCxnSpPr/>
+          <p:nvPr/>
+        </p:nvCxnSpPr>
+        <p:spPr>
+          <a:xfrm>
+            <a:off x="7213359" y="2402587"/>
+            <a:ext cx="0" cy="4898105"/>
+          </a:xfrm>
+          <a:prstGeom prst="line">
+            <a:avLst/>
+          </a:prstGeom>
+          <a:ln>
+            <a:solidFill>
+              <a:schemeClr val="bg1">
+                <a:lumMod val="65000"/>
+              </a:schemeClr>
+            </a:solidFill>
+          </a:ln>
+        </p:spPr>
+        <p:style>
+          <a:lnRef idx="2">
+            <a:schemeClr val="accent1"/>
+          </a:lnRef>
+          <a:fillRef idx="0">
+            <a:schemeClr val="accent1"/>
+          </a:fillRef>
+          <a:effectRef idx="1">
+            <a:schemeClr val="accent1"/>
+          </a:effectRef>
+          <a:fontRef idx="minor">
+            <a:schemeClr val="tx1"/>
+          </a:fontRef>
+        </p:style>
+      </p:cxnSp>
+      <p:sp>
+        <p:nvSpPr>
+          <p:cNvPr id="76" name="Textfeld 75">
+            <a:extLst>
+              <a:ext uri="{FF2B5EF4-FFF2-40B4-BE49-F238E27FC236}">
+                <a16:creationId xmlns:a16="http://schemas.microsoft.com/office/drawing/2014/main" id="{189D6A6E-DA6D-0D05-8121-CD49CA608112}"/>
+              </a:ext>
+            </a:extLst>
+          </p:cNvPr>
+          <p:cNvSpPr txBox="1"/>
+          <p:nvPr/>
+        </p:nvSpPr>
+        <p:spPr>
+          <a:xfrm>
+            <a:off x="1519008" y="2379755"/>
+            <a:ext cx="868571" cy="424732"/>
+          </a:xfrm>
+          <a:prstGeom prst="rect">
+            <a:avLst/>
+          </a:prstGeom>
+          <a:noFill/>
+        </p:spPr>
+        <p:txBody>
+          <a:bodyPr wrap="none" rtlCol="0">
+            <a:spAutoFit/>
+          </a:bodyPr>
+          <a:lstStyle/>
+          <a:p>
+            <a:r>
+              <a:rPr lang="de-DE" sz="2160"/>
+              <a:t>Sate1</a:t>
+            </a:r>
+          </a:p>
+        </p:txBody>
+      </p:sp>
+      <p:sp>
+        <p:nvSpPr>
+          <p:cNvPr id="102" name="Textfeld 101">
+            <a:extLst>
+              <a:ext uri="{FF2B5EF4-FFF2-40B4-BE49-F238E27FC236}">
+                <a16:creationId xmlns:a16="http://schemas.microsoft.com/office/drawing/2014/main" id="{7B2C5807-4978-BFC4-0C9B-52EB3A1BD31F}"/>
+              </a:ext>
+            </a:extLst>
+          </p:cNvPr>
+          <p:cNvSpPr txBox="1"/>
+          <p:nvPr/>
+        </p:nvSpPr>
+        <p:spPr>
+          <a:xfrm>
+            <a:off x="3622008" y="2372133"/>
+            <a:ext cx="1013354" cy="424732"/>
+          </a:xfrm>
+          <a:prstGeom prst="rect">
+            <a:avLst/>
+          </a:prstGeom>
+          <a:noFill/>
+        </p:spPr>
+        <p:txBody>
+          <a:bodyPr wrap="none" rtlCol="0">
+            <a:spAutoFit/>
+          </a:bodyPr>
+          <a:lstStyle/>
+          <a:p>
+            <a:r>
+              <a:rPr lang="de-DE" sz="2160"/>
+              <a:t>State 2</a:t>
+            </a:r>
+          </a:p>
+        </p:txBody>
+      </p:sp>
+      <p:sp>
+        <p:nvSpPr>
+          <p:cNvPr id="103" name="Textfeld 102">
+            <a:extLst>
+              <a:ext uri="{FF2B5EF4-FFF2-40B4-BE49-F238E27FC236}">
+                <a16:creationId xmlns:a16="http://schemas.microsoft.com/office/drawing/2014/main" id="{9BC017A0-BBF2-3218-075F-C49555D27F7C}"/>
+              </a:ext>
+            </a:extLst>
+          </p:cNvPr>
+          <p:cNvSpPr txBox="1"/>
+          <p:nvPr/>
+        </p:nvSpPr>
+        <p:spPr>
+          <a:xfrm>
+            <a:off x="7462271" y="2382294"/>
+            <a:ext cx="420308" cy="424732"/>
+          </a:xfrm>
+          <a:prstGeom prst="rect">
+            <a:avLst/>
+          </a:prstGeom>
+          <a:noFill/>
+        </p:spPr>
+        <p:txBody>
+          <a:bodyPr wrap="none" rtlCol="0">
+            <a:spAutoFit/>
+          </a:bodyPr>
+          <a:lstStyle/>
+          <a:p>
+            <a:r>
+              <a:rPr lang="de-DE" sz="2160"/>
+              <a:t>…</a:t>
+            </a:r>
+          </a:p>
+        </p:txBody>
+      </p:sp>
+      <p:sp>
+        <p:nvSpPr>
+          <p:cNvPr id="28" name="Rechteck 27">
+            <a:extLst>
+              <a:ext uri="{FF2B5EF4-FFF2-40B4-BE49-F238E27FC236}">
+                <a16:creationId xmlns:a16="http://schemas.microsoft.com/office/drawing/2014/main" id="{ECFA04D4-8464-CFF4-EF11-00806DD1F0E6}"/>
+              </a:ext>
+            </a:extLst>
+          </p:cNvPr>
+          <p:cNvSpPr/>
+          <p:nvPr/>
+        </p:nvSpPr>
+        <p:spPr>
+          <a:xfrm>
+            <a:off x="11241792" y="4649080"/>
+            <a:ext cx="1676301" cy="1005781"/>
+          </a:xfrm>
+          <a:prstGeom prst="rect">
+            <a:avLst/>
+          </a:prstGeom>
+          <a:solidFill>
+            <a:schemeClr val="accent1">
+              <a:alpha val="28000"/>
+            </a:schemeClr>
+          </a:solidFill>
+        </p:spPr>
+        <p:style>
+          <a:lnRef idx="2">
+            <a:schemeClr val="accent1">
+              <a:shade val="15000"/>
+            </a:schemeClr>
+          </a:lnRef>
+          <a:fillRef idx="1">
+            <a:schemeClr val="accent1"/>
+          </a:fillRef>
+          <a:effectRef idx="0">
+            <a:schemeClr val="accent1"/>
+          </a:effectRef>
+          <a:fontRef idx="minor">
+            <a:schemeClr val="lt1"/>
+          </a:fontRef>
+        </p:style>
+        <p:txBody>
+          <a:bodyPr rtlCol="0" anchor="ctr"/>
+          <a:lstStyle/>
+          <a:p>
+            <a:pPr algn="ctr"/>
+            <a:r>
+              <a:rPr lang="de-DE" sz="2160">
+                <a:solidFill>
+                  <a:schemeClr val="tx1">
+                    <a:lumMod val="75000"/>
+                    <a:lumOff val="25000"/>
+                  </a:schemeClr>
+                </a:solidFill>
+              </a:rPr>
+              <a:t>mediatorVM</a:t>
+            </a:r>
+          </a:p>
+          <a:p>
+            <a:r>
+              <a:rPr lang="de-DE" sz="1320">
+                <a:solidFill>
+                  <a:schemeClr val="tx1">
+                    <a:lumMod val="75000"/>
+                    <a:lumOff val="25000"/>
+                  </a:schemeClr>
+                </a:solidFill>
+              </a:rPr>
+              <a:t>mediatorProcess</a:t>
+            </a:r>
+          </a:p>
+        </p:txBody>
+      </p:sp>
+      <p:sp>
+        <p:nvSpPr>
+          <p:cNvPr id="29" name="Ellipse 28">
+            <a:extLst>
+              <a:ext uri="{FF2B5EF4-FFF2-40B4-BE49-F238E27FC236}">
+                <a16:creationId xmlns:a16="http://schemas.microsoft.com/office/drawing/2014/main" id="{FA8063DB-0350-14BA-00A7-1A33D8DD68D1}"/>
+              </a:ext>
+            </a:extLst>
+          </p:cNvPr>
+          <p:cNvSpPr/>
+          <p:nvPr/>
+        </p:nvSpPr>
+        <p:spPr>
+          <a:xfrm>
+            <a:off x="12635657" y="5252375"/>
+            <a:ext cx="284464" cy="264144"/>
+          </a:xfrm>
+          <a:prstGeom prst="ellipse">
+            <a:avLst/>
+          </a:prstGeom>
+          <a:solidFill>
+            <a:schemeClr val="accent1">
+              <a:alpha val="28000"/>
+            </a:schemeClr>
+          </a:solidFill>
+        </p:spPr>
+        <p:style>
+          <a:lnRef idx="2">
+            <a:schemeClr val="accent2">
+              <a:shade val="15000"/>
+            </a:schemeClr>
+          </a:lnRef>
+          <a:fillRef idx="1">
+            <a:schemeClr val="accent2"/>
+          </a:fillRef>
+          <a:effectRef idx="0">
+            <a:schemeClr val="accent2"/>
+          </a:effectRef>
+          <a:fontRef idx="minor">
+            <a:schemeClr val="lt1"/>
+          </a:fontRef>
+        </p:style>
+        <p:txBody>
+          <a:bodyPr rtlCol="0" anchor="ctr"/>
+          <a:lstStyle/>
+          <a:p>
+            <a:pPr algn="ctr"/>
+            <a:endParaRPr lang="de-DE" sz="2160">
+              <a:solidFill>
+                <a:schemeClr val="tx1">
+                  <a:lumMod val="75000"/>
+                  <a:lumOff val="25000"/>
+                </a:schemeClr>
+              </a:solidFill>
+            </a:endParaRPr>
+          </a:p>
+        </p:txBody>
+      </p:sp>
+      <p:sp>
+        <p:nvSpPr>
+          <p:cNvPr id="30" name="Rechteck 29">
+            <a:extLst>
+              <a:ext uri="{FF2B5EF4-FFF2-40B4-BE49-F238E27FC236}">
+                <a16:creationId xmlns:a16="http://schemas.microsoft.com/office/drawing/2014/main" id="{B86B998D-D668-245F-D642-BF661032B272}"/>
+              </a:ext>
+            </a:extLst>
+          </p:cNvPr>
+          <p:cNvSpPr/>
+          <p:nvPr/>
+        </p:nvSpPr>
+        <p:spPr>
+          <a:xfrm>
+            <a:off x="11241792" y="3158186"/>
+            <a:ext cx="1676301" cy="1005781"/>
+          </a:xfrm>
+          <a:prstGeom prst="rect">
+            <a:avLst/>
+          </a:prstGeom>
+          <a:solidFill>
+            <a:schemeClr val="accent1">
+              <a:alpha val="28000"/>
+            </a:schemeClr>
+          </a:solidFill>
+        </p:spPr>
+        <p:style>
+          <a:lnRef idx="2">
+            <a:schemeClr val="accent1">
+              <a:shade val="15000"/>
+            </a:schemeClr>
+          </a:lnRef>
+          <a:fillRef idx="1">
+            <a:schemeClr val="accent1"/>
+          </a:fillRef>
+          <a:effectRef idx="0">
+            <a:schemeClr val="accent1"/>
+          </a:effectRef>
+          <a:fontRef idx="minor">
+            <a:schemeClr val="lt1"/>
+          </a:fontRef>
+        </p:style>
+        <p:txBody>
+          <a:bodyPr rtlCol="0" anchor="ctr"/>
+          <a:lstStyle/>
+          <a:p>
+            <a:pPr algn="ctr"/>
+            <a:r>
+              <a:rPr lang="de-DE" sz="2160">
+                <a:solidFill>
+                  <a:schemeClr val="tx1">
+                    <a:lumMod val="75000"/>
+                    <a:lumOff val="25000"/>
+                  </a:schemeClr>
+                </a:solidFill>
+              </a:rPr>
+              <a:t>Controller</a:t>
+            </a:r>
+          </a:p>
+          <a:p>
+            <a:pPr algn="ctr"/>
+            <a:endParaRPr lang="de-DE" sz="2160">
+              <a:solidFill>
+                <a:schemeClr val="tx1">
+                  <a:lumMod val="75000"/>
+                  <a:lumOff val="25000"/>
+                </a:schemeClr>
+              </a:solidFill>
+            </a:endParaRPr>
+          </a:p>
+          <a:p>
+            <a:r>
+              <a:rPr lang="de-DE" sz="1260">
+                <a:solidFill>
+                  <a:schemeClr val="tx1">
+                    <a:lumMod val="75000"/>
+                    <a:lumOff val="25000"/>
+                  </a:schemeClr>
+                </a:solidFill>
+              </a:rPr>
+              <a:t>mountPoint</a:t>
+            </a:r>
+          </a:p>
+        </p:txBody>
+      </p:sp>
+      <p:sp>
+        <p:nvSpPr>
+          <p:cNvPr id="31" name="Ellipse 30">
+            <a:extLst>
+              <a:ext uri="{FF2B5EF4-FFF2-40B4-BE49-F238E27FC236}">
+                <a16:creationId xmlns:a16="http://schemas.microsoft.com/office/drawing/2014/main" id="{98E40CAA-E109-688B-D101-83643A48623F}"/>
+              </a:ext>
+            </a:extLst>
+          </p:cNvPr>
+          <p:cNvSpPr/>
+          <p:nvPr/>
+        </p:nvSpPr>
+        <p:spPr>
+          <a:xfrm>
+            <a:off x="12583034" y="3879087"/>
+            <a:ext cx="284464" cy="264144"/>
+          </a:xfrm>
+          <a:prstGeom prst="ellipse">
+            <a:avLst/>
+          </a:prstGeom>
+          <a:solidFill>
+            <a:schemeClr val="accent1">
+              <a:alpha val="28000"/>
+            </a:schemeClr>
+          </a:solidFill>
+        </p:spPr>
+        <p:style>
+          <a:lnRef idx="2">
+            <a:schemeClr val="accent2">
+              <a:shade val="15000"/>
+            </a:schemeClr>
+          </a:lnRef>
+          <a:fillRef idx="1">
+            <a:schemeClr val="accent2"/>
+          </a:fillRef>
+          <a:effectRef idx="0">
+            <a:schemeClr val="accent2"/>
+          </a:effectRef>
+          <a:fontRef idx="minor">
+            <a:schemeClr val="lt1"/>
+          </a:fontRef>
+        </p:style>
+        <p:txBody>
+          <a:bodyPr rtlCol="0" anchor="ctr"/>
+          <a:lstStyle/>
+          <a:p>
+            <a:pPr algn="ctr"/>
+            <a:endParaRPr lang="de-DE" sz="2160">
+              <a:solidFill>
+                <a:schemeClr val="tx1">
+                  <a:lumMod val="75000"/>
+                  <a:lumOff val="25000"/>
+                </a:schemeClr>
+              </a:solidFill>
+            </a:endParaRPr>
+          </a:p>
+        </p:txBody>
+      </p:sp>
+      <p:sp>
+        <p:nvSpPr>
+          <p:cNvPr id="32" name="Zylinder 31">
+            <a:extLst>
+              <a:ext uri="{FF2B5EF4-FFF2-40B4-BE49-F238E27FC236}">
+                <a16:creationId xmlns:a16="http://schemas.microsoft.com/office/drawing/2014/main" id="{08C5657F-733F-CF27-87B6-B4CD926E6DBA}"/>
+              </a:ext>
+            </a:extLst>
+          </p:cNvPr>
+          <p:cNvSpPr/>
+          <p:nvPr/>
+        </p:nvSpPr>
+        <p:spPr>
+          <a:xfrm>
+            <a:off x="11949963" y="6371100"/>
+            <a:ext cx="1493432" cy="497810"/>
+          </a:xfrm>
+          <a:prstGeom prst="can">
+            <a:avLst/>
+          </a:prstGeom>
+          <a:solidFill>
+            <a:schemeClr val="accent1">
+              <a:alpha val="28000"/>
+            </a:schemeClr>
+          </a:solidFill>
+        </p:spPr>
+        <p:style>
+          <a:lnRef idx="2">
+            <a:schemeClr val="accent1">
+              <a:shade val="15000"/>
+            </a:schemeClr>
+          </a:lnRef>
+          <a:fillRef idx="1">
+            <a:schemeClr val="accent1"/>
+          </a:fillRef>
+          <a:effectRef idx="0">
+            <a:schemeClr val="accent1"/>
+          </a:effectRef>
+          <a:fontRef idx="minor">
+            <a:schemeClr val="lt1"/>
+          </a:fontRef>
+        </p:style>
+        <p:txBody>
+          <a:bodyPr rtlCol="0" anchor="ctr"/>
+          <a:lstStyle/>
+          <a:p>
+            <a:pPr algn="ctr"/>
+            <a:r>
+              <a:rPr lang="de-DE" sz="2160">
+                <a:solidFill>
+                  <a:schemeClr val="tx1">
+                    <a:lumMod val="75000"/>
+                    <a:lumOff val="25000"/>
+                  </a:schemeClr>
+                </a:solidFill>
+              </a:rPr>
+              <a:t>Device</a:t>
+            </a:r>
+          </a:p>
+        </p:txBody>
+      </p:sp>
+      <p:cxnSp>
+        <p:nvCxnSpPr>
+          <p:cNvPr id="33" name="Gerade Verbindung mit Pfeil 32">
+            <a:extLst>
+              <a:ext uri="{FF2B5EF4-FFF2-40B4-BE49-F238E27FC236}">
+                <a16:creationId xmlns:a16="http://schemas.microsoft.com/office/drawing/2014/main" id="{E18F2D3E-B85D-85A7-6F69-4DEE2599B3F0}"/>
+              </a:ext>
+            </a:extLst>
+          </p:cNvPr>
+          <p:cNvCxnSpPr>
+            <a:cxnSpLocks/>
+            <a:stCxn id="29" idx="4"/>
+            <a:endCxn id="32" idx="1"/>
+          </p:cNvCxnSpPr>
+          <p:nvPr/>
+        </p:nvCxnSpPr>
+        <p:spPr>
+          <a:xfrm flipH="1">
+            <a:off x="12696678" y="5516517"/>
+            <a:ext cx="81209" cy="854583"/>
+          </a:xfrm>
+          <a:prstGeom prst="straightConnector1">
+            <a:avLst/>
+          </a:prstGeom>
+          <a:ln>
+            <a:tailEnd type="none"/>
+          </a:ln>
+        </p:spPr>
+        <p:style>
+          <a:lnRef idx="2">
+            <a:schemeClr val="accent2"/>
+          </a:lnRef>
+          <a:fillRef idx="0">
+            <a:schemeClr val="accent2"/>
+          </a:fillRef>
+          <a:effectRef idx="1">
+            <a:schemeClr val="accent2"/>
+          </a:effectRef>
+          <a:fontRef idx="minor">
+            <a:schemeClr val="tx1"/>
+          </a:fontRef>
+        </p:style>
+      </p:cxnSp>
+      <p:sp>
+        <p:nvSpPr>
+          <p:cNvPr id="34" name="Rechteck 33">
+            <a:extLst>
+              <a:ext uri="{FF2B5EF4-FFF2-40B4-BE49-F238E27FC236}">
+                <a16:creationId xmlns:a16="http://schemas.microsoft.com/office/drawing/2014/main" id="{65927F4D-6693-3B1A-72AA-47667F1B3C6D}"/>
+              </a:ext>
+            </a:extLst>
+          </p:cNvPr>
+          <p:cNvSpPr/>
+          <p:nvPr/>
+        </p:nvSpPr>
+        <p:spPr>
+          <a:xfrm>
+            <a:off x="13217796" y="4649079"/>
+            <a:ext cx="1676301" cy="1005781"/>
+          </a:xfrm>
+          <a:prstGeom prst="rect">
+            <a:avLst/>
+          </a:prstGeom>
+          <a:solidFill>
+            <a:schemeClr val="accent1">
+              <a:alpha val="28000"/>
+            </a:schemeClr>
+          </a:solidFill>
+        </p:spPr>
+        <p:style>
+          <a:lnRef idx="2">
+            <a:schemeClr val="accent1">
+              <a:shade val="15000"/>
+            </a:schemeClr>
+          </a:lnRef>
+          <a:fillRef idx="1">
+            <a:schemeClr val="accent1"/>
+          </a:fillRef>
+          <a:effectRef idx="0">
+            <a:schemeClr val="accent1"/>
+          </a:effectRef>
+          <a:fontRef idx="minor">
+            <a:schemeClr val="lt1"/>
+          </a:fontRef>
+        </p:style>
+        <p:txBody>
+          <a:bodyPr rtlCol="0" anchor="ctr"/>
+          <a:lstStyle/>
+          <a:p>
+            <a:pPr algn="ctr"/>
+            <a:r>
+              <a:rPr lang="de-DE" sz="2160">
+                <a:solidFill>
+                  <a:schemeClr val="tx1">
+                    <a:lumMod val="75000"/>
+                    <a:lumOff val="25000"/>
+                  </a:schemeClr>
+                </a:solidFill>
+              </a:rPr>
+              <a:t>mediatorVM</a:t>
+            </a:r>
+          </a:p>
+          <a:p>
+            <a:r>
+              <a:rPr lang="de-DE" sz="1320">
+                <a:solidFill>
+                  <a:schemeClr val="tx1">
+                    <a:lumMod val="75000"/>
+                    <a:lumOff val="25000"/>
+                  </a:schemeClr>
+                </a:solidFill>
+              </a:rPr>
+              <a:t>mediatorProcess</a:t>
+            </a:r>
+          </a:p>
+        </p:txBody>
+      </p:sp>
+      <p:sp>
+        <p:nvSpPr>
+          <p:cNvPr id="35" name="Ellipse 34">
+            <a:extLst>
+              <a:ext uri="{FF2B5EF4-FFF2-40B4-BE49-F238E27FC236}">
+                <a16:creationId xmlns:a16="http://schemas.microsoft.com/office/drawing/2014/main" id="{CD45C68A-5907-B2C9-7E47-D80D1AF79BA0}"/>
+              </a:ext>
+            </a:extLst>
+          </p:cNvPr>
+          <p:cNvSpPr/>
+          <p:nvPr/>
+        </p:nvSpPr>
+        <p:spPr>
+          <a:xfrm>
+            <a:off x="14630490" y="5390718"/>
+            <a:ext cx="284464" cy="264144"/>
+          </a:xfrm>
+          <a:prstGeom prst="ellipse">
+            <a:avLst/>
+          </a:prstGeom>
+          <a:solidFill>
+            <a:schemeClr val="accent1">
+              <a:alpha val="28000"/>
+            </a:schemeClr>
+          </a:solidFill>
+        </p:spPr>
+        <p:style>
+          <a:lnRef idx="2">
+            <a:schemeClr val="accent2">
+              <a:shade val="15000"/>
+            </a:schemeClr>
+          </a:lnRef>
+          <a:fillRef idx="1">
+            <a:schemeClr val="accent2"/>
+          </a:fillRef>
+          <a:effectRef idx="0">
+            <a:schemeClr val="accent2"/>
+          </a:effectRef>
+          <a:fontRef idx="minor">
+            <a:schemeClr val="lt1"/>
+          </a:fontRef>
+        </p:style>
+        <p:txBody>
+          <a:bodyPr rtlCol="0" anchor="ctr"/>
+          <a:lstStyle/>
+          <a:p>
+            <a:pPr algn="ctr"/>
+            <a:endParaRPr lang="de-DE" sz="2160">
+              <a:solidFill>
+                <a:schemeClr val="tx1">
+                  <a:lumMod val="75000"/>
+                  <a:lumOff val="25000"/>
+                </a:schemeClr>
+              </a:solidFill>
+            </a:endParaRPr>
+          </a:p>
+        </p:txBody>
+      </p:sp>
+      <p:cxnSp>
+        <p:nvCxnSpPr>
+          <p:cNvPr id="36" name="Gerade Verbindung mit Pfeil 35">
+            <a:extLst>
+              <a:ext uri="{FF2B5EF4-FFF2-40B4-BE49-F238E27FC236}">
+                <a16:creationId xmlns:a16="http://schemas.microsoft.com/office/drawing/2014/main" id="{5AC32AE9-C35E-662B-CE04-AF25FE7E44AF}"/>
+              </a:ext>
+            </a:extLst>
+          </p:cNvPr>
+          <p:cNvCxnSpPr>
+            <a:cxnSpLocks/>
+            <a:stCxn id="35" idx="2"/>
+            <a:endCxn id="32" idx="1"/>
+          </p:cNvCxnSpPr>
+          <p:nvPr/>
+        </p:nvCxnSpPr>
+        <p:spPr>
+          <a:xfrm flipH="1">
+            <a:off x="12696679" y="5522790"/>
+            <a:ext cx="1933811" cy="848310"/>
+          </a:xfrm>
+          <a:prstGeom prst="straightConnector1">
+            <a:avLst/>
+          </a:prstGeom>
+          <a:ln>
+            <a:tailEnd type="none"/>
+          </a:ln>
+        </p:spPr>
+        <p:style>
+          <a:lnRef idx="2">
+            <a:schemeClr val="accent2"/>
+          </a:lnRef>
+          <a:fillRef idx="0">
+            <a:schemeClr val="accent2"/>
+          </a:fillRef>
+          <a:effectRef idx="1">
+            <a:schemeClr val="accent2"/>
+          </a:effectRef>
+          <a:fontRef idx="minor">
+            <a:schemeClr val="tx1"/>
+          </a:fontRef>
+        </p:style>
+      </p:cxnSp>
+      <p:cxnSp>
+        <p:nvCxnSpPr>
+          <p:cNvPr id="37" name="Gerade Verbindung mit Pfeil 36">
+            <a:extLst>
+              <a:ext uri="{FF2B5EF4-FFF2-40B4-BE49-F238E27FC236}">
+                <a16:creationId xmlns:a16="http://schemas.microsoft.com/office/drawing/2014/main" id="{77F51B4D-B23E-98A7-A78C-E7FE1E615931}"/>
+              </a:ext>
+            </a:extLst>
+          </p:cNvPr>
+          <p:cNvCxnSpPr>
+            <a:cxnSpLocks/>
+            <a:stCxn id="31" idx="4"/>
+            <a:endCxn id="35" idx="1"/>
+          </p:cNvCxnSpPr>
+          <p:nvPr/>
+        </p:nvCxnSpPr>
+        <p:spPr>
+          <a:xfrm>
+            <a:off x="12725266" y="4143231"/>
+            <a:ext cx="1946883" cy="1286170"/>
+          </a:xfrm>
+          <a:prstGeom prst="straightConnector1">
+            <a:avLst/>
+          </a:prstGeom>
+          <a:ln>
+            <a:tailEnd type="none"/>
+          </a:ln>
+        </p:spPr>
+        <p:style>
+          <a:lnRef idx="2">
+            <a:schemeClr val="accent2"/>
+          </a:lnRef>
+          <a:fillRef idx="0">
+            <a:schemeClr val="accent2"/>
+          </a:fillRef>
+          <a:effectRef idx="1">
+            <a:schemeClr val="accent2"/>
+          </a:effectRef>
+          <a:fontRef idx="minor">
+            <a:schemeClr val="tx1"/>
+          </a:fontRef>
+        </p:style>
+      </p:cxnSp>
+      <p:sp>
+        <p:nvSpPr>
+          <p:cNvPr id="48" name="Rechteck 47">
+            <a:extLst>
+              <a:ext uri="{FF2B5EF4-FFF2-40B4-BE49-F238E27FC236}">
+                <a16:creationId xmlns:a16="http://schemas.microsoft.com/office/drawing/2014/main" id="{3FB701FB-6985-6C08-2EF4-B83C5A03B45F}"/>
+              </a:ext>
+            </a:extLst>
+          </p:cNvPr>
+          <p:cNvSpPr/>
+          <p:nvPr/>
+        </p:nvSpPr>
+        <p:spPr>
+          <a:xfrm>
+            <a:off x="15087131" y="4649080"/>
+            <a:ext cx="1676301" cy="1005781"/>
+          </a:xfrm>
+          <a:prstGeom prst="rect">
+            <a:avLst/>
+          </a:prstGeom>
+          <a:solidFill>
+            <a:schemeClr val="accent1">
+              <a:alpha val="28000"/>
+            </a:schemeClr>
+          </a:solidFill>
+        </p:spPr>
+        <p:style>
+          <a:lnRef idx="2">
+            <a:schemeClr val="accent1">
+              <a:shade val="15000"/>
+            </a:schemeClr>
+          </a:lnRef>
+          <a:fillRef idx="1">
+            <a:schemeClr val="accent1"/>
+          </a:fillRef>
+          <a:effectRef idx="0">
+            <a:schemeClr val="accent1"/>
+          </a:effectRef>
+          <a:fontRef idx="minor">
+            <a:schemeClr val="lt1"/>
+          </a:fontRef>
+        </p:style>
+        <p:txBody>
+          <a:bodyPr rtlCol="0" anchor="ctr"/>
+          <a:lstStyle/>
+          <a:p>
+            <a:pPr algn="ctr"/>
+            <a:r>
+              <a:rPr lang="de-DE" sz="2160">
+                <a:solidFill>
+                  <a:schemeClr val="tx1">
+                    <a:lumMod val="75000"/>
+                    <a:lumOff val="25000"/>
+                  </a:schemeClr>
+                </a:solidFill>
+              </a:rPr>
+              <a:t>mediatorVM</a:t>
+            </a:r>
+          </a:p>
+          <a:p>
+            <a:endParaRPr lang="de-DE" sz="1320">
+              <a:solidFill>
+                <a:schemeClr val="tx1">
+                  <a:lumMod val="75000"/>
+                  <a:lumOff val="25000"/>
+                </a:schemeClr>
+              </a:solidFill>
+            </a:endParaRPr>
+          </a:p>
+        </p:txBody>
+      </p:sp>
+      <p:sp>
+        <p:nvSpPr>
+          <p:cNvPr id="50" name="Rechteck 49">
+            <a:extLst>
+              <a:ext uri="{FF2B5EF4-FFF2-40B4-BE49-F238E27FC236}">
+                <a16:creationId xmlns:a16="http://schemas.microsoft.com/office/drawing/2014/main" id="{0F1571F3-7F52-8FC2-83B8-7F3582351EFE}"/>
+              </a:ext>
+            </a:extLst>
+          </p:cNvPr>
+          <p:cNvSpPr/>
+          <p:nvPr/>
+        </p:nvSpPr>
+        <p:spPr>
+          <a:xfrm>
+            <a:off x="15087131" y="3158186"/>
+            <a:ext cx="1676301" cy="1005781"/>
+          </a:xfrm>
+          <a:prstGeom prst="rect">
+            <a:avLst/>
+          </a:prstGeom>
+          <a:solidFill>
+            <a:schemeClr val="accent1">
+              <a:alpha val="28000"/>
+            </a:schemeClr>
+          </a:solidFill>
+        </p:spPr>
+        <p:style>
+          <a:lnRef idx="2">
+            <a:schemeClr val="accent1">
+              <a:shade val="15000"/>
+            </a:schemeClr>
+          </a:lnRef>
+          <a:fillRef idx="1">
+            <a:schemeClr val="accent1"/>
+          </a:fillRef>
+          <a:effectRef idx="0">
+            <a:schemeClr val="accent1"/>
+          </a:effectRef>
+          <a:fontRef idx="minor">
+            <a:schemeClr val="lt1"/>
+          </a:fontRef>
+        </p:style>
+        <p:txBody>
+          <a:bodyPr rtlCol="0" anchor="ctr"/>
+          <a:lstStyle/>
+          <a:p>
+            <a:pPr algn="ctr"/>
+            <a:r>
+              <a:rPr lang="de-DE" sz="2160">
+                <a:solidFill>
+                  <a:schemeClr val="tx1">
+                    <a:lumMod val="75000"/>
+                    <a:lumOff val="25000"/>
+                  </a:schemeClr>
+                </a:solidFill>
+              </a:rPr>
+              <a:t>Controller</a:t>
+            </a:r>
+          </a:p>
+          <a:p>
+            <a:pPr algn="ctr"/>
+            <a:endParaRPr lang="de-DE" sz="2160">
+              <a:solidFill>
+                <a:schemeClr val="tx1">
+                  <a:lumMod val="75000"/>
+                  <a:lumOff val="25000"/>
+                </a:schemeClr>
+              </a:solidFill>
+            </a:endParaRPr>
+          </a:p>
+          <a:p>
+            <a:r>
+              <a:rPr lang="de-DE" sz="1260">
+                <a:solidFill>
+                  <a:schemeClr val="tx1">
+                    <a:lumMod val="75000"/>
+                    <a:lumOff val="25000"/>
+                  </a:schemeClr>
+                </a:solidFill>
+              </a:rPr>
+              <a:t>mountPoint</a:t>
+            </a:r>
+          </a:p>
+        </p:txBody>
+      </p:sp>
+      <p:sp>
+        <p:nvSpPr>
+          <p:cNvPr id="54" name="Ellipse 53">
+            <a:extLst>
+              <a:ext uri="{FF2B5EF4-FFF2-40B4-BE49-F238E27FC236}">
+                <a16:creationId xmlns:a16="http://schemas.microsoft.com/office/drawing/2014/main" id="{B4F67C50-22D3-3DD0-1B70-E21AA58E383E}"/>
+              </a:ext>
+            </a:extLst>
+          </p:cNvPr>
+          <p:cNvSpPr/>
+          <p:nvPr/>
+        </p:nvSpPr>
+        <p:spPr>
+          <a:xfrm>
+            <a:off x="16397696" y="3831247"/>
+            <a:ext cx="284464" cy="264144"/>
+          </a:xfrm>
+          <a:prstGeom prst="ellipse">
+            <a:avLst/>
+          </a:prstGeom>
+          <a:solidFill>
+            <a:schemeClr val="accent1">
+              <a:alpha val="28000"/>
+            </a:schemeClr>
+          </a:solidFill>
+        </p:spPr>
+        <p:style>
+          <a:lnRef idx="2">
+            <a:schemeClr val="accent2">
+              <a:shade val="15000"/>
+            </a:schemeClr>
+          </a:lnRef>
+          <a:fillRef idx="1">
+            <a:schemeClr val="accent2"/>
+          </a:fillRef>
+          <a:effectRef idx="0">
+            <a:schemeClr val="accent2"/>
+          </a:effectRef>
+          <a:fontRef idx="minor">
+            <a:schemeClr val="lt1"/>
+          </a:fontRef>
+        </p:style>
+        <p:txBody>
+          <a:bodyPr rtlCol="0" anchor="ctr"/>
+          <a:lstStyle/>
+          <a:p>
+            <a:pPr algn="ctr"/>
+            <a:endParaRPr lang="de-DE" sz="2160">
+              <a:solidFill>
+                <a:schemeClr val="tx1">
+                  <a:lumMod val="75000"/>
+                  <a:lumOff val="25000"/>
+                </a:schemeClr>
+              </a:solidFill>
+            </a:endParaRPr>
+          </a:p>
+        </p:txBody>
+      </p:sp>
+      <p:sp>
+        <p:nvSpPr>
+          <p:cNvPr id="59" name="Zylinder 58">
+            <a:extLst>
+              <a:ext uri="{FF2B5EF4-FFF2-40B4-BE49-F238E27FC236}">
+                <a16:creationId xmlns:a16="http://schemas.microsoft.com/office/drawing/2014/main" id="{296D4B84-45FB-F326-0011-A9722BE5F162}"/>
+              </a:ext>
+            </a:extLst>
+          </p:cNvPr>
+          <p:cNvSpPr/>
+          <p:nvPr/>
+        </p:nvSpPr>
+        <p:spPr>
+          <a:xfrm>
+            <a:off x="15762734" y="6340623"/>
+            <a:ext cx="1493432" cy="497810"/>
+          </a:xfrm>
+          <a:prstGeom prst="can">
+            <a:avLst/>
+          </a:prstGeom>
+          <a:solidFill>
+            <a:schemeClr val="accent1">
+              <a:alpha val="28000"/>
+            </a:schemeClr>
+          </a:solidFill>
+        </p:spPr>
+        <p:style>
+          <a:lnRef idx="2">
+            <a:schemeClr val="accent1">
+              <a:shade val="15000"/>
+            </a:schemeClr>
+          </a:lnRef>
+          <a:fillRef idx="1">
+            <a:schemeClr val="accent1"/>
+          </a:fillRef>
+          <a:effectRef idx="0">
+            <a:schemeClr val="accent1"/>
+          </a:effectRef>
+          <a:fontRef idx="minor">
+            <a:schemeClr val="lt1"/>
+          </a:fontRef>
+        </p:style>
+        <p:txBody>
+          <a:bodyPr rtlCol="0" anchor="ctr"/>
+          <a:lstStyle/>
+          <a:p>
+            <a:pPr algn="ctr"/>
+            <a:r>
+              <a:rPr lang="de-DE" sz="2160">
+                <a:solidFill>
+                  <a:schemeClr val="tx1">
+                    <a:lumMod val="75000"/>
+                    <a:lumOff val="25000"/>
+                  </a:schemeClr>
+                </a:solidFill>
+              </a:rPr>
+              <a:t>Device</a:t>
+            </a:r>
+          </a:p>
+        </p:txBody>
+      </p:sp>
+      <p:sp>
+        <p:nvSpPr>
+          <p:cNvPr id="60" name="Rechteck 59">
+            <a:extLst>
+              <a:ext uri="{FF2B5EF4-FFF2-40B4-BE49-F238E27FC236}">
+                <a16:creationId xmlns:a16="http://schemas.microsoft.com/office/drawing/2014/main" id="{6B8D4334-24BE-63F6-0351-BBC1E4026722}"/>
+              </a:ext>
+            </a:extLst>
+          </p:cNvPr>
+          <p:cNvSpPr/>
+          <p:nvPr/>
+        </p:nvSpPr>
+        <p:spPr>
+          <a:xfrm>
+            <a:off x="17063136" y="4649079"/>
+            <a:ext cx="1676301" cy="1005781"/>
+          </a:xfrm>
+          <a:prstGeom prst="rect">
+            <a:avLst/>
+          </a:prstGeom>
+          <a:solidFill>
+            <a:schemeClr val="accent1">
+              <a:alpha val="28000"/>
+            </a:schemeClr>
+          </a:solidFill>
+        </p:spPr>
+        <p:style>
+          <a:lnRef idx="2">
+            <a:schemeClr val="accent1">
+              <a:shade val="15000"/>
+            </a:schemeClr>
+          </a:lnRef>
+          <a:fillRef idx="1">
+            <a:schemeClr val="accent1"/>
+          </a:fillRef>
+          <a:effectRef idx="0">
+            <a:schemeClr val="accent1"/>
+          </a:effectRef>
+          <a:fontRef idx="minor">
+            <a:schemeClr val="lt1"/>
+          </a:fontRef>
+        </p:style>
+        <p:txBody>
+          <a:bodyPr rtlCol="0" anchor="ctr"/>
+          <a:lstStyle/>
+          <a:p>
+            <a:pPr algn="ctr"/>
+            <a:r>
+              <a:rPr lang="de-DE" sz="2160">
+                <a:solidFill>
+                  <a:schemeClr val="tx1">
+                    <a:lumMod val="75000"/>
+                    <a:lumOff val="25000"/>
+                  </a:schemeClr>
+                </a:solidFill>
+              </a:rPr>
+              <a:t>mediatorVM</a:t>
+            </a:r>
+          </a:p>
+          <a:p>
+            <a:r>
+              <a:rPr lang="de-DE" sz="1320">
+                <a:solidFill>
+                  <a:schemeClr val="tx1">
+                    <a:lumMod val="75000"/>
+                    <a:lumOff val="25000"/>
+                  </a:schemeClr>
+                </a:solidFill>
+              </a:rPr>
+              <a:t>mediatorProcess</a:t>
+            </a:r>
+          </a:p>
+        </p:txBody>
+      </p:sp>
+      <p:sp>
+        <p:nvSpPr>
+          <p:cNvPr id="61" name="Ellipse 60">
+            <a:extLst>
+              <a:ext uri="{FF2B5EF4-FFF2-40B4-BE49-F238E27FC236}">
+                <a16:creationId xmlns:a16="http://schemas.microsoft.com/office/drawing/2014/main" id="{9575412C-609D-E06C-40F6-04AAE4BABA67}"/>
+              </a:ext>
+            </a:extLst>
+          </p:cNvPr>
+          <p:cNvSpPr/>
+          <p:nvPr/>
+        </p:nvSpPr>
+        <p:spPr>
+          <a:xfrm>
+            <a:off x="18427495" y="5361611"/>
+            <a:ext cx="284464" cy="264144"/>
+          </a:xfrm>
+          <a:prstGeom prst="ellipse">
+            <a:avLst/>
+          </a:prstGeom>
+          <a:solidFill>
+            <a:schemeClr val="accent1">
+              <a:alpha val="28000"/>
+            </a:schemeClr>
+          </a:solidFill>
+        </p:spPr>
+        <p:style>
+          <a:lnRef idx="2">
+            <a:schemeClr val="accent2">
+              <a:shade val="15000"/>
+            </a:schemeClr>
+          </a:lnRef>
+          <a:fillRef idx="1">
+            <a:schemeClr val="accent2"/>
+          </a:fillRef>
+          <a:effectRef idx="0">
+            <a:schemeClr val="accent2"/>
+          </a:effectRef>
+          <a:fontRef idx="minor">
+            <a:schemeClr val="lt1"/>
+          </a:fontRef>
+        </p:style>
+        <p:txBody>
+          <a:bodyPr rtlCol="0" anchor="ctr"/>
+          <a:lstStyle/>
+          <a:p>
+            <a:pPr algn="ctr"/>
+            <a:endParaRPr lang="de-DE" sz="2160">
+              <a:solidFill>
+                <a:schemeClr val="tx1">
+                  <a:lumMod val="75000"/>
+                  <a:lumOff val="25000"/>
+                </a:schemeClr>
+              </a:solidFill>
+            </a:endParaRPr>
+          </a:p>
+        </p:txBody>
+      </p:sp>
+      <p:cxnSp>
+        <p:nvCxnSpPr>
+          <p:cNvPr id="62" name="Gerade Verbindung mit Pfeil 61">
+            <a:extLst>
+              <a:ext uri="{FF2B5EF4-FFF2-40B4-BE49-F238E27FC236}">
+                <a16:creationId xmlns:a16="http://schemas.microsoft.com/office/drawing/2014/main" id="{0FA22D83-E249-D68C-C407-44DE9F9DEDB5}"/>
+              </a:ext>
+            </a:extLst>
+          </p:cNvPr>
+          <p:cNvCxnSpPr>
+            <a:cxnSpLocks/>
+            <a:stCxn id="61" idx="2"/>
+            <a:endCxn id="59" idx="1"/>
+          </p:cNvCxnSpPr>
+          <p:nvPr/>
+        </p:nvCxnSpPr>
+        <p:spPr>
+          <a:xfrm flipH="1">
+            <a:off x="16509450" y="5493683"/>
+            <a:ext cx="1918045" cy="846940"/>
+          </a:xfrm>
+          <a:prstGeom prst="straightConnector1">
+            <a:avLst/>
+          </a:prstGeom>
+          <a:ln>
+            <a:tailEnd type="none"/>
+          </a:ln>
+        </p:spPr>
+        <p:style>
+          <a:lnRef idx="2">
+            <a:schemeClr val="accent2"/>
+          </a:lnRef>
+          <a:fillRef idx="0">
+            <a:schemeClr val="accent2"/>
+          </a:fillRef>
+          <a:effectRef idx="1">
+            <a:schemeClr val="accent2"/>
+          </a:effectRef>
+          <a:fontRef idx="minor">
+            <a:schemeClr val="tx1"/>
+          </a:fontRef>
+        </p:style>
+      </p:cxnSp>
+      <p:cxnSp>
+        <p:nvCxnSpPr>
+          <p:cNvPr id="63" name="Gerade Verbindung mit Pfeil 62">
+            <a:extLst>
+              <a:ext uri="{FF2B5EF4-FFF2-40B4-BE49-F238E27FC236}">
+                <a16:creationId xmlns:a16="http://schemas.microsoft.com/office/drawing/2014/main" id="{49B3D795-1BD8-E0FC-B7B9-0E6BAC54303F}"/>
+              </a:ext>
+            </a:extLst>
+          </p:cNvPr>
+          <p:cNvCxnSpPr>
+            <a:cxnSpLocks/>
+            <a:stCxn id="54" idx="4"/>
+            <a:endCxn id="61" idx="1"/>
+          </p:cNvCxnSpPr>
+          <p:nvPr/>
+        </p:nvCxnSpPr>
+        <p:spPr>
+          <a:xfrm>
+            <a:off x="16539928" y="4095391"/>
+            <a:ext cx="1929226" cy="1304903"/>
+          </a:xfrm>
+          <a:prstGeom prst="straightConnector1">
+            <a:avLst/>
+          </a:prstGeom>
+          <a:ln>
+            <a:tailEnd type="none"/>
+          </a:ln>
+        </p:spPr>
+        <p:style>
+          <a:lnRef idx="2">
+            <a:schemeClr val="accent2"/>
+          </a:lnRef>
+          <a:fillRef idx="0">
+            <a:schemeClr val="accent2"/>
+          </a:fillRef>
+          <a:effectRef idx="1">
+            <a:schemeClr val="accent2"/>
+          </a:effectRef>
+          <a:fontRef idx="minor">
+            <a:schemeClr val="tx1"/>
+          </a:fontRef>
+        </p:style>
+      </p:cxnSp>
+      <p:cxnSp>
+        <p:nvCxnSpPr>
+          <p:cNvPr id="64" name="Gerader Verbinder 63">
+            <a:extLst>
+              <a:ext uri="{FF2B5EF4-FFF2-40B4-BE49-F238E27FC236}">
+                <a16:creationId xmlns:a16="http://schemas.microsoft.com/office/drawing/2014/main" id="{DBBE4409-667C-9E2E-3880-75471AAEDFE4}"/>
+              </a:ext>
+            </a:extLst>
+          </p:cNvPr>
+          <p:cNvCxnSpPr/>
+          <p:nvPr/>
+        </p:nvCxnSpPr>
+        <p:spPr>
+          <a:xfrm>
+            <a:off x="11124959" y="2402587"/>
+            <a:ext cx="0" cy="4898105"/>
+          </a:xfrm>
+          <a:prstGeom prst="line">
+            <a:avLst/>
+          </a:prstGeom>
+          <a:ln>
+            <a:solidFill>
+              <a:schemeClr val="bg1">
+                <a:lumMod val="65000"/>
+              </a:schemeClr>
+            </a:solidFill>
+          </a:ln>
+        </p:spPr>
+        <p:style>
+          <a:lnRef idx="2">
+            <a:schemeClr val="accent1"/>
+          </a:lnRef>
+          <a:fillRef idx="0">
+            <a:schemeClr val="accent1"/>
+          </a:fillRef>
+          <a:effectRef idx="1">
+            <a:schemeClr val="accent1"/>
+          </a:effectRef>
+          <a:fontRef idx="minor">
+            <a:schemeClr val="tx1"/>
+          </a:fontRef>
+        </p:style>
+      </p:cxnSp>
+      <p:cxnSp>
+        <p:nvCxnSpPr>
+          <p:cNvPr id="65" name="Gerader Verbinder 64">
+            <a:extLst>
+              <a:ext uri="{FF2B5EF4-FFF2-40B4-BE49-F238E27FC236}">
+                <a16:creationId xmlns:a16="http://schemas.microsoft.com/office/drawing/2014/main" id="{7870ED2E-2366-F9BF-70EC-96AA5E0DCEF9}"/>
+              </a:ext>
+            </a:extLst>
+          </p:cNvPr>
+          <p:cNvCxnSpPr/>
+          <p:nvPr/>
+        </p:nvCxnSpPr>
+        <p:spPr>
+          <a:xfrm>
+            <a:off x="14985532" y="2407662"/>
+            <a:ext cx="0" cy="4898105"/>
+          </a:xfrm>
+          <a:prstGeom prst="line">
+            <a:avLst/>
+          </a:prstGeom>
+          <a:ln>
+            <a:solidFill>
+              <a:schemeClr val="bg1">
+                <a:lumMod val="65000"/>
+              </a:schemeClr>
+            </a:solidFill>
+          </a:ln>
+        </p:spPr>
+        <p:style>
+          <a:lnRef idx="2">
+            <a:schemeClr val="accent1"/>
+          </a:lnRef>
+          <a:fillRef idx="0">
+            <a:schemeClr val="accent1"/>
+          </a:fillRef>
+          <a:effectRef idx="1">
+            <a:schemeClr val="accent1"/>
+          </a:effectRef>
+          <a:fontRef idx="minor">
+            <a:schemeClr val="tx1"/>
+          </a:fontRef>
+        </p:style>
+      </p:cxnSp>
+      <p:sp>
+        <p:nvSpPr>
+          <p:cNvPr id="66" name="Textfeld 65">
+            <a:extLst>
+              <a:ext uri="{FF2B5EF4-FFF2-40B4-BE49-F238E27FC236}">
+                <a16:creationId xmlns:a16="http://schemas.microsoft.com/office/drawing/2014/main" id="{B760A0B0-C77F-4115-9648-6048E0863E44}"/>
+              </a:ext>
+            </a:extLst>
+          </p:cNvPr>
+          <p:cNvSpPr txBox="1"/>
+          <p:nvPr/>
+        </p:nvSpPr>
+        <p:spPr>
+          <a:xfrm>
+            <a:off x="11373871" y="2382294"/>
+            <a:ext cx="1013354" cy="424732"/>
+          </a:xfrm>
+          <a:prstGeom prst="rect">
+            <a:avLst/>
+          </a:prstGeom>
+          <a:noFill/>
+        </p:spPr>
+        <p:txBody>
+          <a:bodyPr wrap="none" rtlCol="0">
+            <a:spAutoFit/>
+          </a:bodyPr>
+          <a:lstStyle/>
+          <a:p>
+            <a:r>
+              <a:rPr lang="de-DE" sz="2160"/>
+              <a:t>State 3</a:t>
+            </a:r>
+          </a:p>
+        </p:txBody>
+      </p:sp>
+      <p:sp>
+        <p:nvSpPr>
+          <p:cNvPr id="67" name="Textfeld 66">
+            <a:extLst>
+              <a:ext uri="{FF2B5EF4-FFF2-40B4-BE49-F238E27FC236}">
+                <a16:creationId xmlns:a16="http://schemas.microsoft.com/office/drawing/2014/main" id="{B0048E22-0A2D-74E6-3D21-0181016AD3B6}"/>
+              </a:ext>
+            </a:extLst>
+          </p:cNvPr>
+          <p:cNvSpPr txBox="1"/>
+          <p:nvPr/>
+        </p:nvSpPr>
+        <p:spPr>
+          <a:xfrm>
+            <a:off x="15261348" y="2372133"/>
+            <a:ext cx="1013354" cy="424732"/>
+          </a:xfrm>
+          <a:prstGeom prst="rect">
+            <a:avLst/>
+          </a:prstGeom>
+          <a:noFill/>
+        </p:spPr>
+        <p:txBody>
+          <a:bodyPr wrap="none" rtlCol="0">
+            <a:spAutoFit/>
+          </a:bodyPr>
+          <a:lstStyle/>
+          <a:p>
+            <a:r>
+              <a:rPr lang="de-DE" sz="2160"/>
+              <a:t>State 4</a:t>
+            </a:r>
+          </a:p>
+        </p:txBody>
+      </p:sp>
+      <p:sp>
+        <p:nvSpPr>
+          <p:cNvPr id="69" name="Pfeil: nach oben 68">
+            <a:extLst>
+              <a:ext uri="{FF2B5EF4-FFF2-40B4-BE49-F238E27FC236}">
+                <a16:creationId xmlns:a16="http://schemas.microsoft.com/office/drawing/2014/main" id="{8E659198-4832-FABD-6FC4-4C5B4FCBADCD}"/>
+              </a:ext>
+            </a:extLst>
+          </p:cNvPr>
+          <p:cNvSpPr/>
+          <p:nvPr/>
+        </p:nvSpPr>
+        <p:spPr>
+          <a:xfrm>
+            <a:off x="8480227" y="2441947"/>
+            <a:ext cx="326297" cy="695503"/>
+          </a:xfrm>
+          <a:prstGeom prst="upArrow">
+            <a:avLst/>
+          </a:prstGeom>
+          <a:ln/>
+        </p:spPr>
+        <p:style>
+          <a:lnRef idx="2">
+            <a:schemeClr val="accent4">
+              <a:shade val="15000"/>
+            </a:schemeClr>
+          </a:lnRef>
+          <a:fillRef idx="1">
+            <a:schemeClr val="accent4"/>
+          </a:fillRef>
+          <a:effectRef idx="0">
+            <a:schemeClr val="accent4"/>
+          </a:effectRef>
+          <a:fontRef idx="minor">
+            <a:schemeClr val="lt1"/>
+          </a:fontRef>
+        </p:style>
+        <p:txBody>
+          <a:bodyPr rtlCol="0" anchor="ctr"/>
+          <a:lstStyle/>
+          <a:p>
+            <a:pPr algn="ctr"/>
+            <a:endParaRPr lang="de-DE" sz="800">
+              <a:solidFill>
+                <a:schemeClr val="tx1"/>
+              </a:solidFill>
+            </a:endParaRPr>
+          </a:p>
+        </p:txBody>
+      </p:sp>
+      <p:sp>
+        <p:nvSpPr>
+          <p:cNvPr id="70" name="Textfeld 69">
+            <a:extLst>
+              <a:ext uri="{FF2B5EF4-FFF2-40B4-BE49-F238E27FC236}">
+                <a16:creationId xmlns:a16="http://schemas.microsoft.com/office/drawing/2014/main" id="{CB18D3D7-84D4-4E6E-CA57-BA4CC28D4132}"/>
+              </a:ext>
+            </a:extLst>
+          </p:cNvPr>
+          <p:cNvSpPr txBox="1"/>
+          <p:nvPr/>
+        </p:nvSpPr>
+        <p:spPr>
+          <a:xfrm>
+            <a:off x="8742098" y="2577332"/>
+            <a:ext cx="1586460" cy="424732"/>
+          </a:xfrm>
+          <a:prstGeom prst="rect">
+            <a:avLst/>
+          </a:prstGeom>
+          <a:noFill/>
+        </p:spPr>
+        <p:txBody>
+          <a:bodyPr wrap="none" rtlCol="0">
+            <a:spAutoFit/>
+          </a:bodyPr>
+          <a:lstStyle/>
+          <a:p>
+            <a:r>
+              <a:rPr lang="de-DE" sz="2160"/>
+              <a:t>Notification</a:t>
+            </a:r>
+          </a:p>
+        </p:txBody>
+      </p:sp>
+      <p:sp>
+        <p:nvSpPr>
+          <p:cNvPr id="71" name="Gewitterblitz 70">
+            <a:extLst>
+              <a:ext uri="{FF2B5EF4-FFF2-40B4-BE49-F238E27FC236}">
+                <a16:creationId xmlns:a16="http://schemas.microsoft.com/office/drawing/2014/main" id="{A357F203-11EC-F0F7-7992-A76C6B4D1C1F}"/>
+              </a:ext>
+            </a:extLst>
+          </p:cNvPr>
+          <p:cNvSpPr/>
+          <p:nvPr/>
+        </p:nvSpPr>
+        <p:spPr>
+          <a:xfrm>
+            <a:off x="7967824" y="2717138"/>
+            <a:ext cx="585738" cy="778431"/>
+          </a:xfrm>
+          <a:prstGeom prst="lightningBolt">
+            <a:avLst/>
+          </a:prstGeom>
+          <a:solidFill>
+            <a:srgbClr val="FFFF00"/>
+          </a:solidFill>
+          <a:ln>
+            <a:solidFill>
+              <a:srgbClr val="FF0000"/>
+            </a:solidFill>
+          </a:ln>
+        </p:spPr>
+        <p:style>
+          <a:lnRef idx="2">
+            <a:schemeClr val="accent1">
+              <a:shade val="15000"/>
+            </a:schemeClr>
+          </a:lnRef>
+          <a:fillRef idx="1">
+            <a:schemeClr val="accent1"/>
+          </a:fillRef>
+          <a:effectRef idx="0">
+            <a:schemeClr val="accent1"/>
+          </a:effectRef>
+          <a:fontRef idx="minor">
+            <a:schemeClr val="lt1"/>
+          </a:fontRef>
+        </p:style>
+        <p:txBody>
+          <a:bodyPr rtlCol="0" anchor="ctr"/>
+          <a:lstStyle/>
+          <a:p>
+            <a:pPr algn="ctr"/>
+            <a:endParaRPr lang="de-DE" sz="800" b="1">
+              <a:ln w="22225">
+                <a:solidFill>
+                  <a:schemeClr val="accent2"/>
+                </a:solidFill>
+                <a:prstDash val="solid"/>
+              </a:ln>
+              <a:solidFill>
+                <a:schemeClr val="accent2">
+                  <a:lumMod val="40000"/>
+                  <a:lumOff val="60000"/>
+                </a:schemeClr>
+              </a:solidFill>
+            </a:endParaRPr>
+          </a:p>
+        </p:txBody>
+      </p:sp>
+    </p:spTree>
+    <p:extLst>
+      <p:ext uri="{BB962C8B-B14F-4D97-AF65-F5344CB8AC3E}">
+        <p14:creationId xmlns:p14="http://schemas.microsoft.com/office/powerpoint/2010/main" val="2341083557"/>
+      </p:ext>
+    </p:extLst>
+  </p:cSld>
+  <p:clrMapOvr>
+    <a:masterClrMapping/>
+  </p:clrMapOvr>
+</p:sld>
+</file>
+
+<file path=ppt/slides/slide3.xml><?xml version="1.0" encoding="utf-8"?>
 <p:sld xmlns:a="http://schemas.openxmlformats.org/drawingml/2006/main" xmlns:r="http://schemas.openxmlformats.org/officeDocument/2006/relationships" xmlns:p="http://schemas.openxmlformats.org/presentationml/2006/main">
   <p:cSld>
     <p:spTree>
@@ -9720,7 +13501,7 @@
 </p:sld>
 </file>
 
-<file path=ppt/slides/slide2.xml><?xml version="1.0" encoding="utf-8"?>
+<file path=ppt/slides/slide4.xml><?xml version="1.0" encoding="utf-8"?>
 <p:sld xmlns:a="http://schemas.openxmlformats.org/drawingml/2006/main" xmlns:r="http://schemas.openxmlformats.org/officeDocument/2006/relationships" xmlns:p="http://schemas.openxmlformats.org/presentationml/2006/main">
   <p:cSld>
     <p:spTree>
@@ -9739,10 +13520,10 @@
       </p:grpSpPr>
       <p:sp>
         <p:nvSpPr>
-          <p:cNvPr id="12" name="Rechteck 11">
-            <a:extLst>
-              <a:ext uri="{FF2B5EF4-FFF2-40B4-BE49-F238E27FC236}">
-                <a16:creationId xmlns:a16="http://schemas.microsoft.com/office/drawing/2014/main" id="{81679757-9FB1-0F6D-3098-BDE0BFEDE84D}"/>
+          <p:cNvPr id="72" name="Rechteck 71">
+            <a:extLst>
+              <a:ext uri="{FF2B5EF4-FFF2-40B4-BE49-F238E27FC236}">
+                <a16:creationId xmlns:a16="http://schemas.microsoft.com/office/drawing/2014/main" id="{11768FDB-BA6E-EAEB-5BB8-2ED406AD6C41}"/>
               </a:ext>
             </a:extLst>
           </p:cNvPr>
@@ -9751,12 +13532,20 @@
         </p:nvSpPr>
         <p:spPr>
           <a:xfrm>
-            <a:off x="2104074" y="2148840"/>
-            <a:ext cx="638710" cy="419100"/>
+            <a:off x="1936958" y="1057028"/>
+            <a:ext cx="9931400" cy="4988172"/>
           </a:xfrm>
           <a:prstGeom prst="rect">
             <a:avLst/>
           </a:prstGeom>
+          <a:solidFill>
+            <a:schemeClr val="bg1">
+              <a:lumMod val="95000"/>
+            </a:schemeClr>
+          </a:solidFill>
+          <a:ln>
+            <a:noFill/>
+          </a:ln>
         </p:spPr>
         <p:style>
           <a:lnRef idx="2">
@@ -9778,6 +13567,353 @@
           <a:bodyPr rtlCol="0" anchor="t"/>
           <a:lstStyle/>
           <a:p>
+            <a:r>
+              <a:rPr lang="de-DE" sz="2000">
+                <a:solidFill>
+                  <a:schemeClr val="tx1"/>
+                </a:solidFill>
+              </a:rPr>
+              <a:t>Automation Application</a:t>
+            </a:r>
+          </a:p>
+        </p:txBody>
+      </p:sp>
+      <p:sp>
+        <p:nvSpPr>
+          <p:cNvPr id="78" name="Rechteck 77">
+            <a:extLst>
+              <a:ext uri="{FF2B5EF4-FFF2-40B4-BE49-F238E27FC236}">
+                <a16:creationId xmlns:a16="http://schemas.microsoft.com/office/drawing/2014/main" id="{58728409-DD53-4F5E-410F-51809028D5C6}"/>
+              </a:ext>
+            </a:extLst>
+          </p:cNvPr>
+          <p:cNvSpPr/>
+          <p:nvPr/>
+        </p:nvSpPr>
+        <p:spPr>
+          <a:xfrm>
+            <a:off x="8524719" y="3193300"/>
+            <a:ext cx="2691267" cy="2466720"/>
+          </a:xfrm>
+          <a:prstGeom prst="rect">
+            <a:avLst/>
+          </a:prstGeom>
+          <a:solidFill>
+            <a:schemeClr val="bg1"/>
+          </a:solidFill>
+          <a:ln>
+            <a:solidFill>
+              <a:schemeClr val="tx1"/>
+            </a:solidFill>
+            <a:prstDash val="dash"/>
+          </a:ln>
+        </p:spPr>
+        <p:style>
+          <a:lnRef idx="2">
+            <a:schemeClr val="accent1">
+              <a:shade val="15000"/>
+            </a:schemeClr>
+          </a:lnRef>
+          <a:fillRef idx="1">
+            <a:schemeClr val="accent1"/>
+          </a:fillRef>
+          <a:effectRef idx="0">
+            <a:schemeClr val="accent1"/>
+          </a:effectRef>
+          <a:fontRef idx="minor">
+            <a:schemeClr val="lt1"/>
+          </a:fontRef>
+        </p:style>
+        <p:txBody>
+          <a:bodyPr rtlCol="0" anchor="ctr"/>
+          <a:lstStyle/>
+          <a:p>
+            <a:pPr algn="ctr"/>
+            <a:endParaRPr lang="de-DE" sz="800">
+              <a:solidFill>
+                <a:schemeClr val="tx1"/>
+              </a:solidFill>
+            </a:endParaRPr>
+          </a:p>
+        </p:txBody>
+      </p:sp>
+      <p:sp>
+        <p:nvSpPr>
+          <p:cNvPr id="77" name="Rechteck 76">
+            <a:extLst>
+              <a:ext uri="{FF2B5EF4-FFF2-40B4-BE49-F238E27FC236}">
+                <a16:creationId xmlns:a16="http://schemas.microsoft.com/office/drawing/2014/main" id="{9707959B-5A26-7BE3-760D-2FC620E8901C}"/>
+              </a:ext>
+            </a:extLst>
+          </p:cNvPr>
+          <p:cNvSpPr/>
+          <p:nvPr/>
+        </p:nvSpPr>
+        <p:spPr>
+          <a:xfrm>
+            <a:off x="9013733" y="1920926"/>
+            <a:ext cx="2465406" cy="1530182"/>
+          </a:xfrm>
+          <a:prstGeom prst="rect">
+            <a:avLst/>
+          </a:prstGeom>
+          <a:solidFill>
+            <a:schemeClr val="bg1"/>
+          </a:solidFill>
+          <a:ln>
+            <a:solidFill>
+              <a:schemeClr val="tx1"/>
+            </a:solidFill>
+            <a:prstDash val="dash"/>
+          </a:ln>
+        </p:spPr>
+        <p:style>
+          <a:lnRef idx="2">
+            <a:schemeClr val="accent1">
+              <a:shade val="15000"/>
+            </a:schemeClr>
+          </a:lnRef>
+          <a:fillRef idx="1">
+            <a:schemeClr val="accent1"/>
+          </a:fillRef>
+          <a:effectRef idx="0">
+            <a:schemeClr val="accent1"/>
+          </a:effectRef>
+          <a:fontRef idx="minor">
+            <a:schemeClr val="lt1"/>
+          </a:fontRef>
+        </p:style>
+        <p:txBody>
+          <a:bodyPr rtlCol="0" anchor="ctr"/>
+          <a:lstStyle/>
+          <a:p>
+            <a:pPr algn="ctr"/>
+            <a:endParaRPr lang="de-DE" sz="800">
+              <a:solidFill>
+                <a:schemeClr val="tx1"/>
+              </a:solidFill>
+            </a:endParaRPr>
+          </a:p>
+        </p:txBody>
+      </p:sp>
+      <p:sp>
+        <p:nvSpPr>
+          <p:cNvPr id="76" name="Rechteck 75">
+            <a:extLst>
+              <a:ext uri="{FF2B5EF4-FFF2-40B4-BE49-F238E27FC236}">
+                <a16:creationId xmlns:a16="http://schemas.microsoft.com/office/drawing/2014/main" id="{6F1EFD85-439B-2FE8-5AAE-C84AA7312CAA}"/>
+              </a:ext>
+            </a:extLst>
+          </p:cNvPr>
+          <p:cNvSpPr/>
+          <p:nvPr/>
+        </p:nvSpPr>
+        <p:spPr>
+          <a:xfrm>
+            <a:off x="5918179" y="1844228"/>
+            <a:ext cx="2468048" cy="1772098"/>
+          </a:xfrm>
+          <a:prstGeom prst="rect">
+            <a:avLst/>
+          </a:prstGeom>
+          <a:solidFill>
+            <a:schemeClr val="bg1"/>
+          </a:solidFill>
+          <a:ln>
+            <a:solidFill>
+              <a:schemeClr val="tx1"/>
+            </a:solidFill>
+            <a:prstDash val="dash"/>
+          </a:ln>
+        </p:spPr>
+        <p:style>
+          <a:lnRef idx="2">
+            <a:schemeClr val="accent1">
+              <a:shade val="15000"/>
+            </a:schemeClr>
+          </a:lnRef>
+          <a:fillRef idx="1">
+            <a:schemeClr val="accent1"/>
+          </a:fillRef>
+          <a:effectRef idx="0">
+            <a:schemeClr val="accent1"/>
+          </a:effectRef>
+          <a:fontRef idx="minor">
+            <a:schemeClr val="lt1"/>
+          </a:fontRef>
+        </p:style>
+        <p:txBody>
+          <a:bodyPr rtlCol="0" anchor="ctr"/>
+          <a:lstStyle/>
+          <a:p>
+            <a:pPr algn="ctr"/>
+            <a:endParaRPr lang="de-DE" sz="800">
+              <a:solidFill>
+                <a:schemeClr val="tx1"/>
+              </a:solidFill>
+            </a:endParaRPr>
+          </a:p>
+        </p:txBody>
+      </p:sp>
+      <p:sp>
+        <p:nvSpPr>
+          <p:cNvPr id="74" name="Rechteck 73">
+            <a:extLst>
+              <a:ext uri="{FF2B5EF4-FFF2-40B4-BE49-F238E27FC236}">
+                <a16:creationId xmlns:a16="http://schemas.microsoft.com/office/drawing/2014/main" id="{E34E15D0-F58C-24F5-1C8F-16CA7C95A22A}"/>
+              </a:ext>
+            </a:extLst>
+          </p:cNvPr>
+          <p:cNvSpPr/>
+          <p:nvPr/>
+        </p:nvSpPr>
+        <p:spPr>
+          <a:xfrm>
+            <a:off x="3532155" y="3351161"/>
+            <a:ext cx="2853775" cy="1512939"/>
+          </a:xfrm>
+          <a:prstGeom prst="rect">
+            <a:avLst/>
+          </a:prstGeom>
+          <a:solidFill>
+            <a:schemeClr val="bg1"/>
+          </a:solidFill>
+          <a:ln>
+            <a:solidFill>
+              <a:schemeClr val="tx1"/>
+            </a:solidFill>
+            <a:prstDash val="dash"/>
+          </a:ln>
+        </p:spPr>
+        <p:style>
+          <a:lnRef idx="2">
+            <a:schemeClr val="accent1">
+              <a:shade val="15000"/>
+            </a:schemeClr>
+          </a:lnRef>
+          <a:fillRef idx="1">
+            <a:schemeClr val="accent1"/>
+          </a:fillRef>
+          <a:effectRef idx="0">
+            <a:schemeClr val="accent1"/>
+          </a:effectRef>
+          <a:fontRef idx="minor">
+            <a:schemeClr val="lt1"/>
+          </a:fontRef>
+        </p:style>
+        <p:txBody>
+          <a:bodyPr rtlCol="0" anchor="ctr"/>
+          <a:lstStyle/>
+          <a:p>
+            <a:pPr algn="ctr"/>
+            <a:endParaRPr lang="de-DE" sz="800">
+              <a:solidFill>
+                <a:schemeClr val="tx1"/>
+              </a:solidFill>
+            </a:endParaRPr>
+          </a:p>
+        </p:txBody>
+      </p:sp>
+      <p:sp>
+        <p:nvSpPr>
+          <p:cNvPr id="73" name="Rechteck 72">
+            <a:extLst>
+              <a:ext uri="{FF2B5EF4-FFF2-40B4-BE49-F238E27FC236}">
+                <a16:creationId xmlns:a16="http://schemas.microsoft.com/office/drawing/2014/main" id="{68AFF515-41F4-F81B-ADB9-A4A94586F5DA}"/>
+              </a:ext>
+            </a:extLst>
+          </p:cNvPr>
+          <p:cNvSpPr/>
+          <p:nvPr/>
+        </p:nvSpPr>
+        <p:spPr>
+          <a:xfrm>
+            <a:off x="2717801" y="1892301"/>
+            <a:ext cx="2426154" cy="2070100"/>
+          </a:xfrm>
+          <a:prstGeom prst="rect">
+            <a:avLst/>
+          </a:prstGeom>
+          <a:solidFill>
+            <a:schemeClr val="bg1"/>
+          </a:solidFill>
+          <a:ln>
+            <a:solidFill>
+              <a:schemeClr val="tx1"/>
+            </a:solidFill>
+            <a:prstDash val="dash"/>
+          </a:ln>
+        </p:spPr>
+        <p:style>
+          <a:lnRef idx="2">
+            <a:schemeClr val="accent1">
+              <a:shade val="15000"/>
+            </a:schemeClr>
+          </a:lnRef>
+          <a:fillRef idx="1">
+            <a:schemeClr val="accent1"/>
+          </a:fillRef>
+          <a:effectRef idx="0">
+            <a:schemeClr val="accent1"/>
+          </a:effectRef>
+          <a:fontRef idx="minor">
+            <a:schemeClr val="lt1"/>
+          </a:fontRef>
+        </p:style>
+        <p:txBody>
+          <a:bodyPr rtlCol="0" anchor="ctr"/>
+          <a:lstStyle/>
+          <a:p>
+            <a:pPr algn="ctr"/>
+            <a:endParaRPr lang="de-DE" sz="800">
+              <a:solidFill>
+                <a:schemeClr val="tx1"/>
+              </a:solidFill>
+            </a:endParaRPr>
+          </a:p>
+        </p:txBody>
+      </p:sp>
+      <p:sp>
+        <p:nvSpPr>
+          <p:cNvPr id="12" name="Rechteck 11">
+            <a:extLst>
+              <a:ext uri="{FF2B5EF4-FFF2-40B4-BE49-F238E27FC236}">
+                <a16:creationId xmlns:a16="http://schemas.microsoft.com/office/drawing/2014/main" id="{81679757-9FB1-0F6D-3098-BDE0BFEDE84D}"/>
+              </a:ext>
+            </a:extLst>
+          </p:cNvPr>
+          <p:cNvSpPr/>
+          <p:nvPr/>
+        </p:nvSpPr>
+        <p:spPr>
+          <a:xfrm>
+            <a:off x="3107374" y="3197226"/>
+            <a:ext cx="638710" cy="419100"/>
+          </a:xfrm>
+          <a:prstGeom prst="rect">
+            <a:avLst/>
+          </a:prstGeom>
+        </p:spPr>
+        <p:style>
+          <a:lnRef idx="2">
+            <a:schemeClr val="accent1">
+              <a:shade val="15000"/>
+            </a:schemeClr>
+          </a:lnRef>
+          <a:fillRef idx="1">
+            <a:schemeClr val="accent1"/>
+          </a:fillRef>
+          <a:effectRef idx="0">
+            <a:schemeClr val="accent1"/>
+          </a:effectRef>
+          <a:fontRef idx="minor">
+            <a:schemeClr val="lt1"/>
+          </a:fontRef>
+        </p:style>
+        <p:txBody>
+          <a:bodyPr rtlCol="0" anchor="t"/>
+          <a:lstStyle/>
+          <a:p>
             <a:pPr algn="r">
               <a:tabLst>
                 <a:tab pos="36000" algn="l"/>
@@ -9809,7 +13945,7 @@
         </p:blipFill>
         <p:spPr>
           <a:xfrm>
-            <a:off x="2180374" y="2227809"/>
+            <a:off x="3183674" y="3276195"/>
             <a:ext cx="166165" cy="174914"/>
           </a:xfrm>
           <a:prstGeom prst="rect">
@@ -9831,8 +13967,8 @@
         </p:nvSpPr>
         <p:spPr>
           <a:xfrm>
-            <a:off x="3459380" y="2356658"/>
-            <a:ext cx="1097380" cy="570807"/>
+            <a:off x="4615260" y="2944725"/>
+            <a:ext cx="1534230" cy="570807"/>
           </a:xfrm>
           <a:prstGeom prst="can">
             <a:avLst/>
@@ -9848,6 +13984,111 @@
           </a:fillRef>
           <a:effectRef idx="0">
             <a:schemeClr val="accent1"/>
+          </a:effectRef>
+          <a:fontRef idx="minor">
+            <a:schemeClr val="dk1"/>
+          </a:fontRef>
+        </p:style>
+        <p:txBody>
+          <a:bodyPr lIns="0" tIns="0" rIns="0" bIns="0" rtlCol="0" anchor="ctr"/>
+          <a:lstStyle/>
+          <a:p>
+            <a:pPr algn="ctr"/>
+            <a:r>
+              <a:rPr lang="de-DE" sz="1200"/>
+              <a:t>AdministrativeState</a:t>
+            </a:r>
+            <a:endParaRPr lang="de-DE" sz="1200">
+              <a:solidFill>
+                <a:schemeClr val="tx1"/>
+              </a:solidFill>
+            </a:endParaRPr>
+          </a:p>
+        </p:txBody>
+      </p:sp>
+      <p:sp>
+        <p:nvSpPr>
+          <p:cNvPr id="3" name="Zylinder 2">
+            <a:extLst>
+              <a:ext uri="{FF2B5EF4-FFF2-40B4-BE49-F238E27FC236}">
+                <a16:creationId xmlns:a16="http://schemas.microsoft.com/office/drawing/2014/main" id="{7DF83F7F-72CE-BA07-8399-1799F2491A81}"/>
+              </a:ext>
+            </a:extLst>
+          </p:cNvPr>
+          <p:cNvSpPr/>
+          <p:nvPr/>
+        </p:nvSpPr>
+        <p:spPr>
+          <a:xfrm>
+            <a:off x="8175486" y="2947851"/>
+            <a:ext cx="1534230" cy="570807"/>
+          </a:xfrm>
+          <a:prstGeom prst="can">
+            <a:avLst/>
+          </a:prstGeom>
+          <a:ln/>
+        </p:spPr>
+        <p:style>
+          <a:lnRef idx="2">
+            <a:schemeClr val="accent1"/>
+          </a:lnRef>
+          <a:fillRef idx="1">
+            <a:schemeClr val="lt1"/>
+          </a:fillRef>
+          <a:effectRef idx="0">
+            <a:schemeClr val="accent1"/>
+          </a:effectRef>
+          <a:fontRef idx="minor">
+            <a:schemeClr val="dk1"/>
+          </a:fontRef>
+        </p:style>
+        <p:txBody>
+          <a:bodyPr lIns="0" tIns="0" rIns="0" bIns="0" rtlCol="0" anchor="ctr"/>
+          <a:lstStyle/>
+          <a:p>
+            <a:pPr algn="ctr"/>
+            <a:r>
+              <a:rPr lang="de-DE" sz="1200">
+                <a:solidFill>
+                  <a:schemeClr val="tx1"/>
+                </a:solidFill>
+              </a:rPr>
+              <a:t>OperationalState</a:t>
+            </a:r>
+          </a:p>
+        </p:txBody>
+      </p:sp>
+      <p:sp>
+        <p:nvSpPr>
+          <p:cNvPr id="6" name="Scrollen: vertikal 5">
+            <a:extLst>
+              <a:ext uri="{FF2B5EF4-FFF2-40B4-BE49-F238E27FC236}">
+                <a16:creationId xmlns:a16="http://schemas.microsoft.com/office/drawing/2014/main" id="{65808CD5-63F0-0767-C688-C4C5BD28C087}"/>
+              </a:ext>
+            </a:extLst>
+          </p:cNvPr>
+          <p:cNvSpPr/>
+          <p:nvPr/>
+        </p:nvSpPr>
+        <p:spPr>
+          <a:xfrm>
+            <a:off x="6749282" y="4013294"/>
+            <a:ext cx="1470660" cy="1303020"/>
+          </a:xfrm>
+          <a:prstGeom prst="verticalScroll">
+            <a:avLst/>
+          </a:prstGeom>
+          <a:ln/>
+        </p:spPr>
+        <p:style>
+          <a:lnRef idx="2">
+            <a:schemeClr val="accent2"/>
+          </a:lnRef>
+          <a:fillRef idx="1">
+            <a:schemeClr val="lt1"/>
+          </a:fillRef>
+          <a:effectRef idx="0">
+            <a:schemeClr val="accent2"/>
           </a:effectRef>
           <a:fontRef idx="minor">
             <a:schemeClr val="dk1"/>
@@ -9859,22 +14100,33 @@
           <a:p>
             <a:pPr algn="ctr"/>
             <a:r>
-              <a:rPr lang="de-DE" sz="800">
+              <a:rPr lang="de-DE" sz="1200">
                 <a:solidFill>
                   <a:schemeClr val="tx1"/>
                 </a:solidFill>
               </a:rPr>
-              <a:t>TargetState</a:t>
+              <a:t>AlarmList</a:t>
+            </a:r>
+          </a:p>
+          <a:p>
+            <a:pPr algn="ctr"/>
+            <a:r>
+              <a:rPr lang="de-DE" sz="1200">
+                <a:solidFill>
+                  <a:schemeClr val="tx1"/>
+                </a:solidFill>
+              </a:rPr>
+              <a:t>(ToDo-List)</a:t>
             </a:r>
           </a:p>
         </p:txBody>
       </p:sp>
       <p:sp>
         <p:nvSpPr>
-          <p:cNvPr id="3" name="Zylinder 2">
-            <a:extLst>
-              <a:ext uri="{FF2B5EF4-FFF2-40B4-BE49-F238E27FC236}">
-                <a16:creationId xmlns:a16="http://schemas.microsoft.com/office/drawing/2014/main" id="{7DF83F7F-72CE-BA07-8399-1799F2491A81}"/>
+          <p:cNvPr id="10" name="Rechteck 9">
+            <a:extLst>
+              <a:ext uri="{FF2B5EF4-FFF2-40B4-BE49-F238E27FC236}">
+                <a16:creationId xmlns:a16="http://schemas.microsoft.com/office/drawing/2014/main" id="{4921D2B2-A1CD-5B5A-7BDE-9B8F734176BC}"/>
               </a:ext>
             </a:extLst>
           </p:cNvPr>
@@ -9883,50 +14135,419 @@
         </p:nvSpPr>
         <p:spPr>
           <a:xfrm>
-            <a:off x="7939940" y="2356657"/>
-            <a:ext cx="1097380" cy="570807"/>
-          </a:xfrm>
-          <a:prstGeom prst="can">
-            <a:avLst/>
-          </a:prstGeom>
-          <a:ln/>
+            <a:off x="2950263" y="2290446"/>
+            <a:ext cx="638710" cy="419100"/>
+          </a:xfrm>
+          <a:prstGeom prst="rect">
+            <a:avLst/>
+          </a:prstGeom>
         </p:spPr>
         <p:style>
           <a:lnRef idx="2">
-            <a:schemeClr val="accent1"/>
+            <a:schemeClr val="accent1">
+              <a:shade val="15000"/>
+            </a:schemeClr>
           </a:lnRef>
           <a:fillRef idx="1">
-            <a:schemeClr val="lt1"/>
+            <a:schemeClr val="accent1"/>
           </a:fillRef>
           <a:effectRef idx="0">
             <a:schemeClr val="accent1"/>
           </a:effectRef>
           <a:fontRef idx="minor">
-            <a:schemeClr val="dk1"/>
+            <a:schemeClr val="lt1"/>
           </a:fontRef>
         </p:style>
         <p:txBody>
-          <a:bodyPr rtlCol="0" anchor="ctr"/>
+          <a:bodyPr rtlCol="0" anchor="t"/>
           <a:lstStyle/>
           <a:p>
-            <a:pPr algn="ctr"/>
-            <a:r>
-              <a:rPr lang="de-DE" sz="800">
+            <a:pPr algn="r">
+              <a:tabLst>
+                <a:tab pos="36000" algn="l"/>
+              </a:tabLst>
+            </a:pPr>
+            <a:endParaRPr lang="de-DE" sz="800"/>
+          </a:p>
+        </p:txBody>
+      </p:sp>
+      <p:sp>
+        <p:nvSpPr>
+          <p:cNvPr id="11" name="Rechteck 10">
+            <a:extLst>
+              <a:ext uri="{FF2B5EF4-FFF2-40B4-BE49-F238E27FC236}">
+                <a16:creationId xmlns:a16="http://schemas.microsoft.com/office/drawing/2014/main" id="{AB85860A-A1C5-AF4E-519F-B31760899D3D}"/>
+              </a:ext>
+            </a:extLst>
+          </p:cNvPr>
+          <p:cNvSpPr/>
+          <p:nvPr/>
+        </p:nvSpPr>
+        <p:spPr>
+          <a:xfrm>
+            <a:off x="3069543" y="2553336"/>
+            <a:ext cx="638710" cy="419100"/>
+          </a:xfrm>
+          <a:prstGeom prst="rect">
+            <a:avLst/>
+          </a:prstGeom>
+        </p:spPr>
+        <p:style>
+          <a:lnRef idx="2">
+            <a:schemeClr val="accent1">
+              <a:shade val="15000"/>
+            </a:schemeClr>
+          </a:lnRef>
+          <a:fillRef idx="1">
+            <a:schemeClr val="accent1"/>
+          </a:fillRef>
+          <a:effectRef idx="0">
+            <a:schemeClr val="accent1"/>
+          </a:effectRef>
+          <a:fontRef idx="minor">
+            <a:schemeClr val="lt1"/>
+          </a:fontRef>
+        </p:style>
+        <p:txBody>
+          <a:bodyPr rtlCol="0" anchor="t"/>
+          <a:lstStyle/>
+          <a:p>
+            <a:pPr algn="r">
+              <a:tabLst>
+                <a:tab pos="36000" algn="l"/>
+              </a:tabLst>
+            </a:pPr>
+            <a:endParaRPr lang="de-DE" sz="800"/>
+          </a:p>
+        </p:txBody>
+      </p:sp>
+      <p:sp>
+        <p:nvSpPr>
+          <p:cNvPr id="13" name="Rechteck 12">
+            <a:extLst>
+              <a:ext uri="{FF2B5EF4-FFF2-40B4-BE49-F238E27FC236}">
+                <a16:creationId xmlns:a16="http://schemas.microsoft.com/office/drawing/2014/main" id="{7AE13B01-B4C3-D5F1-CC62-E2FB37AD2428}"/>
+              </a:ext>
+            </a:extLst>
+          </p:cNvPr>
+          <p:cNvSpPr/>
+          <p:nvPr/>
+        </p:nvSpPr>
+        <p:spPr>
+          <a:xfrm>
+            <a:off x="3298132" y="3451109"/>
+            <a:ext cx="638710" cy="419100"/>
+          </a:xfrm>
+          <a:prstGeom prst="rect">
+            <a:avLst/>
+          </a:prstGeom>
+        </p:spPr>
+        <p:style>
+          <a:lnRef idx="2">
+            <a:schemeClr val="accent1">
+              <a:shade val="15000"/>
+            </a:schemeClr>
+          </a:lnRef>
+          <a:fillRef idx="1">
+            <a:schemeClr val="accent1"/>
+          </a:fillRef>
+          <a:effectRef idx="0">
+            <a:schemeClr val="accent1"/>
+          </a:effectRef>
+          <a:fontRef idx="minor">
+            <a:schemeClr val="lt1"/>
+          </a:fontRef>
+        </p:style>
+        <p:txBody>
+          <a:bodyPr rtlCol="0" anchor="t"/>
+          <a:lstStyle/>
+          <a:p>
+            <a:pPr algn="r">
+              <a:tabLst>
+                <a:tab pos="36000" algn="l"/>
+              </a:tabLst>
+            </a:pPr>
+            <a:endParaRPr lang="de-DE" sz="800"/>
+          </a:p>
+        </p:txBody>
+      </p:sp>
+      <p:pic>
+        <p:nvPicPr>
+          <p:cNvPr id="14" name="Grafik 13">
+            <a:extLst>
+              <a:ext uri="{FF2B5EF4-FFF2-40B4-BE49-F238E27FC236}">
+                <a16:creationId xmlns:a16="http://schemas.microsoft.com/office/drawing/2014/main" id="{2518E1E4-7D07-0174-BD08-75A840537EA4}"/>
+              </a:ext>
+            </a:extLst>
+          </p:cNvPr>
+          <p:cNvPicPr>
+            <a:picLocks noChangeAspect="1"/>
+          </p:cNvPicPr>
+          <p:nvPr/>
+        </p:nvPicPr>
+        <p:blipFill>
+          <a:blip r:embed="rId2"/>
+          <a:stretch>
+            <a:fillRect/>
+          </a:stretch>
+        </p:blipFill>
+        <p:spPr>
+          <a:xfrm>
+            <a:off x="3359256" y="3515532"/>
+            <a:ext cx="166165" cy="174914"/>
+          </a:xfrm>
+          <a:prstGeom prst="rect">
+            <a:avLst/>
+          </a:prstGeom>
+        </p:spPr>
+      </p:pic>
+      <p:cxnSp>
+        <p:nvCxnSpPr>
+          <p:cNvPr id="16" name="Gerade Verbindung mit Pfeil 15">
+            <a:extLst>
+              <a:ext uri="{FF2B5EF4-FFF2-40B4-BE49-F238E27FC236}">
+                <a16:creationId xmlns:a16="http://schemas.microsoft.com/office/drawing/2014/main" id="{A41C170E-5BE5-4CC7-0B74-FD347727DFC6}"/>
+              </a:ext>
+            </a:extLst>
+          </p:cNvPr>
+          <p:cNvCxnSpPr/>
+          <p:nvPr/>
+        </p:nvCxnSpPr>
+        <p:spPr>
+          <a:xfrm>
+            <a:off x="1310171" y="2499996"/>
+            <a:ext cx="1640092" cy="0"/>
+          </a:xfrm>
+          <a:prstGeom prst="straightConnector1">
+            <a:avLst/>
+          </a:prstGeom>
+          <a:ln>
+            <a:tailEnd type="triangle"/>
+          </a:ln>
+        </p:spPr>
+        <p:style>
+          <a:lnRef idx="2">
+            <a:schemeClr val="accent1"/>
+          </a:lnRef>
+          <a:fillRef idx="0">
+            <a:schemeClr val="accent1"/>
+          </a:fillRef>
+          <a:effectRef idx="1">
+            <a:schemeClr val="accent1"/>
+          </a:effectRef>
+          <a:fontRef idx="minor">
+            <a:schemeClr val="tx1"/>
+          </a:fontRef>
+        </p:style>
+      </p:cxnSp>
+      <p:cxnSp>
+        <p:nvCxnSpPr>
+          <p:cNvPr id="17" name="Gerade Verbindung mit Pfeil 16">
+            <a:extLst>
+              <a:ext uri="{FF2B5EF4-FFF2-40B4-BE49-F238E27FC236}">
+                <a16:creationId xmlns:a16="http://schemas.microsoft.com/office/drawing/2014/main" id="{9326039E-2586-A1D8-1CFF-BB0395E97CF5}"/>
+              </a:ext>
+            </a:extLst>
+          </p:cNvPr>
+          <p:cNvCxnSpPr>
+            <a:cxnSpLocks/>
+          </p:cNvCxnSpPr>
+          <p:nvPr/>
+        </p:nvCxnSpPr>
+        <p:spPr>
+          <a:xfrm flipH="1" flipV="1">
+            <a:off x="1310171" y="2609313"/>
+            <a:ext cx="1640092" cy="8813"/>
+          </a:xfrm>
+          <a:prstGeom prst="straightConnector1">
+            <a:avLst/>
+          </a:prstGeom>
+          <a:ln>
+            <a:prstDash val="dash"/>
+            <a:tailEnd type="triangle"/>
+          </a:ln>
+        </p:spPr>
+        <p:style>
+          <a:lnRef idx="2">
+            <a:schemeClr val="accent1"/>
+          </a:lnRef>
+          <a:fillRef idx="0">
+            <a:schemeClr val="accent1"/>
+          </a:fillRef>
+          <a:effectRef idx="1">
+            <a:schemeClr val="accent1"/>
+          </a:effectRef>
+          <a:fontRef idx="minor">
+            <a:schemeClr val="tx1"/>
+          </a:fontRef>
+        </p:style>
+      </p:cxnSp>
+      <p:sp>
+        <p:nvSpPr>
+          <p:cNvPr id="19" name="Textfeld 18">
+            <a:extLst>
+              <a:ext uri="{FF2B5EF4-FFF2-40B4-BE49-F238E27FC236}">
+                <a16:creationId xmlns:a16="http://schemas.microsoft.com/office/drawing/2014/main" id="{B15F98CA-500C-497C-9BEB-4DC69798E624}"/>
+              </a:ext>
+            </a:extLst>
+          </p:cNvPr>
+          <p:cNvSpPr txBox="1"/>
+          <p:nvPr/>
+        </p:nvSpPr>
+        <p:spPr>
+          <a:xfrm>
+            <a:off x="2887021" y="1908400"/>
+            <a:ext cx="2256933" cy="461665"/>
+          </a:xfrm>
+          <a:prstGeom prst="rect">
+            <a:avLst/>
+          </a:prstGeom>
+          <a:noFill/>
+        </p:spPr>
+        <p:txBody>
+          <a:bodyPr wrap="square" rtlCol="0">
+            <a:spAutoFit/>
+          </a:bodyPr>
+          <a:lstStyle/>
+          <a:p>
+            <a:pPr algn="r"/>
+            <a:r>
+              <a:rPr lang="de-DE" sz="1200"/>
+              <a:t>Modules that are changing the AdministrativeState</a:t>
+            </a:r>
+          </a:p>
+        </p:txBody>
+      </p:sp>
+      <p:sp>
+        <p:nvSpPr>
+          <p:cNvPr id="21" name="Rechteck 20">
+            <a:extLst>
+              <a:ext uri="{FF2B5EF4-FFF2-40B4-BE49-F238E27FC236}">
+                <a16:creationId xmlns:a16="http://schemas.microsoft.com/office/drawing/2014/main" id="{5E682443-CB6A-7EC0-8599-973D53EC0436}"/>
+              </a:ext>
+            </a:extLst>
+          </p:cNvPr>
+          <p:cNvSpPr/>
+          <p:nvPr/>
+        </p:nvSpPr>
+        <p:spPr>
+          <a:xfrm>
+            <a:off x="10343846" y="2939416"/>
+            <a:ext cx="638710" cy="419100"/>
+          </a:xfrm>
+          <a:prstGeom prst="rect">
+            <a:avLst/>
+          </a:prstGeom>
+        </p:spPr>
+        <p:style>
+          <a:lnRef idx="2">
+            <a:schemeClr val="accent1">
+              <a:shade val="15000"/>
+            </a:schemeClr>
+          </a:lnRef>
+          <a:fillRef idx="1">
+            <a:schemeClr val="accent1"/>
+          </a:fillRef>
+          <a:effectRef idx="0">
+            <a:schemeClr val="accent1"/>
+          </a:effectRef>
+          <a:fontRef idx="minor">
+            <a:schemeClr val="lt1"/>
+          </a:fontRef>
+        </p:style>
+        <p:txBody>
+          <a:bodyPr rtlCol="0" anchor="t"/>
+          <a:lstStyle/>
+          <a:p>
+            <a:pPr algn="r">
+              <a:tabLst>
+                <a:tab pos="36000" algn="l"/>
+              </a:tabLst>
+            </a:pPr>
+            <a:endParaRPr lang="de-DE" sz="800"/>
+          </a:p>
+        </p:txBody>
+      </p:sp>
+      <p:pic>
+        <p:nvPicPr>
+          <p:cNvPr id="22" name="Grafik 21">
+            <a:extLst>
+              <a:ext uri="{FF2B5EF4-FFF2-40B4-BE49-F238E27FC236}">
+                <a16:creationId xmlns:a16="http://schemas.microsoft.com/office/drawing/2014/main" id="{886A27DD-C9F0-DC50-F102-4D63B907E29A}"/>
+              </a:ext>
+            </a:extLst>
+          </p:cNvPr>
+          <p:cNvPicPr>
+            <a:picLocks noChangeAspect="1"/>
+          </p:cNvPicPr>
+          <p:nvPr/>
+        </p:nvPicPr>
+        <p:blipFill>
+          <a:blip r:embed="rId2"/>
+          <a:stretch>
+            <a:fillRect/>
+          </a:stretch>
+        </p:blipFill>
+        <p:spPr>
+          <a:xfrm>
+            <a:off x="10420146" y="3018385"/>
+            <a:ext cx="166165" cy="174914"/>
+          </a:xfrm>
+          <a:prstGeom prst="rect">
+            <a:avLst/>
+          </a:prstGeom>
+        </p:spPr>
+      </p:pic>
+      <p:sp>
+        <p:nvSpPr>
+          <p:cNvPr id="30" name="Textfeld 29">
+            <a:extLst>
+              <a:ext uri="{FF2B5EF4-FFF2-40B4-BE49-F238E27FC236}">
+                <a16:creationId xmlns:a16="http://schemas.microsoft.com/office/drawing/2014/main" id="{F8F209D8-265F-5230-5DB1-DC91F74B162F}"/>
+              </a:ext>
+            </a:extLst>
+          </p:cNvPr>
+          <p:cNvSpPr txBox="1"/>
+          <p:nvPr/>
+        </p:nvSpPr>
+        <p:spPr>
+          <a:xfrm>
+            <a:off x="8989519" y="1908400"/>
+            <a:ext cx="2853775" cy="461665"/>
+          </a:xfrm>
+          <a:prstGeom prst="rect">
+            <a:avLst/>
+          </a:prstGeom>
+          <a:noFill/>
+        </p:spPr>
+        <p:txBody>
+          <a:bodyPr wrap="square" rtlCol="0">
+            <a:spAutoFit/>
+          </a:bodyPr>
+          <a:lstStyle/>
+          <a:p>
+            <a:r>
+              <a:rPr lang="de-DE" sz="1200"/>
+              <a:t>Modules that are updating the </a:t>
+            </a:r>
+            <a:r>
+              <a:rPr lang="de-DE" sz="1200">
                 <a:solidFill>
                   <a:schemeClr val="tx1"/>
                 </a:solidFill>
               </a:rPr>
-              <a:t>CurrentState</a:t>
-            </a:r>
+              <a:t>OperationalState</a:t>
+            </a:r>
+            <a:endParaRPr lang="de-DE" sz="1200"/>
           </a:p>
         </p:txBody>
       </p:sp>
       <p:sp>
         <p:nvSpPr>
-          <p:cNvPr id="4" name="Rechteck: abgerundete Ecken 3">
-            <a:extLst>
-              <a:ext uri="{FF2B5EF4-FFF2-40B4-BE49-F238E27FC236}">
-                <a16:creationId xmlns:a16="http://schemas.microsoft.com/office/drawing/2014/main" id="{FDCE09A5-8D94-3998-EF69-BBFA2D202138}"/>
+          <p:cNvPr id="31" name="Rechteck 30">
+            <a:extLst>
+              <a:ext uri="{FF2B5EF4-FFF2-40B4-BE49-F238E27FC236}">
+                <a16:creationId xmlns:a16="http://schemas.microsoft.com/office/drawing/2014/main" id="{BEBB1305-415F-C61D-3CE9-248E0D923398}"/>
               </a:ext>
             </a:extLst>
           </p:cNvPr>
@@ -9935,10 +14556,299 @@
         </p:nvSpPr>
         <p:spPr>
           <a:xfrm>
-            <a:off x="5532120" y="2510442"/>
-            <a:ext cx="1432560" cy="417022"/>
-          </a:xfrm>
-          <a:prstGeom prst="roundRect">
+            <a:off x="10386518" y="2310766"/>
+            <a:ext cx="638710" cy="419100"/>
+          </a:xfrm>
+          <a:prstGeom prst="rect">
+            <a:avLst/>
+          </a:prstGeom>
+        </p:spPr>
+        <p:style>
+          <a:lnRef idx="2">
+            <a:schemeClr val="accent1">
+              <a:shade val="15000"/>
+            </a:schemeClr>
+          </a:lnRef>
+          <a:fillRef idx="1">
+            <a:schemeClr val="accent1"/>
+          </a:fillRef>
+          <a:effectRef idx="0">
+            <a:schemeClr val="accent1"/>
+          </a:effectRef>
+          <a:fontRef idx="minor">
+            <a:schemeClr val="lt1"/>
+          </a:fontRef>
+        </p:style>
+        <p:txBody>
+          <a:bodyPr rtlCol="0" anchor="t"/>
+          <a:lstStyle/>
+          <a:p>
+            <a:pPr algn="r">
+              <a:tabLst>
+                <a:tab pos="36000" algn="l"/>
+              </a:tabLst>
+            </a:pPr>
+            <a:endParaRPr lang="de-DE" sz="800"/>
+          </a:p>
+        </p:txBody>
+      </p:sp>
+      <p:pic>
+        <p:nvPicPr>
+          <p:cNvPr id="32" name="Grafik 31">
+            <a:extLst>
+              <a:ext uri="{FF2B5EF4-FFF2-40B4-BE49-F238E27FC236}">
+                <a16:creationId xmlns:a16="http://schemas.microsoft.com/office/drawing/2014/main" id="{AB09B62C-A946-E9FF-4720-224648348961}"/>
+              </a:ext>
+            </a:extLst>
+          </p:cNvPr>
+          <p:cNvPicPr>
+            <a:picLocks noChangeAspect="1"/>
+          </p:cNvPicPr>
+          <p:nvPr/>
+        </p:nvPicPr>
+        <p:blipFill>
+          <a:blip r:embed="rId2"/>
+          <a:stretch>
+            <a:fillRect/>
+          </a:stretch>
+        </p:blipFill>
+        <p:spPr>
+          <a:xfrm>
+            <a:off x="10462818" y="2389735"/>
+            <a:ext cx="166165" cy="174914"/>
+          </a:xfrm>
+          <a:prstGeom prst="rect">
+            <a:avLst/>
+          </a:prstGeom>
+        </p:spPr>
+      </p:pic>
+      <p:sp>
+        <p:nvSpPr>
+          <p:cNvPr id="33" name="Rechteck 32">
+            <a:extLst>
+              <a:ext uri="{FF2B5EF4-FFF2-40B4-BE49-F238E27FC236}">
+                <a16:creationId xmlns:a16="http://schemas.microsoft.com/office/drawing/2014/main" id="{AAE5ECF3-C8FE-F2FB-5245-974B2825FA42}"/>
+              </a:ext>
+            </a:extLst>
+          </p:cNvPr>
+          <p:cNvSpPr/>
+          <p:nvPr/>
+        </p:nvSpPr>
+        <p:spPr>
+          <a:xfrm>
+            <a:off x="10577276" y="2564649"/>
+            <a:ext cx="638710" cy="419100"/>
+          </a:xfrm>
+          <a:prstGeom prst="rect">
+            <a:avLst/>
+          </a:prstGeom>
+        </p:spPr>
+        <p:style>
+          <a:lnRef idx="2">
+            <a:schemeClr val="accent1">
+              <a:shade val="15000"/>
+            </a:schemeClr>
+          </a:lnRef>
+          <a:fillRef idx="1">
+            <a:schemeClr val="accent1"/>
+          </a:fillRef>
+          <a:effectRef idx="0">
+            <a:schemeClr val="accent1"/>
+          </a:effectRef>
+          <a:fontRef idx="minor">
+            <a:schemeClr val="lt1"/>
+          </a:fontRef>
+        </p:style>
+        <p:txBody>
+          <a:bodyPr rtlCol="0" anchor="t"/>
+          <a:lstStyle/>
+          <a:p>
+            <a:pPr algn="r">
+              <a:tabLst>
+                <a:tab pos="36000" algn="l"/>
+              </a:tabLst>
+            </a:pPr>
+            <a:endParaRPr lang="de-DE" sz="800"/>
+          </a:p>
+        </p:txBody>
+      </p:sp>
+      <p:pic>
+        <p:nvPicPr>
+          <p:cNvPr id="34" name="Grafik 33">
+            <a:extLst>
+              <a:ext uri="{FF2B5EF4-FFF2-40B4-BE49-F238E27FC236}">
+                <a16:creationId xmlns:a16="http://schemas.microsoft.com/office/drawing/2014/main" id="{820EF47B-6F6E-5327-FE6B-AB86187AB36F}"/>
+              </a:ext>
+            </a:extLst>
+          </p:cNvPr>
+          <p:cNvPicPr>
+            <a:picLocks noChangeAspect="1"/>
+          </p:cNvPicPr>
+          <p:nvPr/>
+        </p:nvPicPr>
+        <p:blipFill>
+          <a:blip r:embed="rId2"/>
+          <a:stretch>
+            <a:fillRect/>
+          </a:stretch>
+        </p:blipFill>
+        <p:spPr>
+          <a:xfrm>
+            <a:off x="10638400" y="2629072"/>
+            <a:ext cx="166165" cy="174914"/>
+          </a:xfrm>
+          <a:prstGeom prst="rect">
+            <a:avLst/>
+          </a:prstGeom>
+        </p:spPr>
+      </p:pic>
+      <p:cxnSp>
+        <p:nvCxnSpPr>
+          <p:cNvPr id="35" name="Gerade Verbindung mit Pfeil 34">
+            <a:extLst>
+              <a:ext uri="{FF2B5EF4-FFF2-40B4-BE49-F238E27FC236}">
+                <a16:creationId xmlns:a16="http://schemas.microsoft.com/office/drawing/2014/main" id="{C3993F86-8ECE-B926-B471-6625E7F7319D}"/>
+              </a:ext>
+            </a:extLst>
+          </p:cNvPr>
+          <p:cNvCxnSpPr/>
+          <p:nvPr/>
+        </p:nvCxnSpPr>
+        <p:spPr>
+          <a:xfrm>
+            <a:off x="11025228" y="2388832"/>
+            <a:ext cx="1640092" cy="0"/>
+          </a:xfrm>
+          <a:prstGeom prst="straightConnector1">
+            <a:avLst/>
+          </a:prstGeom>
+          <a:ln>
+            <a:tailEnd type="triangle"/>
+          </a:ln>
+        </p:spPr>
+        <p:style>
+          <a:lnRef idx="2">
+            <a:schemeClr val="accent1"/>
+          </a:lnRef>
+          <a:fillRef idx="0">
+            <a:schemeClr val="accent1"/>
+          </a:fillRef>
+          <a:effectRef idx="1">
+            <a:schemeClr val="accent1"/>
+          </a:effectRef>
+          <a:fontRef idx="minor">
+            <a:schemeClr val="tx1"/>
+          </a:fontRef>
+        </p:style>
+      </p:cxnSp>
+      <p:cxnSp>
+        <p:nvCxnSpPr>
+          <p:cNvPr id="36" name="Gerade Verbindung mit Pfeil 35">
+            <a:extLst>
+              <a:ext uri="{FF2B5EF4-FFF2-40B4-BE49-F238E27FC236}">
+                <a16:creationId xmlns:a16="http://schemas.microsoft.com/office/drawing/2014/main" id="{F28B876E-0BE4-F188-B266-07D970137D3D}"/>
+              </a:ext>
+            </a:extLst>
+          </p:cNvPr>
+          <p:cNvCxnSpPr>
+            <a:cxnSpLocks/>
+          </p:cNvCxnSpPr>
+          <p:nvPr/>
+        </p:nvCxnSpPr>
+        <p:spPr>
+          <a:xfrm flipH="1" flipV="1">
+            <a:off x="11025228" y="2498149"/>
+            <a:ext cx="1640092" cy="8813"/>
+          </a:xfrm>
+          <a:prstGeom prst="straightConnector1">
+            <a:avLst/>
+          </a:prstGeom>
+          <a:ln>
+            <a:prstDash val="dash"/>
+            <a:tailEnd type="triangle"/>
+          </a:ln>
+        </p:spPr>
+        <p:style>
+          <a:lnRef idx="2">
+            <a:schemeClr val="accent1"/>
+          </a:lnRef>
+          <a:fillRef idx="0">
+            <a:schemeClr val="accent1"/>
+          </a:fillRef>
+          <a:effectRef idx="1">
+            <a:schemeClr val="accent1"/>
+          </a:effectRef>
+          <a:fontRef idx="minor">
+            <a:schemeClr val="tx1"/>
+          </a:fontRef>
+        </p:style>
+      </p:cxnSp>
+      <p:sp>
+        <p:nvSpPr>
+          <p:cNvPr id="37" name="Textfeld 36">
+            <a:extLst>
+              <a:ext uri="{FF2B5EF4-FFF2-40B4-BE49-F238E27FC236}">
+                <a16:creationId xmlns:a16="http://schemas.microsoft.com/office/drawing/2014/main" id="{933E09A7-88FD-74AD-4549-31C42BDB99FD}"/>
+              </a:ext>
+            </a:extLst>
+          </p:cNvPr>
+          <p:cNvSpPr txBox="1"/>
+          <p:nvPr/>
+        </p:nvSpPr>
+        <p:spPr>
+          <a:xfrm>
+            <a:off x="5723210" y="1851530"/>
+            <a:ext cx="2853775" cy="830997"/>
+          </a:xfrm>
+          <a:prstGeom prst="rect">
+            <a:avLst/>
+          </a:prstGeom>
+          <a:noFill/>
+        </p:spPr>
+        <p:txBody>
+          <a:bodyPr wrap="square" rtlCol="0">
+            <a:spAutoFit/>
+          </a:bodyPr>
+          <a:lstStyle/>
+          <a:p>
+            <a:pPr algn="ctr"/>
+            <a:r>
+              <a:rPr lang="de-DE" sz="1200"/>
+              <a:t>Modules for comparing AdministrativeState with </a:t>
+            </a:r>
+            <a:r>
+              <a:rPr lang="de-DE" sz="1200">
+                <a:solidFill>
+                  <a:schemeClr val="tx1"/>
+                </a:solidFill>
+              </a:rPr>
+              <a:t>OperationalState</a:t>
+            </a:r>
+            <a:r>
+              <a:rPr lang="de-DE" sz="1200"/>
+              <a:t> and documenting divergences</a:t>
+            </a:r>
+          </a:p>
+        </p:txBody>
+      </p:sp>
+      <p:sp>
+        <p:nvSpPr>
+          <p:cNvPr id="38" name="Pfeil: nach unten 37">
+            <a:extLst>
+              <a:ext uri="{FF2B5EF4-FFF2-40B4-BE49-F238E27FC236}">
+                <a16:creationId xmlns:a16="http://schemas.microsoft.com/office/drawing/2014/main" id="{16B278CA-304F-33B3-E8D1-DE31DD22F9AC}"/>
+              </a:ext>
+            </a:extLst>
+          </p:cNvPr>
+          <p:cNvSpPr/>
+          <p:nvPr/>
+        </p:nvSpPr>
+        <p:spPr>
+          <a:xfrm>
+            <a:off x="7062408" y="3543286"/>
+            <a:ext cx="220975" cy="417022"/>
+          </a:xfrm>
+          <a:prstGeom prst="downArrow">
             <a:avLst/>
           </a:prstGeom>
           <a:ln/>
@@ -9972,10 +14882,10 @@
       </p:sp>
       <p:sp>
         <p:nvSpPr>
-          <p:cNvPr id="6" name="Scrollen: vertikal 5">
-            <a:extLst>
-              <a:ext uri="{FF2B5EF4-FFF2-40B4-BE49-F238E27FC236}">
-                <a16:creationId xmlns:a16="http://schemas.microsoft.com/office/drawing/2014/main" id="{65808CD5-63F0-0767-C688-C4C5BD28C087}"/>
+          <p:cNvPr id="42" name="Rechteck 41">
+            <a:extLst>
+              <a:ext uri="{FF2B5EF4-FFF2-40B4-BE49-F238E27FC236}">
+                <a16:creationId xmlns:a16="http://schemas.microsoft.com/office/drawing/2014/main" id="{ECC3A7AC-6D82-3D20-89BC-4C6701A7D54A}"/>
               </a:ext>
             </a:extLst>
           </p:cNvPr>
@@ -9984,61 +14894,380 @@
         </p:nvSpPr>
         <p:spPr>
           <a:xfrm>
-            <a:off x="5532120" y="3791298"/>
-            <a:ext cx="1470660" cy="1303020"/>
-          </a:xfrm>
-          <a:prstGeom prst="verticalScroll">
-            <a:avLst/>
-          </a:prstGeom>
-          <a:ln/>
+            <a:off x="8805095" y="4434706"/>
+            <a:ext cx="638710" cy="419100"/>
+          </a:xfrm>
+          <a:prstGeom prst="rect">
+            <a:avLst/>
+          </a:prstGeom>
         </p:spPr>
         <p:style>
           <a:lnRef idx="2">
-            <a:schemeClr val="accent2"/>
+            <a:schemeClr val="accent1">
+              <a:shade val="15000"/>
+            </a:schemeClr>
           </a:lnRef>
           <a:fillRef idx="1">
-            <a:schemeClr val="lt1"/>
+            <a:schemeClr val="accent1"/>
           </a:fillRef>
           <a:effectRef idx="0">
-            <a:schemeClr val="accent2"/>
+            <a:schemeClr val="accent1"/>
           </a:effectRef>
           <a:fontRef idx="minor">
-            <a:schemeClr val="dk1"/>
+            <a:schemeClr val="lt1"/>
           </a:fontRef>
         </p:style>
         <p:txBody>
-          <a:bodyPr rtlCol="0" anchor="ctr"/>
+          <a:bodyPr rtlCol="0" anchor="t"/>
           <a:lstStyle/>
           <a:p>
-            <a:pPr algn="ctr"/>
-            <a:r>
-              <a:rPr lang="de-DE" sz="800">
+            <a:pPr algn="r">
+              <a:tabLst>
+                <a:tab pos="36000" algn="l"/>
+              </a:tabLst>
+            </a:pPr>
+            <a:endParaRPr lang="de-DE" sz="800"/>
+          </a:p>
+        </p:txBody>
+      </p:sp>
+      <p:pic>
+        <p:nvPicPr>
+          <p:cNvPr id="43" name="Grafik 42">
+            <a:extLst>
+              <a:ext uri="{FF2B5EF4-FFF2-40B4-BE49-F238E27FC236}">
+                <a16:creationId xmlns:a16="http://schemas.microsoft.com/office/drawing/2014/main" id="{8D0099E2-2E76-AD23-470B-45BF3CB638F0}"/>
+              </a:ext>
+            </a:extLst>
+          </p:cNvPr>
+          <p:cNvPicPr>
+            <a:picLocks noChangeAspect="1"/>
+          </p:cNvPicPr>
+          <p:nvPr/>
+        </p:nvPicPr>
+        <p:blipFill>
+          <a:blip r:embed="rId2"/>
+          <a:stretch>
+            <a:fillRect/>
+          </a:stretch>
+        </p:blipFill>
+        <p:spPr>
+          <a:xfrm>
+            <a:off x="8881395" y="4513675"/>
+            <a:ext cx="166165" cy="174914"/>
+          </a:xfrm>
+          <a:prstGeom prst="rect">
+            <a:avLst/>
+          </a:prstGeom>
+        </p:spPr>
+      </p:pic>
+      <p:sp>
+        <p:nvSpPr>
+          <p:cNvPr id="44" name="Rechteck 43">
+            <a:extLst>
+              <a:ext uri="{FF2B5EF4-FFF2-40B4-BE49-F238E27FC236}">
+                <a16:creationId xmlns:a16="http://schemas.microsoft.com/office/drawing/2014/main" id="{EA6EFE08-8623-3C92-521A-E62587924E1F}"/>
+              </a:ext>
+            </a:extLst>
+          </p:cNvPr>
+          <p:cNvSpPr/>
+          <p:nvPr/>
+        </p:nvSpPr>
+        <p:spPr>
+          <a:xfrm>
+            <a:off x="8995853" y="4688589"/>
+            <a:ext cx="638710" cy="419100"/>
+          </a:xfrm>
+          <a:prstGeom prst="rect">
+            <a:avLst/>
+          </a:prstGeom>
+        </p:spPr>
+        <p:style>
+          <a:lnRef idx="2">
+            <a:schemeClr val="accent1">
+              <a:shade val="15000"/>
+            </a:schemeClr>
+          </a:lnRef>
+          <a:fillRef idx="1">
+            <a:schemeClr val="accent1"/>
+          </a:fillRef>
+          <a:effectRef idx="0">
+            <a:schemeClr val="accent1"/>
+          </a:effectRef>
+          <a:fontRef idx="minor">
+            <a:schemeClr val="lt1"/>
+          </a:fontRef>
+        </p:style>
+        <p:txBody>
+          <a:bodyPr rtlCol="0" anchor="t"/>
+          <a:lstStyle/>
+          <a:p>
+            <a:pPr algn="r">
+              <a:tabLst>
+                <a:tab pos="36000" algn="l"/>
+              </a:tabLst>
+            </a:pPr>
+            <a:endParaRPr lang="de-DE" sz="800"/>
+          </a:p>
+        </p:txBody>
+      </p:sp>
+      <p:pic>
+        <p:nvPicPr>
+          <p:cNvPr id="45" name="Grafik 44">
+            <a:extLst>
+              <a:ext uri="{FF2B5EF4-FFF2-40B4-BE49-F238E27FC236}">
+                <a16:creationId xmlns:a16="http://schemas.microsoft.com/office/drawing/2014/main" id="{9320FA18-5E00-08C4-D1B1-9198B35B64B6}"/>
+              </a:ext>
+            </a:extLst>
+          </p:cNvPr>
+          <p:cNvPicPr>
+            <a:picLocks noChangeAspect="1"/>
+          </p:cNvPicPr>
+          <p:nvPr/>
+        </p:nvPicPr>
+        <p:blipFill>
+          <a:blip r:embed="rId2"/>
+          <a:stretch>
+            <a:fillRect/>
+          </a:stretch>
+        </p:blipFill>
+        <p:spPr>
+          <a:xfrm>
+            <a:off x="9056977" y="4753012"/>
+            <a:ext cx="166165" cy="174914"/>
+          </a:xfrm>
+          <a:prstGeom prst="rect">
+            <a:avLst/>
+          </a:prstGeom>
+        </p:spPr>
+      </p:pic>
+      <p:sp>
+        <p:nvSpPr>
+          <p:cNvPr id="46" name="Rechteck 45">
+            <a:extLst>
+              <a:ext uri="{FF2B5EF4-FFF2-40B4-BE49-F238E27FC236}">
+                <a16:creationId xmlns:a16="http://schemas.microsoft.com/office/drawing/2014/main" id="{FDA4DB3A-D86A-FC0E-4540-DF3D46895C02}"/>
+              </a:ext>
+            </a:extLst>
+          </p:cNvPr>
+          <p:cNvSpPr/>
+          <p:nvPr/>
+        </p:nvSpPr>
+        <p:spPr>
+          <a:xfrm>
+            <a:off x="8847767" y="3806056"/>
+            <a:ext cx="638710" cy="419100"/>
+          </a:xfrm>
+          <a:prstGeom prst="rect">
+            <a:avLst/>
+          </a:prstGeom>
+        </p:spPr>
+        <p:style>
+          <a:lnRef idx="2">
+            <a:schemeClr val="accent1">
+              <a:shade val="15000"/>
+            </a:schemeClr>
+          </a:lnRef>
+          <a:fillRef idx="1">
+            <a:schemeClr val="accent1"/>
+          </a:fillRef>
+          <a:effectRef idx="0">
+            <a:schemeClr val="accent1"/>
+          </a:effectRef>
+          <a:fontRef idx="minor">
+            <a:schemeClr val="lt1"/>
+          </a:fontRef>
+        </p:style>
+        <p:txBody>
+          <a:bodyPr rtlCol="0" anchor="t"/>
+          <a:lstStyle/>
+          <a:p>
+            <a:pPr algn="r">
+              <a:tabLst>
+                <a:tab pos="36000" algn="l"/>
+              </a:tabLst>
+            </a:pPr>
+            <a:endParaRPr lang="de-DE" sz="800"/>
+          </a:p>
+        </p:txBody>
+      </p:sp>
+      <p:pic>
+        <p:nvPicPr>
+          <p:cNvPr id="47" name="Grafik 46">
+            <a:extLst>
+              <a:ext uri="{FF2B5EF4-FFF2-40B4-BE49-F238E27FC236}">
+                <a16:creationId xmlns:a16="http://schemas.microsoft.com/office/drawing/2014/main" id="{79753B46-3760-CFFB-B858-92910CA7D77F}"/>
+              </a:ext>
+            </a:extLst>
+          </p:cNvPr>
+          <p:cNvPicPr>
+            <a:picLocks noChangeAspect="1"/>
+          </p:cNvPicPr>
+          <p:nvPr/>
+        </p:nvPicPr>
+        <p:blipFill>
+          <a:blip r:embed="rId2"/>
+          <a:stretch>
+            <a:fillRect/>
+          </a:stretch>
+        </p:blipFill>
+        <p:spPr>
+          <a:xfrm>
+            <a:off x="8924067" y="3885025"/>
+            <a:ext cx="166165" cy="174914"/>
+          </a:xfrm>
+          <a:prstGeom prst="rect">
+            <a:avLst/>
+          </a:prstGeom>
+        </p:spPr>
+      </p:pic>
+      <p:sp>
+        <p:nvSpPr>
+          <p:cNvPr id="48" name="Rechteck 47">
+            <a:extLst>
+              <a:ext uri="{FF2B5EF4-FFF2-40B4-BE49-F238E27FC236}">
+                <a16:creationId xmlns:a16="http://schemas.microsoft.com/office/drawing/2014/main" id="{71BCDD80-7A46-50D8-092A-7DDBF641E7ED}"/>
+              </a:ext>
+            </a:extLst>
+          </p:cNvPr>
+          <p:cNvSpPr/>
+          <p:nvPr/>
+        </p:nvSpPr>
+        <p:spPr>
+          <a:xfrm>
+            <a:off x="9038525" y="4059939"/>
+            <a:ext cx="638710" cy="419100"/>
+          </a:xfrm>
+          <a:prstGeom prst="rect">
+            <a:avLst/>
+          </a:prstGeom>
+        </p:spPr>
+        <p:style>
+          <a:lnRef idx="2">
+            <a:schemeClr val="accent1">
+              <a:shade val="15000"/>
+            </a:schemeClr>
+          </a:lnRef>
+          <a:fillRef idx="1">
+            <a:schemeClr val="accent1"/>
+          </a:fillRef>
+          <a:effectRef idx="0">
+            <a:schemeClr val="accent1"/>
+          </a:effectRef>
+          <a:fontRef idx="minor">
+            <a:schemeClr val="lt1"/>
+          </a:fontRef>
+        </p:style>
+        <p:txBody>
+          <a:bodyPr rtlCol="0" anchor="t"/>
+          <a:lstStyle/>
+          <a:p>
+            <a:pPr algn="r">
+              <a:tabLst>
+                <a:tab pos="36000" algn="l"/>
+              </a:tabLst>
+            </a:pPr>
+            <a:endParaRPr lang="de-DE" sz="800"/>
+          </a:p>
+        </p:txBody>
+      </p:sp>
+      <p:pic>
+        <p:nvPicPr>
+          <p:cNvPr id="49" name="Grafik 48">
+            <a:extLst>
+              <a:ext uri="{FF2B5EF4-FFF2-40B4-BE49-F238E27FC236}">
+                <a16:creationId xmlns:a16="http://schemas.microsoft.com/office/drawing/2014/main" id="{F30FB4E0-9047-2FC9-990C-7F49073431E6}"/>
+              </a:ext>
+            </a:extLst>
+          </p:cNvPr>
+          <p:cNvPicPr>
+            <a:picLocks noChangeAspect="1"/>
+          </p:cNvPicPr>
+          <p:nvPr/>
+        </p:nvPicPr>
+        <p:blipFill>
+          <a:blip r:embed="rId2"/>
+          <a:stretch>
+            <a:fillRect/>
+          </a:stretch>
+        </p:blipFill>
+        <p:spPr>
+          <a:xfrm>
+            <a:off x="9099649" y="4124362"/>
+            <a:ext cx="166165" cy="174914"/>
+          </a:xfrm>
+          <a:prstGeom prst="rect">
+            <a:avLst/>
+          </a:prstGeom>
+        </p:spPr>
+      </p:pic>
+      <p:sp>
+        <p:nvSpPr>
+          <p:cNvPr id="50" name="Textfeld 49">
+            <a:extLst>
+              <a:ext uri="{FF2B5EF4-FFF2-40B4-BE49-F238E27FC236}">
+                <a16:creationId xmlns:a16="http://schemas.microsoft.com/office/drawing/2014/main" id="{8A6152E2-D527-62AF-329F-BE5199B5A685}"/>
+              </a:ext>
+            </a:extLst>
+          </p:cNvPr>
+          <p:cNvSpPr txBox="1"/>
+          <p:nvPr/>
+        </p:nvSpPr>
+        <p:spPr>
+          <a:xfrm>
+            <a:off x="8274357" y="5022500"/>
+            <a:ext cx="2951068" cy="646331"/>
+          </a:xfrm>
+          <a:prstGeom prst="rect">
+            <a:avLst/>
+          </a:prstGeom>
+          <a:noFill/>
+        </p:spPr>
+        <p:txBody>
+          <a:bodyPr wrap="square" rtlCol="0">
+            <a:spAutoFit/>
+          </a:bodyPr>
+          <a:lstStyle/>
+          <a:p>
+            <a:pPr algn="r"/>
+            <a:r>
+              <a:rPr lang="de-DE" sz="1200"/>
+              <a:t>Modules for resolving </a:t>
+            </a:r>
+            <a:br>
+              <a:rPr lang="de-DE" sz="1200"/>
+            </a:br>
+            <a:r>
+              <a:rPr lang="de-DE" sz="1200"/>
+              <a:t>divergences between </a:t>
+            </a:r>
+            <a:r>
+              <a:rPr lang="de-DE" sz="1200">
                 <a:solidFill>
                   <a:schemeClr val="tx1"/>
                 </a:solidFill>
               </a:rPr>
-              <a:t>AlarmList</a:t>
-            </a:r>
-          </a:p>
-          <a:p>
-            <a:pPr algn="ctr"/>
-            <a:r>
-              <a:rPr lang="de-DE" sz="800">
+              <a:t>OperationalState</a:t>
+            </a:r>
+            <a:br>
+              <a:rPr lang="de-DE" sz="1200">
                 <a:solidFill>
                   <a:schemeClr val="tx1"/>
                 </a:solidFill>
               </a:rPr>
-              <a:t>ToDo-List</a:t>
+            </a:br>
+            <a:r>
+              <a:rPr lang="de-DE" sz="1200"/>
+              <a:t>and AdministrativeState</a:t>
             </a:r>
           </a:p>
         </p:txBody>
       </p:sp>
       <p:cxnSp>
         <p:nvCxnSpPr>
-          <p:cNvPr id="8" name="Gerader Verbinder 7">
-            <a:extLst>
-              <a:ext uri="{FF2B5EF4-FFF2-40B4-BE49-F238E27FC236}">
-                <a16:creationId xmlns:a16="http://schemas.microsoft.com/office/drawing/2014/main" id="{B2A72DB9-9D61-6A9F-9437-D632C81409B0}"/>
+          <p:cNvPr id="51" name="Gerade Verbindung mit Pfeil 50">
+            <a:extLst>
+              <a:ext uri="{FF2B5EF4-FFF2-40B4-BE49-F238E27FC236}">
+                <a16:creationId xmlns:a16="http://schemas.microsoft.com/office/drawing/2014/main" id="{7BBAD315-E803-8AD8-F507-559315369AF0}"/>
               </a:ext>
             </a:extLst>
           </p:cNvPr>
@@ -10049,18 +15278,56 @@
         </p:nvCxnSpPr>
         <p:spPr>
           <a:xfrm>
-            <a:off x="1546860" y="815340"/>
-            <a:ext cx="0" cy="5400000"/>
-          </a:xfrm>
-          <a:prstGeom prst="line">
+            <a:off x="9708525" y="4161103"/>
+            <a:ext cx="3096000" cy="0"/>
+          </a:xfrm>
+          <a:prstGeom prst="straightConnector1">
             <a:avLst/>
           </a:prstGeom>
           <a:ln>
-            <a:solidFill>
-              <a:schemeClr val="bg1">
-                <a:lumMod val="65000"/>
-              </a:schemeClr>
-            </a:solidFill>
+            <a:tailEnd type="triangle"/>
+          </a:ln>
+        </p:spPr>
+        <p:style>
+          <a:lnRef idx="2">
+            <a:schemeClr val="accent1"/>
+          </a:lnRef>
+          <a:fillRef idx="0">
+            <a:schemeClr val="accent1"/>
+          </a:fillRef>
+          <a:effectRef idx="1">
+            <a:schemeClr val="accent1"/>
+          </a:effectRef>
+          <a:fontRef idx="minor">
+            <a:schemeClr val="tx1"/>
+          </a:fontRef>
+        </p:style>
+      </p:cxnSp>
+      <p:cxnSp>
+        <p:nvCxnSpPr>
+          <p:cNvPr id="52" name="Gerade Verbindung mit Pfeil 51">
+            <a:extLst>
+              <a:ext uri="{FF2B5EF4-FFF2-40B4-BE49-F238E27FC236}">
+                <a16:creationId xmlns:a16="http://schemas.microsoft.com/office/drawing/2014/main" id="{B15CF59D-D0AF-C7CC-3C94-FB6D305D84E6}"/>
+              </a:ext>
+            </a:extLst>
+          </p:cNvPr>
+          <p:cNvCxnSpPr>
+            <a:cxnSpLocks/>
+          </p:cNvCxnSpPr>
+          <p:nvPr/>
+        </p:nvCxnSpPr>
+        <p:spPr>
+          <a:xfrm flipH="1" flipV="1">
+            <a:off x="9708525" y="4270420"/>
+            <a:ext cx="3096000" cy="8813"/>
+          </a:xfrm>
+          <a:prstGeom prst="straightConnector1">
+            <a:avLst/>
+          </a:prstGeom>
+          <a:ln>
+            <a:prstDash val="dash"/>
+            <a:tailEnd type="triangle"/>
           </a:ln>
         </p:spPr>
         <p:style>
@@ -10080,10 +15347,10 @@
       </p:cxnSp>
       <p:sp>
         <p:nvSpPr>
-          <p:cNvPr id="10" name="Rechteck 9">
-            <a:extLst>
-              <a:ext uri="{FF2B5EF4-FFF2-40B4-BE49-F238E27FC236}">
-                <a16:creationId xmlns:a16="http://schemas.microsoft.com/office/drawing/2014/main" id="{4921D2B2-A1CD-5B5A-7BDE-9B8F734176BC}"/>
+          <p:cNvPr id="55" name="Rechteck 54">
+            <a:extLst>
+              <a:ext uri="{FF2B5EF4-FFF2-40B4-BE49-F238E27FC236}">
+                <a16:creationId xmlns:a16="http://schemas.microsoft.com/office/drawing/2014/main" id="{998CEDEB-E815-0B9D-F828-05A7711734B2}"/>
               </a:ext>
             </a:extLst>
           </p:cNvPr>
@@ -10092,7 +15359,7 @@
         </p:nvSpPr>
         <p:spPr>
           <a:xfrm>
-            <a:off x="1946963" y="1242060"/>
+            <a:off x="5320542" y="3819393"/>
             <a:ext cx="638710" cy="419100"/>
           </a:xfrm>
           <a:prstGeom prst="rect">
@@ -10128,12 +15395,42 @@
           </a:p>
         </p:txBody>
       </p:sp>
+      <p:pic>
+        <p:nvPicPr>
+          <p:cNvPr id="56" name="Grafik 55">
+            <a:extLst>
+              <a:ext uri="{FF2B5EF4-FFF2-40B4-BE49-F238E27FC236}">
+                <a16:creationId xmlns:a16="http://schemas.microsoft.com/office/drawing/2014/main" id="{78BFDC2D-D878-BE1D-4E34-51802A5909AA}"/>
+              </a:ext>
+            </a:extLst>
+          </p:cNvPr>
+          <p:cNvPicPr>
+            <a:picLocks noChangeAspect="1"/>
+          </p:cNvPicPr>
+          <p:nvPr/>
+        </p:nvPicPr>
+        <p:blipFill>
+          <a:blip r:embed="rId2"/>
+          <a:stretch>
+            <a:fillRect/>
+          </a:stretch>
+        </p:blipFill>
+        <p:spPr>
+          <a:xfrm>
+            <a:off x="5396842" y="3898362"/>
+            <a:ext cx="166165" cy="174914"/>
+          </a:xfrm>
+          <a:prstGeom prst="rect">
+            <a:avLst/>
+          </a:prstGeom>
+        </p:spPr>
+      </p:pic>
       <p:sp>
         <p:nvSpPr>
-          <p:cNvPr id="11" name="Rechteck 10">
-            <a:extLst>
-              <a:ext uri="{FF2B5EF4-FFF2-40B4-BE49-F238E27FC236}">
-                <a16:creationId xmlns:a16="http://schemas.microsoft.com/office/drawing/2014/main" id="{AB85860A-A1C5-AF4E-519F-B31760899D3D}"/>
+          <p:cNvPr id="57" name="Rechteck 56">
+            <a:extLst>
+              <a:ext uri="{FF2B5EF4-FFF2-40B4-BE49-F238E27FC236}">
+                <a16:creationId xmlns:a16="http://schemas.microsoft.com/office/drawing/2014/main" id="{F1661307-0A5B-5E08-2177-0EC27A984C77}"/>
               </a:ext>
             </a:extLst>
           </p:cNvPr>
@@ -10142,7 +15439,7 @@
         </p:nvSpPr>
         <p:spPr>
           <a:xfrm>
-            <a:off x="2066243" y="1504950"/>
+            <a:off x="5511300" y="4073276"/>
             <a:ext cx="638710" cy="419100"/>
           </a:xfrm>
           <a:prstGeom prst="rect">
@@ -10178,12 +15475,285 @@
           </a:p>
         </p:txBody>
       </p:sp>
+      <p:pic>
+        <p:nvPicPr>
+          <p:cNvPr id="58" name="Grafik 57">
+            <a:extLst>
+              <a:ext uri="{FF2B5EF4-FFF2-40B4-BE49-F238E27FC236}">
+                <a16:creationId xmlns:a16="http://schemas.microsoft.com/office/drawing/2014/main" id="{1634BDF2-1E6E-2CB9-1179-2AFB1196439F}"/>
+              </a:ext>
+            </a:extLst>
+          </p:cNvPr>
+          <p:cNvPicPr>
+            <a:picLocks noChangeAspect="1"/>
+          </p:cNvPicPr>
+          <p:nvPr/>
+        </p:nvPicPr>
+        <p:blipFill>
+          <a:blip r:embed="rId2"/>
+          <a:stretch>
+            <a:fillRect/>
+          </a:stretch>
+        </p:blipFill>
+        <p:spPr>
+          <a:xfrm>
+            <a:off x="5572424" y="4137699"/>
+            <a:ext cx="166165" cy="174914"/>
+          </a:xfrm>
+          <a:prstGeom prst="rect">
+            <a:avLst/>
+          </a:prstGeom>
+        </p:spPr>
+      </p:pic>
+      <p:cxnSp>
+        <p:nvCxnSpPr>
+          <p:cNvPr id="5" name="Gerade Verbindung mit Pfeil 4">
+            <a:extLst>
+              <a:ext uri="{FF2B5EF4-FFF2-40B4-BE49-F238E27FC236}">
+                <a16:creationId xmlns:a16="http://schemas.microsoft.com/office/drawing/2014/main" id="{D6339C93-8299-27F4-6747-DD225C958812}"/>
+              </a:ext>
+            </a:extLst>
+          </p:cNvPr>
+          <p:cNvCxnSpPr/>
+          <p:nvPr/>
+        </p:nvCxnSpPr>
+        <p:spPr>
+          <a:xfrm>
+            <a:off x="1429451" y="2806636"/>
+            <a:ext cx="1640092" cy="0"/>
+          </a:xfrm>
+          <a:prstGeom prst="straightConnector1">
+            <a:avLst/>
+          </a:prstGeom>
+          <a:ln>
+            <a:tailEnd type="triangle"/>
+          </a:ln>
+        </p:spPr>
+        <p:style>
+          <a:lnRef idx="2">
+            <a:schemeClr val="accent1"/>
+          </a:lnRef>
+          <a:fillRef idx="0">
+            <a:schemeClr val="accent1"/>
+          </a:fillRef>
+          <a:effectRef idx="1">
+            <a:schemeClr val="accent1"/>
+          </a:effectRef>
+          <a:fontRef idx="minor">
+            <a:schemeClr val="tx1"/>
+          </a:fontRef>
+        </p:style>
+      </p:cxnSp>
+      <p:cxnSp>
+        <p:nvCxnSpPr>
+          <p:cNvPr id="7" name="Gerade Verbindung mit Pfeil 6">
+            <a:extLst>
+              <a:ext uri="{FF2B5EF4-FFF2-40B4-BE49-F238E27FC236}">
+                <a16:creationId xmlns:a16="http://schemas.microsoft.com/office/drawing/2014/main" id="{1658B39E-547F-E511-D20E-25569104B4B9}"/>
+              </a:ext>
+            </a:extLst>
+          </p:cNvPr>
+          <p:cNvCxnSpPr>
+            <a:cxnSpLocks/>
+          </p:cNvCxnSpPr>
+          <p:nvPr/>
+        </p:nvCxnSpPr>
+        <p:spPr>
+          <a:xfrm flipH="1" flipV="1">
+            <a:off x="1429451" y="2915953"/>
+            <a:ext cx="1640092" cy="8813"/>
+          </a:xfrm>
+          <a:prstGeom prst="straightConnector1">
+            <a:avLst/>
+          </a:prstGeom>
+          <a:ln>
+            <a:prstDash val="dash"/>
+            <a:tailEnd type="triangle"/>
+          </a:ln>
+        </p:spPr>
+        <p:style>
+          <a:lnRef idx="2">
+            <a:schemeClr val="accent1"/>
+          </a:lnRef>
+          <a:fillRef idx="0">
+            <a:schemeClr val="accent1"/>
+          </a:fillRef>
+          <a:effectRef idx="1">
+            <a:schemeClr val="accent1"/>
+          </a:effectRef>
+          <a:fontRef idx="minor">
+            <a:schemeClr val="tx1"/>
+          </a:fontRef>
+        </p:style>
+      </p:cxnSp>
+      <p:cxnSp>
+        <p:nvCxnSpPr>
+          <p:cNvPr id="9" name="Gerade Verbindung mit Pfeil 8">
+            <a:extLst>
+              <a:ext uri="{FF2B5EF4-FFF2-40B4-BE49-F238E27FC236}">
+                <a16:creationId xmlns:a16="http://schemas.microsoft.com/office/drawing/2014/main" id="{B598A49F-7FDE-0781-D3E7-FD0BEDC62DC4}"/>
+              </a:ext>
+            </a:extLst>
+          </p:cNvPr>
+          <p:cNvCxnSpPr/>
+          <p:nvPr/>
+        </p:nvCxnSpPr>
+        <p:spPr>
+          <a:xfrm>
+            <a:off x="11215986" y="2743264"/>
+            <a:ext cx="1640092" cy="0"/>
+          </a:xfrm>
+          <a:prstGeom prst="straightConnector1">
+            <a:avLst/>
+          </a:prstGeom>
+          <a:ln>
+            <a:tailEnd type="triangle"/>
+          </a:ln>
+        </p:spPr>
+        <p:style>
+          <a:lnRef idx="2">
+            <a:schemeClr val="accent1"/>
+          </a:lnRef>
+          <a:fillRef idx="0">
+            <a:schemeClr val="accent1"/>
+          </a:fillRef>
+          <a:effectRef idx="1">
+            <a:schemeClr val="accent1"/>
+          </a:effectRef>
+          <a:fontRef idx="minor">
+            <a:schemeClr val="tx1"/>
+          </a:fontRef>
+        </p:style>
+      </p:cxnSp>
+      <p:cxnSp>
+        <p:nvCxnSpPr>
+          <p:cNvPr id="15" name="Gerade Verbindung mit Pfeil 14">
+            <a:extLst>
+              <a:ext uri="{FF2B5EF4-FFF2-40B4-BE49-F238E27FC236}">
+                <a16:creationId xmlns:a16="http://schemas.microsoft.com/office/drawing/2014/main" id="{C2AAE509-94C2-D339-BD6E-168F99A2FDA1}"/>
+              </a:ext>
+            </a:extLst>
+          </p:cNvPr>
+          <p:cNvCxnSpPr>
+            <a:cxnSpLocks/>
+          </p:cNvCxnSpPr>
+          <p:nvPr/>
+        </p:nvCxnSpPr>
+        <p:spPr>
+          <a:xfrm flipH="1" flipV="1">
+            <a:off x="11215986" y="2852581"/>
+            <a:ext cx="1640092" cy="8813"/>
+          </a:xfrm>
+          <a:prstGeom prst="straightConnector1">
+            <a:avLst/>
+          </a:prstGeom>
+          <a:ln>
+            <a:prstDash val="dash"/>
+            <a:tailEnd type="triangle"/>
+          </a:ln>
+        </p:spPr>
+        <p:style>
+          <a:lnRef idx="2">
+            <a:schemeClr val="accent1"/>
+          </a:lnRef>
+          <a:fillRef idx="0">
+            <a:schemeClr val="accent1"/>
+          </a:fillRef>
+          <a:effectRef idx="1">
+            <a:schemeClr val="accent1"/>
+          </a:effectRef>
+          <a:fontRef idx="minor">
+            <a:schemeClr val="tx1"/>
+          </a:fontRef>
+        </p:style>
+      </p:cxnSp>
+      <p:cxnSp>
+        <p:nvCxnSpPr>
+          <p:cNvPr id="18" name="Gerade Verbindung mit Pfeil 17">
+            <a:extLst>
+              <a:ext uri="{FF2B5EF4-FFF2-40B4-BE49-F238E27FC236}">
+                <a16:creationId xmlns:a16="http://schemas.microsoft.com/office/drawing/2014/main" id="{CA6A77B5-080D-6A54-ECF2-4D8B53BF51F1}"/>
+              </a:ext>
+            </a:extLst>
+          </p:cNvPr>
+          <p:cNvCxnSpPr/>
+          <p:nvPr/>
+        </p:nvCxnSpPr>
+        <p:spPr>
+          <a:xfrm>
+            <a:off x="10973994" y="3083982"/>
+            <a:ext cx="1640092" cy="0"/>
+          </a:xfrm>
+          <a:prstGeom prst="straightConnector1">
+            <a:avLst/>
+          </a:prstGeom>
+          <a:ln>
+            <a:tailEnd type="triangle"/>
+          </a:ln>
+        </p:spPr>
+        <p:style>
+          <a:lnRef idx="2">
+            <a:schemeClr val="accent1"/>
+          </a:lnRef>
+          <a:fillRef idx="0">
+            <a:schemeClr val="accent1"/>
+          </a:fillRef>
+          <a:effectRef idx="1">
+            <a:schemeClr val="accent1"/>
+          </a:effectRef>
+          <a:fontRef idx="minor">
+            <a:schemeClr val="tx1"/>
+          </a:fontRef>
+        </p:style>
+      </p:cxnSp>
+      <p:cxnSp>
+        <p:nvCxnSpPr>
+          <p:cNvPr id="24" name="Gerade Verbindung mit Pfeil 23">
+            <a:extLst>
+              <a:ext uri="{FF2B5EF4-FFF2-40B4-BE49-F238E27FC236}">
+                <a16:creationId xmlns:a16="http://schemas.microsoft.com/office/drawing/2014/main" id="{8CDD7D3A-76C9-4BDC-4E80-536CDBDCAD1C}"/>
+              </a:ext>
+            </a:extLst>
+          </p:cNvPr>
+          <p:cNvCxnSpPr>
+            <a:cxnSpLocks/>
+          </p:cNvCxnSpPr>
+          <p:nvPr/>
+        </p:nvCxnSpPr>
+        <p:spPr>
+          <a:xfrm flipH="1" flipV="1">
+            <a:off x="10973994" y="3193299"/>
+            <a:ext cx="1640092" cy="8813"/>
+          </a:xfrm>
+          <a:prstGeom prst="straightConnector1">
+            <a:avLst/>
+          </a:prstGeom>
+          <a:ln>
+            <a:prstDash val="dash"/>
+            <a:tailEnd type="triangle"/>
+          </a:ln>
+        </p:spPr>
+        <p:style>
+          <a:lnRef idx="2">
+            <a:schemeClr val="accent1"/>
+          </a:lnRef>
+          <a:fillRef idx="0">
+            <a:schemeClr val="accent1"/>
+          </a:fillRef>
+          <a:effectRef idx="1">
+            <a:schemeClr val="accent1"/>
+          </a:effectRef>
+          <a:fontRef idx="minor">
+            <a:schemeClr val="tx1"/>
+          </a:fontRef>
+        </p:style>
+      </p:cxnSp>
       <p:sp>
         <p:nvSpPr>
-          <p:cNvPr id="13" name="Rechteck 12">
-            <a:extLst>
-              <a:ext uri="{FF2B5EF4-FFF2-40B4-BE49-F238E27FC236}">
-                <a16:creationId xmlns:a16="http://schemas.microsoft.com/office/drawing/2014/main" id="{7AE13B01-B4C3-D5F1-CC62-E2FB37AD2428}"/>
+          <p:cNvPr id="29" name="Rechteck 28">
+            <a:extLst>
+              <a:ext uri="{FF2B5EF4-FFF2-40B4-BE49-F238E27FC236}">
+                <a16:creationId xmlns:a16="http://schemas.microsoft.com/office/drawing/2014/main" id="{1B1BBE33-3AF4-FE6D-E071-46F92113CD19}"/>
               </a:ext>
             </a:extLst>
           </p:cNvPr>
@@ -10192,7 +15762,7 @@
         </p:nvSpPr>
         <p:spPr>
           <a:xfrm>
-            <a:off x="2294832" y="2402723"/>
+            <a:off x="6484611" y="2762652"/>
             <a:ext cx="638710" cy="419100"/>
           </a:xfrm>
           <a:prstGeom prst="rect">
@@ -10230,10 +15800,10 @@
       </p:sp>
       <p:pic>
         <p:nvPicPr>
-          <p:cNvPr id="14" name="Grafik 13">
-            <a:extLst>
-              <a:ext uri="{FF2B5EF4-FFF2-40B4-BE49-F238E27FC236}">
-                <a16:creationId xmlns:a16="http://schemas.microsoft.com/office/drawing/2014/main" id="{2518E1E4-7D07-0174-BD08-75A840537EA4}"/>
+          <p:cNvPr id="40" name="Grafik 39">
+            <a:extLst>
+              <a:ext uri="{FF2B5EF4-FFF2-40B4-BE49-F238E27FC236}">
+                <a16:creationId xmlns:a16="http://schemas.microsoft.com/office/drawing/2014/main" id="{E09BDAA4-67BB-F896-6F09-0E1F9FBF8A45}"/>
               </a:ext>
             </a:extLst>
           </p:cNvPr>
@@ -10250,7 +15820,247 @@
         </p:blipFill>
         <p:spPr>
           <a:xfrm>
-            <a:off x="2355956" y="2467146"/>
+            <a:off x="6560911" y="2841621"/>
+            <a:ext cx="166165" cy="174914"/>
+          </a:xfrm>
+          <a:prstGeom prst="rect">
+            <a:avLst/>
+          </a:prstGeom>
+        </p:spPr>
+      </p:pic>
+      <p:sp>
+        <p:nvSpPr>
+          <p:cNvPr id="41" name="Rechteck 40">
+            <a:extLst>
+              <a:ext uri="{FF2B5EF4-FFF2-40B4-BE49-F238E27FC236}">
+                <a16:creationId xmlns:a16="http://schemas.microsoft.com/office/drawing/2014/main" id="{A6E45B43-9BE7-A098-7AF2-59295E61598B}"/>
+              </a:ext>
+            </a:extLst>
+          </p:cNvPr>
+          <p:cNvSpPr/>
+          <p:nvPr/>
+        </p:nvSpPr>
+        <p:spPr>
+          <a:xfrm>
+            <a:off x="6675369" y="3016535"/>
+            <a:ext cx="638710" cy="419100"/>
+          </a:xfrm>
+          <a:prstGeom prst="rect">
+            <a:avLst/>
+          </a:prstGeom>
+        </p:spPr>
+        <p:style>
+          <a:lnRef idx="2">
+            <a:schemeClr val="accent1">
+              <a:shade val="15000"/>
+            </a:schemeClr>
+          </a:lnRef>
+          <a:fillRef idx="1">
+            <a:schemeClr val="accent1"/>
+          </a:fillRef>
+          <a:effectRef idx="0">
+            <a:schemeClr val="accent1"/>
+          </a:effectRef>
+          <a:fontRef idx="minor">
+            <a:schemeClr val="lt1"/>
+          </a:fontRef>
+        </p:style>
+        <p:txBody>
+          <a:bodyPr rtlCol="0" anchor="t"/>
+          <a:lstStyle/>
+          <a:p>
+            <a:pPr algn="r">
+              <a:tabLst>
+                <a:tab pos="36000" algn="l"/>
+              </a:tabLst>
+            </a:pPr>
+            <a:endParaRPr lang="de-DE" sz="800"/>
+          </a:p>
+        </p:txBody>
+      </p:sp>
+      <p:pic>
+        <p:nvPicPr>
+          <p:cNvPr id="53" name="Grafik 52">
+            <a:extLst>
+              <a:ext uri="{FF2B5EF4-FFF2-40B4-BE49-F238E27FC236}">
+                <a16:creationId xmlns:a16="http://schemas.microsoft.com/office/drawing/2014/main" id="{121D0D37-DE66-DCCA-16C9-16066F081585}"/>
+              </a:ext>
+            </a:extLst>
+          </p:cNvPr>
+          <p:cNvPicPr>
+            <a:picLocks noChangeAspect="1"/>
+          </p:cNvPicPr>
+          <p:nvPr/>
+        </p:nvPicPr>
+        <p:blipFill>
+          <a:blip r:embed="rId2"/>
+          <a:stretch>
+            <a:fillRect/>
+          </a:stretch>
+        </p:blipFill>
+        <p:spPr>
+          <a:xfrm>
+            <a:off x="6736493" y="3080958"/>
+            <a:ext cx="166165" cy="174914"/>
+          </a:xfrm>
+          <a:prstGeom prst="rect">
+            <a:avLst/>
+          </a:prstGeom>
+        </p:spPr>
+      </p:pic>
+      <p:sp>
+        <p:nvSpPr>
+          <p:cNvPr id="54" name="Rechteck 53">
+            <a:extLst>
+              <a:ext uri="{FF2B5EF4-FFF2-40B4-BE49-F238E27FC236}">
+                <a16:creationId xmlns:a16="http://schemas.microsoft.com/office/drawing/2014/main" id="{8F8F26CE-AB6A-6A62-91BD-2A8161955A6F}"/>
+              </a:ext>
+            </a:extLst>
+          </p:cNvPr>
+          <p:cNvSpPr/>
+          <p:nvPr/>
+        </p:nvSpPr>
+        <p:spPr>
+          <a:xfrm>
+            <a:off x="7089931" y="2848038"/>
+            <a:ext cx="638710" cy="419100"/>
+          </a:xfrm>
+          <a:prstGeom prst="rect">
+            <a:avLst/>
+          </a:prstGeom>
+        </p:spPr>
+        <p:style>
+          <a:lnRef idx="2">
+            <a:schemeClr val="accent1">
+              <a:shade val="15000"/>
+            </a:schemeClr>
+          </a:lnRef>
+          <a:fillRef idx="1">
+            <a:schemeClr val="accent1"/>
+          </a:fillRef>
+          <a:effectRef idx="0">
+            <a:schemeClr val="accent1"/>
+          </a:effectRef>
+          <a:fontRef idx="minor">
+            <a:schemeClr val="lt1"/>
+          </a:fontRef>
+        </p:style>
+        <p:txBody>
+          <a:bodyPr rtlCol="0" anchor="t"/>
+          <a:lstStyle/>
+          <a:p>
+            <a:pPr algn="r">
+              <a:tabLst>
+                <a:tab pos="36000" algn="l"/>
+              </a:tabLst>
+            </a:pPr>
+            <a:endParaRPr lang="de-DE" sz="800"/>
+          </a:p>
+        </p:txBody>
+      </p:sp>
+      <p:pic>
+        <p:nvPicPr>
+          <p:cNvPr id="60" name="Grafik 59">
+            <a:extLst>
+              <a:ext uri="{FF2B5EF4-FFF2-40B4-BE49-F238E27FC236}">
+                <a16:creationId xmlns:a16="http://schemas.microsoft.com/office/drawing/2014/main" id="{04A1A064-B679-3656-0949-02313E2D7C3A}"/>
+              </a:ext>
+            </a:extLst>
+          </p:cNvPr>
+          <p:cNvPicPr>
+            <a:picLocks noChangeAspect="1"/>
+          </p:cNvPicPr>
+          <p:nvPr/>
+        </p:nvPicPr>
+        <p:blipFill>
+          <a:blip r:embed="rId2"/>
+          <a:stretch>
+            <a:fillRect/>
+          </a:stretch>
+        </p:blipFill>
+        <p:spPr>
+          <a:xfrm>
+            <a:off x="7166231" y="2927007"/>
+            <a:ext cx="166165" cy="174914"/>
+          </a:xfrm>
+          <a:prstGeom prst="rect">
+            <a:avLst/>
+          </a:prstGeom>
+        </p:spPr>
+      </p:pic>
+      <p:sp>
+        <p:nvSpPr>
+          <p:cNvPr id="61" name="Rechteck 60">
+            <a:extLst>
+              <a:ext uri="{FF2B5EF4-FFF2-40B4-BE49-F238E27FC236}">
+                <a16:creationId xmlns:a16="http://schemas.microsoft.com/office/drawing/2014/main" id="{D6BDC734-8B7E-DFBB-129E-71E3C1B430B8}"/>
+              </a:ext>
+            </a:extLst>
+          </p:cNvPr>
+          <p:cNvSpPr/>
+          <p:nvPr/>
+        </p:nvSpPr>
+        <p:spPr>
+          <a:xfrm>
+            <a:off x="7280689" y="3101921"/>
+            <a:ext cx="638710" cy="419100"/>
+          </a:xfrm>
+          <a:prstGeom prst="rect">
+            <a:avLst/>
+          </a:prstGeom>
+        </p:spPr>
+        <p:style>
+          <a:lnRef idx="2">
+            <a:schemeClr val="accent1">
+              <a:shade val="15000"/>
+            </a:schemeClr>
+          </a:lnRef>
+          <a:fillRef idx="1">
+            <a:schemeClr val="accent1"/>
+          </a:fillRef>
+          <a:effectRef idx="0">
+            <a:schemeClr val="accent1"/>
+          </a:effectRef>
+          <a:fontRef idx="minor">
+            <a:schemeClr val="lt1"/>
+          </a:fontRef>
+        </p:style>
+        <p:txBody>
+          <a:bodyPr rtlCol="0" anchor="t"/>
+          <a:lstStyle/>
+          <a:p>
+            <a:pPr algn="r">
+              <a:tabLst>
+                <a:tab pos="36000" algn="l"/>
+              </a:tabLst>
+            </a:pPr>
+            <a:endParaRPr lang="de-DE" sz="800"/>
+          </a:p>
+        </p:txBody>
+      </p:sp>
+      <p:pic>
+        <p:nvPicPr>
+          <p:cNvPr id="62" name="Grafik 61">
+            <a:extLst>
+              <a:ext uri="{FF2B5EF4-FFF2-40B4-BE49-F238E27FC236}">
+                <a16:creationId xmlns:a16="http://schemas.microsoft.com/office/drawing/2014/main" id="{F7C7F3DD-ECC4-4BD5-0946-1E129614D389}"/>
+              </a:ext>
+            </a:extLst>
+          </p:cNvPr>
+          <p:cNvPicPr>
+            <a:picLocks noChangeAspect="1"/>
+          </p:cNvPicPr>
+          <p:nvPr/>
+        </p:nvPicPr>
+        <p:blipFill>
+          <a:blip r:embed="rId2"/>
+          <a:stretch>
+            <a:fillRect/>
+          </a:stretch>
+        </p:blipFill>
+        <p:spPr>
+          <a:xfrm>
+            <a:off x="7341813" y="3166344"/>
             <a:ext cx="166165" cy="174914"/>
           </a:xfrm>
           <a:prstGeom prst="rect">
@@ -10260,20 +16070,22 @@
       </p:pic>
       <p:cxnSp>
         <p:nvCxnSpPr>
-          <p:cNvPr id="16" name="Gerade Verbindung mit Pfeil 15">
-            <a:extLst>
-              <a:ext uri="{FF2B5EF4-FFF2-40B4-BE49-F238E27FC236}">
-                <a16:creationId xmlns:a16="http://schemas.microsoft.com/office/drawing/2014/main" id="{A41C170E-5BE5-4CC7-0B74-FD347727DFC6}"/>
-              </a:ext>
-            </a:extLst>
-          </p:cNvPr>
-          <p:cNvCxnSpPr/>
+          <p:cNvPr id="63" name="Gerade Verbindung mit Pfeil 62">
+            <a:extLst>
+              <a:ext uri="{FF2B5EF4-FFF2-40B4-BE49-F238E27FC236}">
+                <a16:creationId xmlns:a16="http://schemas.microsoft.com/office/drawing/2014/main" id="{BBC574BA-725B-72F5-EF5E-3E57C781CBD4}"/>
+              </a:ext>
+            </a:extLst>
+          </p:cNvPr>
+          <p:cNvCxnSpPr>
+            <a:cxnSpLocks/>
+          </p:cNvCxnSpPr>
           <p:nvPr/>
         </p:nvCxnSpPr>
         <p:spPr>
           <a:xfrm>
-            <a:off x="306871" y="1451610"/>
-            <a:ext cx="1640092" cy="0"/>
+            <a:off x="9484495" y="3908836"/>
+            <a:ext cx="3096000" cy="0"/>
           </a:xfrm>
           <a:prstGeom prst="straightConnector1">
             <a:avLst/>
@@ -10299,10 +16111,10 @@
       </p:cxnSp>
       <p:cxnSp>
         <p:nvCxnSpPr>
-          <p:cNvPr id="17" name="Gerade Verbindung mit Pfeil 16">
-            <a:extLst>
-              <a:ext uri="{FF2B5EF4-FFF2-40B4-BE49-F238E27FC236}">
-                <a16:creationId xmlns:a16="http://schemas.microsoft.com/office/drawing/2014/main" id="{9326039E-2586-A1D8-1CFF-BB0395E97CF5}"/>
+          <p:cNvPr id="64" name="Gerade Verbindung mit Pfeil 63">
+            <a:extLst>
+              <a:ext uri="{FF2B5EF4-FFF2-40B4-BE49-F238E27FC236}">
+                <a16:creationId xmlns:a16="http://schemas.microsoft.com/office/drawing/2014/main" id="{80BE29C0-B5A4-26F6-59D9-655860A46635}"/>
               </a:ext>
             </a:extLst>
           </p:cNvPr>
@@ -10313,8 +16125,174 @@
         </p:nvCxnSpPr>
         <p:spPr>
           <a:xfrm flipH="1" flipV="1">
-            <a:off x="306871" y="1560927"/>
-            <a:ext cx="1640092" cy="8813"/>
+            <a:off x="9484495" y="4018153"/>
+            <a:ext cx="3096000" cy="8813"/>
+          </a:xfrm>
+          <a:prstGeom prst="straightConnector1">
+            <a:avLst/>
+          </a:prstGeom>
+          <a:ln>
+            <a:prstDash val="dash"/>
+            <a:tailEnd type="triangle"/>
+          </a:ln>
+        </p:spPr>
+        <p:style>
+          <a:lnRef idx="2">
+            <a:schemeClr val="accent1"/>
+          </a:lnRef>
+          <a:fillRef idx="0">
+            <a:schemeClr val="accent1"/>
+          </a:fillRef>
+          <a:effectRef idx="1">
+            <a:schemeClr val="accent1"/>
+          </a:effectRef>
+          <a:fontRef idx="minor">
+            <a:schemeClr val="tx1"/>
+          </a:fontRef>
+        </p:style>
+      </p:cxnSp>
+      <p:cxnSp>
+        <p:nvCxnSpPr>
+          <p:cNvPr id="65" name="Gerade Verbindung mit Pfeil 64">
+            <a:extLst>
+              <a:ext uri="{FF2B5EF4-FFF2-40B4-BE49-F238E27FC236}">
+                <a16:creationId xmlns:a16="http://schemas.microsoft.com/office/drawing/2014/main" id="{CFAD1B13-F4B3-0191-090A-B230AE73F719}"/>
+              </a:ext>
+            </a:extLst>
+          </p:cNvPr>
+          <p:cNvCxnSpPr>
+            <a:cxnSpLocks/>
+          </p:cNvCxnSpPr>
+          <p:nvPr/>
+        </p:nvCxnSpPr>
+        <p:spPr>
+          <a:xfrm>
+            <a:off x="9443805" y="4555487"/>
+            <a:ext cx="3096000" cy="0"/>
+          </a:xfrm>
+          <a:prstGeom prst="straightConnector1">
+            <a:avLst/>
+          </a:prstGeom>
+          <a:ln>
+            <a:tailEnd type="triangle"/>
+          </a:ln>
+        </p:spPr>
+        <p:style>
+          <a:lnRef idx="2">
+            <a:schemeClr val="accent1"/>
+          </a:lnRef>
+          <a:fillRef idx="0">
+            <a:schemeClr val="accent1"/>
+          </a:fillRef>
+          <a:effectRef idx="1">
+            <a:schemeClr val="accent1"/>
+          </a:effectRef>
+          <a:fontRef idx="minor">
+            <a:schemeClr val="tx1"/>
+          </a:fontRef>
+        </p:style>
+      </p:cxnSp>
+      <p:cxnSp>
+        <p:nvCxnSpPr>
+          <p:cNvPr id="66" name="Gerade Verbindung mit Pfeil 65">
+            <a:extLst>
+              <a:ext uri="{FF2B5EF4-FFF2-40B4-BE49-F238E27FC236}">
+                <a16:creationId xmlns:a16="http://schemas.microsoft.com/office/drawing/2014/main" id="{B15351C2-4638-07BC-FDF2-1B13276FA1B0}"/>
+              </a:ext>
+            </a:extLst>
+          </p:cNvPr>
+          <p:cNvCxnSpPr>
+            <a:cxnSpLocks/>
+          </p:cNvCxnSpPr>
+          <p:nvPr/>
+        </p:nvCxnSpPr>
+        <p:spPr>
+          <a:xfrm flipH="1" flipV="1">
+            <a:off x="9443805" y="4664804"/>
+            <a:ext cx="3096000" cy="8813"/>
+          </a:xfrm>
+          <a:prstGeom prst="straightConnector1">
+            <a:avLst/>
+          </a:prstGeom>
+          <a:ln>
+            <a:prstDash val="dash"/>
+            <a:tailEnd type="triangle"/>
+          </a:ln>
+        </p:spPr>
+        <p:style>
+          <a:lnRef idx="2">
+            <a:schemeClr val="accent1"/>
+          </a:lnRef>
+          <a:fillRef idx="0">
+            <a:schemeClr val="accent1"/>
+          </a:fillRef>
+          <a:effectRef idx="1">
+            <a:schemeClr val="accent1"/>
+          </a:effectRef>
+          <a:fontRef idx="minor">
+            <a:schemeClr val="tx1"/>
+          </a:fontRef>
+        </p:style>
+      </p:cxnSp>
+      <p:cxnSp>
+        <p:nvCxnSpPr>
+          <p:cNvPr id="67" name="Gerade Verbindung mit Pfeil 66">
+            <a:extLst>
+              <a:ext uri="{FF2B5EF4-FFF2-40B4-BE49-F238E27FC236}">
+                <a16:creationId xmlns:a16="http://schemas.microsoft.com/office/drawing/2014/main" id="{4BD764D8-9CB1-5DD4-A424-B6E59418E0A7}"/>
+              </a:ext>
+            </a:extLst>
+          </p:cNvPr>
+          <p:cNvCxnSpPr>
+            <a:cxnSpLocks/>
+          </p:cNvCxnSpPr>
+          <p:nvPr/>
+        </p:nvCxnSpPr>
+        <p:spPr>
+          <a:xfrm>
+            <a:off x="9634563" y="4842311"/>
+            <a:ext cx="3096000" cy="0"/>
+          </a:xfrm>
+          <a:prstGeom prst="straightConnector1">
+            <a:avLst/>
+          </a:prstGeom>
+          <a:ln>
+            <a:tailEnd type="triangle"/>
+          </a:ln>
+        </p:spPr>
+        <p:style>
+          <a:lnRef idx="2">
+            <a:schemeClr val="accent1"/>
+          </a:lnRef>
+          <a:fillRef idx="0">
+            <a:schemeClr val="accent1"/>
+          </a:fillRef>
+          <a:effectRef idx="1">
+            <a:schemeClr val="accent1"/>
+          </a:effectRef>
+          <a:fontRef idx="minor">
+            <a:schemeClr val="tx1"/>
+          </a:fontRef>
+        </p:style>
+      </p:cxnSp>
+      <p:cxnSp>
+        <p:nvCxnSpPr>
+          <p:cNvPr id="68" name="Gerade Verbindung mit Pfeil 67">
+            <a:extLst>
+              <a:ext uri="{FF2B5EF4-FFF2-40B4-BE49-F238E27FC236}">
+                <a16:creationId xmlns:a16="http://schemas.microsoft.com/office/drawing/2014/main" id="{77067898-E101-32BA-37E4-8FA3618B4FD0}"/>
+              </a:ext>
+            </a:extLst>
+          </p:cNvPr>
+          <p:cNvCxnSpPr>
+            <a:cxnSpLocks/>
+          </p:cNvCxnSpPr>
+          <p:nvPr/>
+        </p:nvCxnSpPr>
+        <p:spPr>
+          <a:xfrm flipH="1" flipV="1">
+            <a:off x="9634563" y="4951628"/>
+            <a:ext cx="3096000" cy="8813"/>
           </a:xfrm>
           <a:prstGeom prst="straightConnector1">
             <a:avLst/>
@@ -10341,10 +16319,10 @@
       </p:cxnSp>
       <p:sp>
         <p:nvSpPr>
-          <p:cNvPr id="19" name="Textfeld 18">
-            <a:extLst>
-              <a:ext uri="{FF2B5EF4-FFF2-40B4-BE49-F238E27FC236}">
-                <a16:creationId xmlns:a16="http://schemas.microsoft.com/office/drawing/2014/main" id="{B15F98CA-500C-497C-9BEB-4DC69798E624}"/>
+          <p:cNvPr id="70" name="Textfeld 69">
+            <a:extLst>
+              <a:ext uri="{FF2B5EF4-FFF2-40B4-BE49-F238E27FC236}">
+                <a16:creationId xmlns:a16="http://schemas.microsoft.com/office/drawing/2014/main" id="{DEB442AC-31D6-845A-4716-7598BED1D91C}"/>
               </a:ext>
             </a:extLst>
           </p:cNvPr>
@@ -10353,8 +16331,8 @@
         </p:nvSpPr>
         <p:spPr>
           <a:xfrm>
-            <a:off x="1791655" y="771904"/>
-            <a:ext cx="2422205" cy="276999"/>
+            <a:off x="3512633" y="4395335"/>
+            <a:ext cx="3028576" cy="461665"/>
           </a:xfrm>
           <a:prstGeom prst="rect">
             <a:avLst/>
@@ -10369,17 +16347,17 @@
           <a:p>
             <a:r>
               <a:rPr lang="de-DE" sz="1200"/>
-              <a:t>Modules changing the TargetState</a:t>
+              <a:t>Modules for keeping the AdministrativeState clean and consistent</a:t>
             </a:r>
           </a:p>
         </p:txBody>
       </p:sp>
       <p:sp>
         <p:nvSpPr>
-          <p:cNvPr id="21" name="Rechteck 20">
-            <a:extLst>
-              <a:ext uri="{FF2B5EF4-FFF2-40B4-BE49-F238E27FC236}">
-                <a16:creationId xmlns:a16="http://schemas.microsoft.com/office/drawing/2014/main" id="{5E682443-CB6A-7EC0-8599-973D53EC0436}"/>
+          <p:cNvPr id="71" name="Pfeil: nach unten 70">
+            <a:extLst>
+              <a:ext uri="{FF2B5EF4-FFF2-40B4-BE49-F238E27FC236}">
+                <a16:creationId xmlns:a16="http://schemas.microsoft.com/office/drawing/2014/main" id="{860000F8-4BE8-02EE-361D-984158792427}"/>
               </a:ext>
             </a:extLst>
           </p:cNvPr>
@@ -10387,526 +16365,8 @@
           <p:nvPr/>
         </p:nvSpPr>
         <p:spPr>
-          <a:xfrm>
-            <a:off x="9658046" y="2183130"/>
-            <a:ext cx="638710" cy="419100"/>
-          </a:xfrm>
-          <a:prstGeom prst="rect">
-            <a:avLst/>
-          </a:prstGeom>
-        </p:spPr>
-        <p:style>
-          <a:lnRef idx="2">
-            <a:schemeClr val="accent1">
-              <a:shade val="15000"/>
-            </a:schemeClr>
-          </a:lnRef>
-          <a:fillRef idx="1">
-            <a:schemeClr val="accent1"/>
-          </a:fillRef>
-          <a:effectRef idx="0">
-            <a:schemeClr val="accent1"/>
-          </a:effectRef>
-          <a:fontRef idx="minor">
-            <a:schemeClr val="lt1"/>
-          </a:fontRef>
-        </p:style>
-        <p:txBody>
-          <a:bodyPr rtlCol="0" anchor="t"/>
-          <a:lstStyle/>
-          <a:p>
-            <a:pPr algn="r">
-              <a:tabLst>
-                <a:tab pos="36000" algn="l"/>
-              </a:tabLst>
-            </a:pPr>
-            <a:endParaRPr lang="de-DE" sz="800"/>
-          </a:p>
-        </p:txBody>
-      </p:sp>
-      <p:pic>
-        <p:nvPicPr>
-          <p:cNvPr id="22" name="Grafik 21">
-            <a:extLst>
-              <a:ext uri="{FF2B5EF4-FFF2-40B4-BE49-F238E27FC236}">
-                <a16:creationId xmlns:a16="http://schemas.microsoft.com/office/drawing/2014/main" id="{886A27DD-C9F0-DC50-F102-4D63B907E29A}"/>
-              </a:ext>
-            </a:extLst>
-          </p:cNvPr>
-          <p:cNvPicPr>
-            <a:picLocks noChangeAspect="1"/>
-          </p:cNvPicPr>
-          <p:nvPr/>
-        </p:nvPicPr>
-        <p:blipFill>
-          <a:blip r:embed="rId2"/>
-          <a:stretch>
-            <a:fillRect/>
-          </a:stretch>
-        </p:blipFill>
-        <p:spPr>
-          <a:xfrm>
-            <a:off x="9734346" y="2262099"/>
-            <a:ext cx="166165" cy="174914"/>
-          </a:xfrm>
-          <a:prstGeom prst="rect">
-            <a:avLst/>
-          </a:prstGeom>
-        </p:spPr>
-      </p:pic>
-      <p:cxnSp>
-        <p:nvCxnSpPr>
-          <p:cNvPr id="23" name="Gerader Verbinder 22">
-            <a:extLst>
-              <a:ext uri="{FF2B5EF4-FFF2-40B4-BE49-F238E27FC236}">
-                <a16:creationId xmlns:a16="http://schemas.microsoft.com/office/drawing/2014/main" id="{B1C5A0CB-3339-C2C2-A156-311F7B47233C}"/>
-              </a:ext>
-            </a:extLst>
-          </p:cNvPr>
-          <p:cNvCxnSpPr>
-            <a:cxnSpLocks/>
-          </p:cNvCxnSpPr>
-          <p:nvPr/>
-        </p:nvCxnSpPr>
-        <p:spPr>
-          <a:xfrm>
-            <a:off x="10799762" y="858776"/>
-            <a:ext cx="0" cy="5400000"/>
-          </a:xfrm>
-          <a:prstGeom prst="line">
-            <a:avLst/>
-          </a:prstGeom>
-          <a:ln>
-            <a:solidFill>
-              <a:schemeClr val="bg1">
-                <a:lumMod val="65000"/>
-              </a:schemeClr>
-            </a:solidFill>
-          </a:ln>
-        </p:spPr>
-        <p:style>
-          <a:lnRef idx="2">
-            <a:schemeClr val="accent1"/>
-          </a:lnRef>
-          <a:fillRef idx="0">
-            <a:schemeClr val="accent1"/>
-          </a:fillRef>
-          <a:effectRef idx="1">
-            <a:schemeClr val="accent1"/>
-          </a:effectRef>
-          <a:fontRef idx="minor">
-            <a:schemeClr val="tx1"/>
-          </a:fontRef>
-        </p:style>
-      </p:cxnSp>
-      <p:sp>
-        <p:nvSpPr>
-          <p:cNvPr id="26" name="Rechteck 25">
-            <a:extLst>
-              <a:ext uri="{FF2B5EF4-FFF2-40B4-BE49-F238E27FC236}">
-                <a16:creationId xmlns:a16="http://schemas.microsoft.com/office/drawing/2014/main" id="{D0982B6D-D682-66DE-7746-5A3C99DF8921}"/>
-              </a:ext>
-            </a:extLst>
-          </p:cNvPr>
-          <p:cNvSpPr/>
-          <p:nvPr/>
-        </p:nvSpPr>
-        <p:spPr>
-          <a:xfrm>
-            <a:off x="9848804" y="2437013"/>
-            <a:ext cx="638710" cy="419100"/>
-          </a:xfrm>
-          <a:prstGeom prst="rect">
-            <a:avLst/>
-          </a:prstGeom>
-        </p:spPr>
-        <p:style>
-          <a:lnRef idx="2">
-            <a:schemeClr val="accent1">
-              <a:shade val="15000"/>
-            </a:schemeClr>
-          </a:lnRef>
-          <a:fillRef idx="1">
-            <a:schemeClr val="accent1"/>
-          </a:fillRef>
-          <a:effectRef idx="0">
-            <a:schemeClr val="accent1"/>
-          </a:effectRef>
-          <a:fontRef idx="minor">
-            <a:schemeClr val="lt1"/>
-          </a:fontRef>
-        </p:style>
-        <p:txBody>
-          <a:bodyPr rtlCol="0" anchor="t"/>
-          <a:lstStyle/>
-          <a:p>
-            <a:pPr algn="r">
-              <a:tabLst>
-                <a:tab pos="36000" algn="l"/>
-              </a:tabLst>
-            </a:pPr>
-            <a:endParaRPr lang="de-DE" sz="800"/>
-          </a:p>
-        </p:txBody>
-      </p:sp>
-      <p:pic>
-        <p:nvPicPr>
-          <p:cNvPr id="27" name="Grafik 26">
-            <a:extLst>
-              <a:ext uri="{FF2B5EF4-FFF2-40B4-BE49-F238E27FC236}">
-                <a16:creationId xmlns:a16="http://schemas.microsoft.com/office/drawing/2014/main" id="{61BB6406-8427-AA03-3040-AC06213D04D6}"/>
-              </a:ext>
-            </a:extLst>
-          </p:cNvPr>
-          <p:cNvPicPr>
-            <a:picLocks noChangeAspect="1"/>
-          </p:cNvPicPr>
-          <p:nvPr/>
-        </p:nvPicPr>
-        <p:blipFill>
-          <a:blip r:embed="rId2"/>
-          <a:stretch>
-            <a:fillRect/>
-          </a:stretch>
-        </p:blipFill>
-        <p:spPr>
-          <a:xfrm>
-            <a:off x="9909928" y="2501436"/>
-            <a:ext cx="166165" cy="174914"/>
-          </a:xfrm>
-          <a:prstGeom prst="rect">
-            <a:avLst/>
-          </a:prstGeom>
-        </p:spPr>
-      </p:pic>
-      <p:sp>
-        <p:nvSpPr>
-          <p:cNvPr id="30" name="Textfeld 29">
-            <a:extLst>
-              <a:ext uri="{FF2B5EF4-FFF2-40B4-BE49-F238E27FC236}">
-                <a16:creationId xmlns:a16="http://schemas.microsoft.com/office/drawing/2014/main" id="{F8F209D8-265F-5230-5DB1-DC91F74B162F}"/>
-              </a:ext>
-            </a:extLst>
-          </p:cNvPr>
-          <p:cNvSpPr txBox="1"/>
-          <p:nvPr/>
-        </p:nvSpPr>
-        <p:spPr>
-          <a:xfrm>
-            <a:off x="7789863" y="771904"/>
-            <a:ext cx="2853775" cy="276999"/>
-          </a:xfrm>
-          <a:prstGeom prst="rect">
-            <a:avLst/>
-          </a:prstGeom>
-          <a:noFill/>
-        </p:spPr>
-        <p:txBody>
-          <a:bodyPr wrap="square" rtlCol="0">
-            <a:spAutoFit/>
-          </a:bodyPr>
-          <a:lstStyle/>
-          <a:p>
-            <a:pPr algn="r"/>
-            <a:r>
-              <a:rPr lang="de-DE" sz="1200"/>
-              <a:t>Modules updating the CurrentState</a:t>
-            </a:r>
-          </a:p>
-        </p:txBody>
-      </p:sp>
-      <p:sp>
-        <p:nvSpPr>
-          <p:cNvPr id="31" name="Rechteck 30">
-            <a:extLst>
-              <a:ext uri="{FF2B5EF4-FFF2-40B4-BE49-F238E27FC236}">
-                <a16:creationId xmlns:a16="http://schemas.microsoft.com/office/drawing/2014/main" id="{BEBB1305-415F-C61D-3CE9-248E0D923398}"/>
-              </a:ext>
-            </a:extLst>
-          </p:cNvPr>
-          <p:cNvSpPr/>
-          <p:nvPr/>
-        </p:nvSpPr>
-        <p:spPr>
-          <a:xfrm>
-            <a:off x="9700718" y="1554480"/>
-            <a:ext cx="638710" cy="419100"/>
-          </a:xfrm>
-          <a:prstGeom prst="rect">
-            <a:avLst/>
-          </a:prstGeom>
-        </p:spPr>
-        <p:style>
-          <a:lnRef idx="2">
-            <a:schemeClr val="accent1">
-              <a:shade val="15000"/>
-            </a:schemeClr>
-          </a:lnRef>
-          <a:fillRef idx="1">
-            <a:schemeClr val="accent1"/>
-          </a:fillRef>
-          <a:effectRef idx="0">
-            <a:schemeClr val="accent1"/>
-          </a:effectRef>
-          <a:fontRef idx="minor">
-            <a:schemeClr val="lt1"/>
-          </a:fontRef>
-        </p:style>
-        <p:txBody>
-          <a:bodyPr rtlCol="0" anchor="t"/>
-          <a:lstStyle/>
-          <a:p>
-            <a:pPr algn="r">
-              <a:tabLst>
-                <a:tab pos="36000" algn="l"/>
-              </a:tabLst>
-            </a:pPr>
-            <a:endParaRPr lang="de-DE" sz="800"/>
-          </a:p>
-        </p:txBody>
-      </p:sp>
-      <p:pic>
-        <p:nvPicPr>
-          <p:cNvPr id="32" name="Grafik 31">
-            <a:extLst>
-              <a:ext uri="{FF2B5EF4-FFF2-40B4-BE49-F238E27FC236}">
-                <a16:creationId xmlns:a16="http://schemas.microsoft.com/office/drawing/2014/main" id="{AB09B62C-A946-E9FF-4720-224648348961}"/>
-              </a:ext>
-            </a:extLst>
-          </p:cNvPr>
-          <p:cNvPicPr>
-            <a:picLocks noChangeAspect="1"/>
-          </p:cNvPicPr>
-          <p:nvPr/>
-        </p:nvPicPr>
-        <p:blipFill>
-          <a:blip r:embed="rId2"/>
-          <a:stretch>
-            <a:fillRect/>
-          </a:stretch>
-        </p:blipFill>
-        <p:spPr>
-          <a:xfrm>
-            <a:off x="9777018" y="1633449"/>
-            <a:ext cx="166165" cy="174914"/>
-          </a:xfrm>
-          <a:prstGeom prst="rect">
-            <a:avLst/>
-          </a:prstGeom>
-        </p:spPr>
-      </p:pic>
-      <p:sp>
-        <p:nvSpPr>
-          <p:cNvPr id="33" name="Rechteck 32">
-            <a:extLst>
-              <a:ext uri="{FF2B5EF4-FFF2-40B4-BE49-F238E27FC236}">
-                <a16:creationId xmlns:a16="http://schemas.microsoft.com/office/drawing/2014/main" id="{AAE5ECF3-C8FE-F2FB-5245-974B2825FA42}"/>
-              </a:ext>
-            </a:extLst>
-          </p:cNvPr>
-          <p:cNvSpPr/>
-          <p:nvPr/>
-        </p:nvSpPr>
-        <p:spPr>
-          <a:xfrm>
-            <a:off x="9891476" y="1808363"/>
-            <a:ext cx="638710" cy="419100"/>
-          </a:xfrm>
-          <a:prstGeom prst="rect">
-            <a:avLst/>
-          </a:prstGeom>
-        </p:spPr>
-        <p:style>
-          <a:lnRef idx="2">
-            <a:schemeClr val="accent1">
-              <a:shade val="15000"/>
-            </a:schemeClr>
-          </a:lnRef>
-          <a:fillRef idx="1">
-            <a:schemeClr val="accent1"/>
-          </a:fillRef>
-          <a:effectRef idx="0">
-            <a:schemeClr val="accent1"/>
-          </a:effectRef>
-          <a:fontRef idx="minor">
-            <a:schemeClr val="lt1"/>
-          </a:fontRef>
-        </p:style>
-        <p:txBody>
-          <a:bodyPr rtlCol="0" anchor="t"/>
-          <a:lstStyle/>
-          <a:p>
-            <a:pPr algn="r">
-              <a:tabLst>
-                <a:tab pos="36000" algn="l"/>
-              </a:tabLst>
-            </a:pPr>
-            <a:endParaRPr lang="de-DE" sz="800"/>
-          </a:p>
-        </p:txBody>
-      </p:sp>
-      <p:pic>
-        <p:nvPicPr>
-          <p:cNvPr id="34" name="Grafik 33">
-            <a:extLst>
-              <a:ext uri="{FF2B5EF4-FFF2-40B4-BE49-F238E27FC236}">
-                <a16:creationId xmlns:a16="http://schemas.microsoft.com/office/drawing/2014/main" id="{820EF47B-6F6E-5327-FE6B-AB86187AB36F}"/>
-              </a:ext>
-            </a:extLst>
-          </p:cNvPr>
-          <p:cNvPicPr>
-            <a:picLocks noChangeAspect="1"/>
-          </p:cNvPicPr>
-          <p:nvPr/>
-        </p:nvPicPr>
-        <p:blipFill>
-          <a:blip r:embed="rId2"/>
-          <a:stretch>
-            <a:fillRect/>
-          </a:stretch>
-        </p:blipFill>
-        <p:spPr>
-          <a:xfrm>
-            <a:off x="9952600" y="1872786"/>
-            <a:ext cx="166165" cy="174914"/>
-          </a:xfrm>
-          <a:prstGeom prst="rect">
-            <a:avLst/>
-          </a:prstGeom>
-        </p:spPr>
-      </p:pic>
-      <p:cxnSp>
-        <p:nvCxnSpPr>
-          <p:cNvPr id="35" name="Gerade Verbindung mit Pfeil 34">
-            <a:extLst>
-              <a:ext uri="{FF2B5EF4-FFF2-40B4-BE49-F238E27FC236}">
-                <a16:creationId xmlns:a16="http://schemas.microsoft.com/office/drawing/2014/main" id="{C3993F86-8ECE-B926-B471-6625E7F7319D}"/>
-              </a:ext>
-            </a:extLst>
-          </p:cNvPr>
-          <p:cNvCxnSpPr/>
-          <p:nvPr/>
-        </p:nvCxnSpPr>
-        <p:spPr>
-          <a:xfrm>
-            <a:off x="10339428" y="1632546"/>
-            <a:ext cx="1640092" cy="0"/>
-          </a:xfrm>
-          <a:prstGeom prst="straightConnector1">
-            <a:avLst/>
-          </a:prstGeom>
-          <a:ln>
-            <a:tailEnd type="triangle"/>
-          </a:ln>
-        </p:spPr>
-        <p:style>
-          <a:lnRef idx="2">
-            <a:schemeClr val="accent1"/>
-          </a:lnRef>
-          <a:fillRef idx="0">
-            <a:schemeClr val="accent1"/>
-          </a:fillRef>
-          <a:effectRef idx="1">
-            <a:schemeClr val="accent1"/>
-          </a:effectRef>
-          <a:fontRef idx="minor">
-            <a:schemeClr val="tx1"/>
-          </a:fontRef>
-        </p:style>
-      </p:cxnSp>
-      <p:cxnSp>
-        <p:nvCxnSpPr>
-          <p:cNvPr id="36" name="Gerade Verbindung mit Pfeil 35">
-            <a:extLst>
-              <a:ext uri="{FF2B5EF4-FFF2-40B4-BE49-F238E27FC236}">
-                <a16:creationId xmlns:a16="http://schemas.microsoft.com/office/drawing/2014/main" id="{F28B876E-0BE4-F188-B266-07D970137D3D}"/>
-              </a:ext>
-            </a:extLst>
-          </p:cNvPr>
-          <p:cNvCxnSpPr>
-            <a:cxnSpLocks/>
-          </p:cNvCxnSpPr>
-          <p:nvPr/>
-        </p:nvCxnSpPr>
-        <p:spPr>
-          <a:xfrm flipH="1" flipV="1">
-            <a:off x="10339428" y="1741863"/>
-            <a:ext cx="1640092" cy="8813"/>
-          </a:xfrm>
-          <a:prstGeom prst="straightConnector1">
-            <a:avLst/>
-          </a:prstGeom>
-          <a:ln>
-            <a:prstDash val="dash"/>
-            <a:tailEnd type="triangle"/>
-          </a:ln>
-        </p:spPr>
-        <p:style>
-          <a:lnRef idx="2">
-            <a:schemeClr val="accent1"/>
-          </a:lnRef>
-          <a:fillRef idx="0">
-            <a:schemeClr val="accent1"/>
-          </a:fillRef>
-          <a:effectRef idx="1">
-            <a:schemeClr val="accent1"/>
-          </a:effectRef>
-          <a:fontRef idx="minor">
-            <a:schemeClr val="tx1"/>
-          </a:fontRef>
-        </p:style>
-      </p:cxnSp>
-      <p:sp>
-        <p:nvSpPr>
-          <p:cNvPr id="37" name="Textfeld 36">
-            <a:extLst>
-              <a:ext uri="{FF2B5EF4-FFF2-40B4-BE49-F238E27FC236}">
-                <a16:creationId xmlns:a16="http://schemas.microsoft.com/office/drawing/2014/main" id="{933E09A7-88FD-74AD-4549-31C42BDB99FD}"/>
-              </a:ext>
-            </a:extLst>
-          </p:cNvPr>
-          <p:cNvSpPr txBox="1"/>
-          <p:nvPr/>
-        </p:nvSpPr>
-        <p:spPr>
-          <a:xfrm>
-            <a:off x="4821512" y="1814721"/>
-            <a:ext cx="2853775" cy="646331"/>
-          </a:xfrm>
-          <a:prstGeom prst="rect">
-            <a:avLst/>
-          </a:prstGeom>
-          <a:noFill/>
-        </p:spPr>
-        <p:txBody>
-          <a:bodyPr wrap="square" rtlCol="0">
-            <a:spAutoFit/>
-          </a:bodyPr>
-          <a:lstStyle/>
-          <a:p>
-            <a:pPr algn="ctr"/>
-            <a:r>
-              <a:rPr lang="de-DE" sz="1200"/>
-              <a:t>Module comparing TargetState with CurrentState and documenting divergences</a:t>
-            </a:r>
-          </a:p>
-        </p:txBody>
-      </p:sp>
-      <p:sp>
-        <p:nvSpPr>
-          <p:cNvPr id="38" name="Pfeil: nach unten 37">
-            <a:extLst>
-              <a:ext uri="{FF2B5EF4-FFF2-40B4-BE49-F238E27FC236}">
-                <a16:creationId xmlns:a16="http://schemas.microsoft.com/office/drawing/2014/main" id="{16B278CA-304F-33B3-E8D1-DE31DD22F9AC}"/>
-              </a:ext>
-            </a:extLst>
-          </p:cNvPr>
-          <p:cNvSpPr/>
-          <p:nvPr/>
-        </p:nvSpPr>
-        <p:spPr>
-          <a:xfrm>
-            <a:off x="6137911" y="3154680"/>
+          <a:xfrm rot="16200000">
+            <a:off x="8321672" y="4203130"/>
             <a:ext cx="220975" cy="417022"/>
           </a:xfrm>
           <a:prstGeom prst="downArrow">
@@ -10941,677 +16401,6 @@
           </a:p>
         </p:txBody>
       </p:sp>
-      <p:sp>
-        <p:nvSpPr>
-          <p:cNvPr id="39" name="Textfeld 38">
-            <a:extLst>
-              <a:ext uri="{FF2B5EF4-FFF2-40B4-BE49-F238E27FC236}">
-                <a16:creationId xmlns:a16="http://schemas.microsoft.com/office/drawing/2014/main" id="{D2EEF4CD-3E1D-8788-1AE8-A40A7D857F17}"/>
-              </a:ext>
-            </a:extLst>
-          </p:cNvPr>
-          <p:cNvSpPr txBox="1"/>
-          <p:nvPr/>
-        </p:nvSpPr>
-        <p:spPr>
-          <a:xfrm>
-            <a:off x="4821510" y="5313914"/>
-            <a:ext cx="2853775" cy="276999"/>
-          </a:xfrm>
-          <a:prstGeom prst="rect">
-            <a:avLst/>
-          </a:prstGeom>
-          <a:noFill/>
-        </p:spPr>
-        <p:txBody>
-          <a:bodyPr wrap="square" rtlCol="0">
-            <a:spAutoFit/>
-          </a:bodyPr>
-          <a:lstStyle/>
-          <a:p>
-            <a:pPr algn="ctr"/>
-            <a:r>
-              <a:rPr lang="de-DE" sz="1200"/>
-              <a:t>Documentation of divergences</a:t>
-            </a:r>
-          </a:p>
-        </p:txBody>
-      </p:sp>
-      <p:sp>
-        <p:nvSpPr>
-          <p:cNvPr id="42" name="Rechteck 41">
-            <a:extLst>
-              <a:ext uri="{FF2B5EF4-FFF2-40B4-BE49-F238E27FC236}">
-                <a16:creationId xmlns:a16="http://schemas.microsoft.com/office/drawing/2014/main" id="{ECC3A7AC-6D82-3D20-89BC-4C6701A7D54A}"/>
-              </a:ext>
-            </a:extLst>
-          </p:cNvPr>
-          <p:cNvSpPr/>
-          <p:nvPr/>
-        </p:nvSpPr>
-        <p:spPr>
-          <a:xfrm>
-            <a:off x="8308238" y="4756754"/>
-            <a:ext cx="638710" cy="419100"/>
-          </a:xfrm>
-          <a:prstGeom prst="rect">
-            <a:avLst/>
-          </a:prstGeom>
-        </p:spPr>
-        <p:style>
-          <a:lnRef idx="2">
-            <a:schemeClr val="accent1">
-              <a:shade val="15000"/>
-            </a:schemeClr>
-          </a:lnRef>
-          <a:fillRef idx="1">
-            <a:schemeClr val="accent1"/>
-          </a:fillRef>
-          <a:effectRef idx="0">
-            <a:schemeClr val="accent1"/>
-          </a:effectRef>
-          <a:fontRef idx="minor">
-            <a:schemeClr val="lt1"/>
-          </a:fontRef>
-        </p:style>
-        <p:txBody>
-          <a:bodyPr rtlCol="0" anchor="t"/>
-          <a:lstStyle/>
-          <a:p>
-            <a:pPr algn="r">
-              <a:tabLst>
-                <a:tab pos="36000" algn="l"/>
-              </a:tabLst>
-            </a:pPr>
-            <a:endParaRPr lang="de-DE" sz="800"/>
-          </a:p>
-        </p:txBody>
-      </p:sp>
-      <p:pic>
-        <p:nvPicPr>
-          <p:cNvPr id="43" name="Grafik 42">
-            <a:extLst>
-              <a:ext uri="{FF2B5EF4-FFF2-40B4-BE49-F238E27FC236}">
-                <a16:creationId xmlns:a16="http://schemas.microsoft.com/office/drawing/2014/main" id="{8D0099E2-2E76-AD23-470B-45BF3CB638F0}"/>
-              </a:ext>
-            </a:extLst>
-          </p:cNvPr>
-          <p:cNvPicPr>
-            <a:picLocks noChangeAspect="1"/>
-          </p:cNvPicPr>
-          <p:nvPr/>
-        </p:nvPicPr>
-        <p:blipFill>
-          <a:blip r:embed="rId2"/>
-          <a:stretch>
-            <a:fillRect/>
-          </a:stretch>
-        </p:blipFill>
-        <p:spPr>
-          <a:xfrm>
-            <a:off x="8384538" y="4835723"/>
-            <a:ext cx="166165" cy="174914"/>
-          </a:xfrm>
-          <a:prstGeom prst="rect">
-            <a:avLst/>
-          </a:prstGeom>
-        </p:spPr>
-      </p:pic>
-      <p:sp>
-        <p:nvSpPr>
-          <p:cNvPr id="44" name="Rechteck 43">
-            <a:extLst>
-              <a:ext uri="{FF2B5EF4-FFF2-40B4-BE49-F238E27FC236}">
-                <a16:creationId xmlns:a16="http://schemas.microsoft.com/office/drawing/2014/main" id="{EA6EFE08-8623-3C92-521A-E62587924E1F}"/>
-              </a:ext>
-            </a:extLst>
-          </p:cNvPr>
-          <p:cNvSpPr/>
-          <p:nvPr/>
-        </p:nvSpPr>
-        <p:spPr>
-          <a:xfrm>
-            <a:off x="8498996" y="5010637"/>
-            <a:ext cx="638710" cy="419100"/>
-          </a:xfrm>
-          <a:prstGeom prst="rect">
-            <a:avLst/>
-          </a:prstGeom>
-        </p:spPr>
-        <p:style>
-          <a:lnRef idx="2">
-            <a:schemeClr val="accent1">
-              <a:shade val="15000"/>
-            </a:schemeClr>
-          </a:lnRef>
-          <a:fillRef idx="1">
-            <a:schemeClr val="accent1"/>
-          </a:fillRef>
-          <a:effectRef idx="0">
-            <a:schemeClr val="accent1"/>
-          </a:effectRef>
-          <a:fontRef idx="minor">
-            <a:schemeClr val="lt1"/>
-          </a:fontRef>
-        </p:style>
-        <p:txBody>
-          <a:bodyPr rtlCol="0" anchor="t"/>
-          <a:lstStyle/>
-          <a:p>
-            <a:pPr algn="r">
-              <a:tabLst>
-                <a:tab pos="36000" algn="l"/>
-              </a:tabLst>
-            </a:pPr>
-            <a:endParaRPr lang="de-DE" sz="800"/>
-          </a:p>
-        </p:txBody>
-      </p:sp>
-      <p:pic>
-        <p:nvPicPr>
-          <p:cNvPr id="45" name="Grafik 44">
-            <a:extLst>
-              <a:ext uri="{FF2B5EF4-FFF2-40B4-BE49-F238E27FC236}">
-                <a16:creationId xmlns:a16="http://schemas.microsoft.com/office/drawing/2014/main" id="{9320FA18-5E00-08C4-D1B1-9198B35B64B6}"/>
-              </a:ext>
-            </a:extLst>
-          </p:cNvPr>
-          <p:cNvPicPr>
-            <a:picLocks noChangeAspect="1"/>
-          </p:cNvPicPr>
-          <p:nvPr/>
-        </p:nvPicPr>
-        <p:blipFill>
-          <a:blip r:embed="rId2"/>
-          <a:stretch>
-            <a:fillRect/>
-          </a:stretch>
-        </p:blipFill>
-        <p:spPr>
-          <a:xfrm>
-            <a:off x="8560120" y="5075060"/>
-            <a:ext cx="166165" cy="174914"/>
-          </a:xfrm>
-          <a:prstGeom prst="rect">
-            <a:avLst/>
-          </a:prstGeom>
-        </p:spPr>
-      </p:pic>
-      <p:sp>
-        <p:nvSpPr>
-          <p:cNvPr id="46" name="Rechteck 45">
-            <a:extLst>
-              <a:ext uri="{FF2B5EF4-FFF2-40B4-BE49-F238E27FC236}">
-                <a16:creationId xmlns:a16="http://schemas.microsoft.com/office/drawing/2014/main" id="{FDA4DB3A-D86A-FC0E-4540-DF3D46895C02}"/>
-              </a:ext>
-            </a:extLst>
-          </p:cNvPr>
-          <p:cNvSpPr/>
-          <p:nvPr/>
-        </p:nvSpPr>
-        <p:spPr>
-          <a:xfrm>
-            <a:off x="8350910" y="4128104"/>
-            <a:ext cx="638710" cy="419100"/>
-          </a:xfrm>
-          <a:prstGeom prst="rect">
-            <a:avLst/>
-          </a:prstGeom>
-        </p:spPr>
-        <p:style>
-          <a:lnRef idx="2">
-            <a:schemeClr val="accent1">
-              <a:shade val="15000"/>
-            </a:schemeClr>
-          </a:lnRef>
-          <a:fillRef idx="1">
-            <a:schemeClr val="accent1"/>
-          </a:fillRef>
-          <a:effectRef idx="0">
-            <a:schemeClr val="accent1"/>
-          </a:effectRef>
-          <a:fontRef idx="minor">
-            <a:schemeClr val="lt1"/>
-          </a:fontRef>
-        </p:style>
-        <p:txBody>
-          <a:bodyPr rtlCol="0" anchor="t"/>
-          <a:lstStyle/>
-          <a:p>
-            <a:pPr algn="r">
-              <a:tabLst>
-                <a:tab pos="36000" algn="l"/>
-              </a:tabLst>
-            </a:pPr>
-            <a:endParaRPr lang="de-DE" sz="800"/>
-          </a:p>
-        </p:txBody>
-      </p:sp>
-      <p:pic>
-        <p:nvPicPr>
-          <p:cNvPr id="47" name="Grafik 46">
-            <a:extLst>
-              <a:ext uri="{FF2B5EF4-FFF2-40B4-BE49-F238E27FC236}">
-                <a16:creationId xmlns:a16="http://schemas.microsoft.com/office/drawing/2014/main" id="{79753B46-3760-CFFB-B858-92910CA7D77F}"/>
-              </a:ext>
-            </a:extLst>
-          </p:cNvPr>
-          <p:cNvPicPr>
-            <a:picLocks noChangeAspect="1"/>
-          </p:cNvPicPr>
-          <p:nvPr/>
-        </p:nvPicPr>
-        <p:blipFill>
-          <a:blip r:embed="rId2"/>
-          <a:stretch>
-            <a:fillRect/>
-          </a:stretch>
-        </p:blipFill>
-        <p:spPr>
-          <a:xfrm>
-            <a:off x="8427210" y="4207073"/>
-            <a:ext cx="166165" cy="174914"/>
-          </a:xfrm>
-          <a:prstGeom prst="rect">
-            <a:avLst/>
-          </a:prstGeom>
-        </p:spPr>
-      </p:pic>
-      <p:sp>
-        <p:nvSpPr>
-          <p:cNvPr id="48" name="Rechteck 47">
-            <a:extLst>
-              <a:ext uri="{FF2B5EF4-FFF2-40B4-BE49-F238E27FC236}">
-                <a16:creationId xmlns:a16="http://schemas.microsoft.com/office/drawing/2014/main" id="{71BCDD80-7A46-50D8-092A-7DDBF641E7ED}"/>
-              </a:ext>
-            </a:extLst>
-          </p:cNvPr>
-          <p:cNvSpPr/>
-          <p:nvPr/>
-        </p:nvSpPr>
-        <p:spPr>
-          <a:xfrm>
-            <a:off x="8541668" y="4381987"/>
-            <a:ext cx="638710" cy="419100"/>
-          </a:xfrm>
-          <a:prstGeom prst="rect">
-            <a:avLst/>
-          </a:prstGeom>
-        </p:spPr>
-        <p:style>
-          <a:lnRef idx="2">
-            <a:schemeClr val="accent1">
-              <a:shade val="15000"/>
-            </a:schemeClr>
-          </a:lnRef>
-          <a:fillRef idx="1">
-            <a:schemeClr val="accent1"/>
-          </a:fillRef>
-          <a:effectRef idx="0">
-            <a:schemeClr val="accent1"/>
-          </a:effectRef>
-          <a:fontRef idx="minor">
-            <a:schemeClr val="lt1"/>
-          </a:fontRef>
-        </p:style>
-        <p:txBody>
-          <a:bodyPr rtlCol="0" anchor="t"/>
-          <a:lstStyle/>
-          <a:p>
-            <a:pPr algn="r">
-              <a:tabLst>
-                <a:tab pos="36000" algn="l"/>
-              </a:tabLst>
-            </a:pPr>
-            <a:endParaRPr lang="de-DE" sz="800"/>
-          </a:p>
-        </p:txBody>
-      </p:sp>
-      <p:pic>
-        <p:nvPicPr>
-          <p:cNvPr id="49" name="Grafik 48">
-            <a:extLst>
-              <a:ext uri="{FF2B5EF4-FFF2-40B4-BE49-F238E27FC236}">
-                <a16:creationId xmlns:a16="http://schemas.microsoft.com/office/drawing/2014/main" id="{F30FB4E0-9047-2FC9-990C-7F49073431E6}"/>
-              </a:ext>
-            </a:extLst>
-          </p:cNvPr>
-          <p:cNvPicPr>
-            <a:picLocks noChangeAspect="1"/>
-          </p:cNvPicPr>
-          <p:nvPr/>
-        </p:nvPicPr>
-        <p:blipFill>
-          <a:blip r:embed="rId2"/>
-          <a:stretch>
-            <a:fillRect/>
-          </a:stretch>
-        </p:blipFill>
-        <p:spPr>
-          <a:xfrm>
-            <a:off x="8602792" y="4446410"/>
-            <a:ext cx="166165" cy="174914"/>
-          </a:xfrm>
-          <a:prstGeom prst="rect">
-            <a:avLst/>
-          </a:prstGeom>
-        </p:spPr>
-      </p:pic>
-      <p:sp>
-        <p:nvSpPr>
-          <p:cNvPr id="50" name="Textfeld 49">
-            <a:extLst>
-              <a:ext uri="{FF2B5EF4-FFF2-40B4-BE49-F238E27FC236}">
-                <a16:creationId xmlns:a16="http://schemas.microsoft.com/office/drawing/2014/main" id="{8A6152E2-D527-62AF-329F-BE5199B5A685}"/>
-              </a:ext>
-            </a:extLst>
-          </p:cNvPr>
-          <p:cNvSpPr txBox="1"/>
-          <p:nvPr/>
-        </p:nvSpPr>
-        <p:spPr>
-          <a:xfrm>
-            <a:off x="7615062" y="5698010"/>
-            <a:ext cx="3028576" cy="276999"/>
-          </a:xfrm>
-          <a:prstGeom prst="rect">
-            <a:avLst/>
-          </a:prstGeom>
-          <a:noFill/>
-        </p:spPr>
-        <p:txBody>
-          <a:bodyPr wrap="square" rtlCol="0">
-            <a:spAutoFit/>
-          </a:bodyPr>
-          <a:lstStyle/>
-          <a:p>
-            <a:pPr algn="ctr"/>
-            <a:r>
-              <a:rPr lang="de-DE" sz="1200"/>
-              <a:t>Modules for implementing the TargetState</a:t>
-            </a:r>
-          </a:p>
-        </p:txBody>
-      </p:sp>
-      <p:cxnSp>
-        <p:nvCxnSpPr>
-          <p:cNvPr id="51" name="Gerade Verbindung mit Pfeil 50">
-            <a:extLst>
-              <a:ext uri="{FF2B5EF4-FFF2-40B4-BE49-F238E27FC236}">
-                <a16:creationId xmlns:a16="http://schemas.microsoft.com/office/drawing/2014/main" id="{7BBAD315-E803-8AD8-F507-559315369AF0}"/>
-              </a:ext>
-            </a:extLst>
-          </p:cNvPr>
-          <p:cNvCxnSpPr>
-            <a:cxnSpLocks/>
-          </p:cNvCxnSpPr>
-          <p:nvPr/>
-        </p:nvCxnSpPr>
-        <p:spPr>
-          <a:xfrm>
-            <a:off x="9211668" y="4483151"/>
-            <a:ext cx="2880000" cy="0"/>
-          </a:xfrm>
-          <a:prstGeom prst="straightConnector1">
-            <a:avLst/>
-          </a:prstGeom>
-          <a:ln>
-            <a:tailEnd type="triangle"/>
-          </a:ln>
-        </p:spPr>
-        <p:style>
-          <a:lnRef idx="2">
-            <a:schemeClr val="accent1"/>
-          </a:lnRef>
-          <a:fillRef idx="0">
-            <a:schemeClr val="accent1"/>
-          </a:fillRef>
-          <a:effectRef idx="1">
-            <a:schemeClr val="accent1"/>
-          </a:effectRef>
-          <a:fontRef idx="minor">
-            <a:schemeClr val="tx1"/>
-          </a:fontRef>
-        </p:style>
-      </p:cxnSp>
-      <p:cxnSp>
-        <p:nvCxnSpPr>
-          <p:cNvPr id="52" name="Gerade Verbindung mit Pfeil 51">
-            <a:extLst>
-              <a:ext uri="{FF2B5EF4-FFF2-40B4-BE49-F238E27FC236}">
-                <a16:creationId xmlns:a16="http://schemas.microsoft.com/office/drawing/2014/main" id="{B15CF59D-D0AF-C7CC-3C94-FB6D305D84E6}"/>
-              </a:ext>
-            </a:extLst>
-          </p:cNvPr>
-          <p:cNvCxnSpPr>
-            <a:cxnSpLocks/>
-          </p:cNvCxnSpPr>
-          <p:nvPr/>
-        </p:nvCxnSpPr>
-        <p:spPr>
-          <a:xfrm flipH="1" flipV="1">
-            <a:off x="9211668" y="4592468"/>
-            <a:ext cx="2880000" cy="8813"/>
-          </a:xfrm>
-          <a:prstGeom prst="straightConnector1">
-            <a:avLst/>
-          </a:prstGeom>
-          <a:ln>
-            <a:prstDash val="dash"/>
-            <a:tailEnd type="triangle"/>
-          </a:ln>
-        </p:spPr>
-        <p:style>
-          <a:lnRef idx="2">
-            <a:schemeClr val="accent1"/>
-          </a:lnRef>
-          <a:fillRef idx="0">
-            <a:schemeClr val="accent1"/>
-          </a:fillRef>
-          <a:effectRef idx="1">
-            <a:schemeClr val="accent1"/>
-          </a:effectRef>
-          <a:fontRef idx="minor">
-            <a:schemeClr val="tx1"/>
-          </a:fontRef>
-        </p:style>
-      </p:cxnSp>
-      <p:sp>
-        <p:nvSpPr>
-          <p:cNvPr id="55" name="Rechteck 54">
-            <a:extLst>
-              <a:ext uri="{FF2B5EF4-FFF2-40B4-BE49-F238E27FC236}">
-                <a16:creationId xmlns:a16="http://schemas.microsoft.com/office/drawing/2014/main" id="{998CEDEB-E815-0B9D-F828-05A7711734B2}"/>
-              </a:ext>
-            </a:extLst>
-          </p:cNvPr>
-          <p:cNvSpPr/>
-          <p:nvPr/>
-        </p:nvSpPr>
-        <p:spPr>
-          <a:xfrm>
-            <a:off x="3630541" y="4293321"/>
-            <a:ext cx="638710" cy="419100"/>
-          </a:xfrm>
-          <a:prstGeom prst="rect">
-            <a:avLst/>
-          </a:prstGeom>
-        </p:spPr>
-        <p:style>
-          <a:lnRef idx="2">
-            <a:schemeClr val="accent1">
-              <a:shade val="15000"/>
-            </a:schemeClr>
-          </a:lnRef>
-          <a:fillRef idx="1">
-            <a:schemeClr val="accent1"/>
-          </a:fillRef>
-          <a:effectRef idx="0">
-            <a:schemeClr val="accent1"/>
-          </a:effectRef>
-          <a:fontRef idx="minor">
-            <a:schemeClr val="lt1"/>
-          </a:fontRef>
-        </p:style>
-        <p:txBody>
-          <a:bodyPr rtlCol="0" anchor="t"/>
-          <a:lstStyle/>
-          <a:p>
-            <a:pPr algn="r">
-              <a:tabLst>
-                <a:tab pos="36000" algn="l"/>
-              </a:tabLst>
-            </a:pPr>
-            <a:endParaRPr lang="de-DE" sz="800"/>
-          </a:p>
-        </p:txBody>
-      </p:sp>
-      <p:pic>
-        <p:nvPicPr>
-          <p:cNvPr id="56" name="Grafik 55">
-            <a:extLst>
-              <a:ext uri="{FF2B5EF4-FFF2-40B4-BE49-F238E27FC236}">
-                <a16:creationId xmlns:a16="http://schemas.microsoft.com/office/drawing/2014/main" id="{78BFDC2D-D878-BE1D-4E34-51802A5909AA}"/>
-              </a:ext>
-            </a:extLst>
-          </p:cNvPr>
-          <p:cNvPicPr>
-            <a:picLocks noChangeAspect="1"/>
-          </p:cNvPicPr>
-          <p:nvPr/>
-        </p:nvPicPr>
-        <p:blipFill>
-          <a:blip r:embed="rId2"/>
-          <a:stretch>
-            <a:fillRect/>
-          </a:stretch>
-        </p:blipFill>
-        <p:spPr>
-          <a:xfrm>
-            <a:off x="3706841" y="4372290"/>
-            <a:ext cx="166165" cy="174914"/>
-          </a:xfrm>
-          <a:prstGeom prst="rect">
-            <a:avLst/>
-          </a:prstGeom>
-        </p:spPr>
-      </p:pic>
-      <p:sp>
-        <p:nvSpPr>
-          <p:cNvPr id="57" name="Rechteck 56">
-            <a:extLst>
-              <a:ext uri="{FF2B5EF4-FFF2-40B4-BE49-F238E27FC236}">
-                <a16:creationId xmlns:a16="http://schemas.microsoft.com/office/drawing/2014/main" id="{F1661307-0A5B-5E08-2177-0EC27A984C77}"/>
-              </a:ext>
-            </a:extLst>
-          </p:cNvPr>
-          <p:cNvSpPr/>
-          <p:nvPr/>
-        </p:nvSpPr>
-        <p:spPr>
-          <a:xfrm>
-            <a:off x="3821299" y="4547204"/>
-            <a:ext cx="638710" cy="419100"/>
-          </a:xfrm>
-          <a:prstGeom prst="rect">
-            <a:avLst/>
-          </a:prstGeom>
-        </p:spPr>
-        <p:style>
-          <a:lnRef idx="2">
-            <a:schemeClr val="accent1">
-              <a:shade val="15000"/>
-            </a:schemeClr>
-          </a:lnRef>
-          <a:fillRef idx="1">
-            <a:schemeClr val="accent1"/>
-          </a:fillRef>
-          <a:effectRef idx="0">
-            <a:schemeClr val="accent1"/>
-          </a:effectRef>
-          <a:fontRef idx="minor">
-            <a:schemeClr val="lt1"/>
-          </a:fontRef>
-        </p:style>
-        <p:txBody>
-          <a:bodyPr rtlCol="0" anchor="t"/>
-          <a:lstStyle/>
-          <a:p>
-            <a:pPr algn="r">
-              <a:tabLst>
-                <a:tab pos="36000" algn="l"/>
-              </a:tabLst>
-            </a:pPr>
-            <a:endParaRPr lang="de-DE" sz="800"/>
-          </a:p>
-        </p:txBody>
-      </p:sp>
-      <p:pic>
-        <p:nvPicPr>
-          <p:cNvPr id="58" name="Grafik 57">
-            <a:extLst>
-              <a:ext uri="{FF2B5EF4-FFF2-40B4-BE49-F238E27FC236}">
-                <a16:creationId xmlns:a16="http://schemas.microsoft.com/office/drawing/2014/main" id="{1634BDF2-1E6E-2CB9-1179-2AFB1196439F}"/>
-              </a:ext>
-            </a:extLst>
-          </p:cNvPr>
-          <p:cNvPicPr>
-            <a:picLocks noChangeAspect="1"/>
-          </p:cNvPicPr>
-          <p:nvPr/>
-        </p:nvPicPr>
-        <p:blipFill>
-          <a:blip r:embed="rId2"/>
-          <a:stretch>
-            <a:fillRect/>
-          </a:stretch>
-        </p:blipFill>
-        <p:spPr>
-          <a:xfrm>
-            <a:off x="3882423" y="4611627"/>
-            <a:ext cx="166165" cy="174914"/>
-          </a:xfrm>
-          <a:prstGeom prst="rect">
-            <a:avLst/>
-          </a:prstGeom>
-        </p:spPr>
-      </p:pic>
-      <p:sp>
-        <p:nvSpPr>
-          <p:cNvPr id="59" name="Textfeld 58">
-            <a:extLst>
-              <a:ext uri="{FF2B5EF4-FFF2-40B4-BE49-F238E27FC236}">
-                <a16:creationId xmlns:a16="http://schemas.microsoft.com/office/drawing/2014/main" id="{0E0A5B8A-597D-2E22-7922-AA99783CD72E}"/>
-              </a:ext>
-            </a:extLst>
-          </p:cNvPr>
-          <p:cNvSpPr txBox="1"/>
-          <p:nvPr/>
-        </p:nvSpPr>
-        <p:spPr>
-          <a:xfrm>
-            <a:off x="2754963" y="5698010"/>
-            <a:ext cx="3028576" cy="276999"/>
-          </a:xfrm>
-          <a:prstGeom prst="rect">
-            <a:avLst/>
-          </a:prstGeom>
-          <a:noFill/>
-        </p:spPr>
-        <p:txBody>
-          <a:bodyPr wrap="square" rtlCol="0">
-            <a:spAutoFit/>
-          </a:bodyPr>
-          <a:lstStyle/>
-          <a:p>
-            <a:pPr algn="ctr"/>
-            <a:r>
-              <a:rPr lang="de-DE" sz="1200"/>
-              <a:t>Modules for correcting the TargetState</a:t>
-            </a:r>
-          </a:p>
-        </p:txBody>
-      </p:sp>
     </p:spTree>
     <p:extLst>
       <p:ext uri="{BB962C8B-B14F-4D97-AF65-F5344CB8AC3E}">
@@ -11625,7 +16414,7 @@
 </p:sld>
 </file>
 
-<file path=ppt/slides/slide3.xml><?xml version="1.0" encoding="utf-8"?>
+<file path=ppt/slides/slide5.xml><?xml version="1.0" encoding="utf-8"?>
 <p:sld xmlns:a="http://schemas.openxmlformats.org/drawingml/2006/main" xmlns:r="http://schemas.openxmlformats.org/officeDocument/2006/relationships" xmlns:p="http://schemas.openxmlformats.org/presentationml/2006/main">
   <p:cSld>
     <p:spTree>
@@ -18375,7 +23164,7 @@
 </p:sld>
 </file>
 
-<file path=ppt/slides/slide4.xml><?xml version="1.0" encoding="utf-8"?>
+<file path=ppt/slides/slide6.xml><?xml version="1.0" encoding="utf-8"?>
 <p:sld xmlns:a="http://schemas.openxmlformats.org/drawingml/2006/main" xmlns:r="http://schemas.openxmlformats.org/officeDocument/2006/relationships" xmlns:p="http://schemas.openxmlformats.org/presentationml/2006/main">
   <p:cSld>
     <p:spTree>
@@ -23626,7 +28415,7 @@
 </p:sld>
 </file>
 
-<file path=ppt/slides/slide5.xml><?xml version="1.0" encoding="utf-8"?>
+<file path=ppt/slides/slide7.xml><?xml version="1.0" encoding="utf-8"?>
 <p:sld xmlns:a="http://schemas.openxmlformats.org/drawingml/2006/main" xmlns:r="http://schemas.openxmlformats.org/officeDocument/2006/relationships" xmlns:p="http://schemas.openxmlformats.org/presentationml/2006/main">
   <p:cSld>
     <p:spTree>
@@ -33017,7 +37806,7 @@
 </p:sld>
 </file>
 
-<file path=ppt/slides/slide6.xml><?xml version="1.0" encoding="utf-8"?>
+<file path=ppt/slides/slide8.xml><?xml version="1.0" encoding="utf-8"?>
 <p:sld xmlns:a="http://schemas.openxmlformats.org/drawingml/2006/main" xmlns:r="http://schemas.openxmlformats.org/officeDocument/2006/relationships" xmlns:p="http://schemas.openxmlformats.org/presentationml/2006/main">
   <p:cSld>
     <p:spTree>
